--- a/exports/pptx/lessons/middle-module-07-eleven-multiplication/day-01-hook.pptx
+++ b/exports/pptx/lessons/middle-module-07-eleven-multiplication/day-01-hook.pptx
@@ -19,9 +19,16 @@
     <p:sldId id="267" r:id="rId13"/>
     <p:sldId id="268" r:id="rId14"/>
     <p:sldId id="269" r:id="rId15"/>
+    <p:sldId id="270" r:id="rId16"/>
+    <p:sldId id="271" r:id="rId17"/>
+    <p:sldId id="272" r:id="rId18"/>
+    <p:sldId id="273" r:id="rId19"/>
+    <p:sldId id="274" r:id="rId20"/>
+    <p:sldId id="275" r:id="rId21"/>
+    <p:sldId id="276" r:id="rId22"/>
   </p:sldIdLst>
   <p:notesMasterIdLst>
-    <p:notesMasterId r:id="rId16"/>
+    <p:notesMasterId r:id="rId23"/>
   </p:notesMasterIdLst>
   <p:sldSz cx="9144000" cy="5143500"/>
   <p:notesSz cx="5143500" cy="9144000"/>
@@ -997,6 +1004,446 @@
 </p:notes>
 </file>
 
+<file path=ppt/notesSlides/notesSlide15.xml><?xml version="1.0" encoding="utf-8"?>
+<p:notes xmlns:a="http://schemas.openxmlformats.org/drawingml/2006/main" xmlns:r="http://schemas.openxmlformats.org/officeDocument/2006/relationships" xmlns:p="http://schemas.openxmlformats.org/presentationml/2006/main">
+  <p:cSld>
+    <p:spTree>
+      <p:nvGrpSpPr>
+        <p:cNvPr id="1" name=""/>
+        <p:cNvGrpSpPr/>
+        <p:nvPr/>
+      </p:nvGrpSpPr>
+      <p:grpSpPr>
+        <a:xfrm>
+          <a:off x="0" y="0"/>
+          <a:ext cx="0" cy="0"/>
+          <a:chOff x="0" y="0"/>
+          <a:chExt cx="0" cy="0"/>
+        </a:xfrm>
+      </p:grpSpPr>
+      <p:sp>
+        <p:nvSpPr>
+          <p:cNvPr id="2" name="Slide Image Placeholder 1"/>
+          <p:cNvSpPr>
+            <a:spLocks noGrp="1" noRot="1" noChangeAspect="1"/>
+          </p:cNvSpPr>
+          <p:nvPr>
+            <p:ph type="sldImg"/>
+          </p:nvPr>
+        </p:nvSpPr>
+        <p:spPr/>
+      </p:sp>
+      <p:sp>
+        <p:nvSpPr>
+          <p:cNvPr id="3" name="Notes Placeholder 2"/>
+          <p:cNvSpPr>
+            <a:spLocks noGrp="1"/>
+          </p:cNvSpPr>
+          <p:nvPr>
+            <p:ph type="body" idx="1"/>
+          </p:nvPr>
+        </p:nvSpPr>
+        <p:spPr/>
+        <p:txBody>
+          <a:bodyPr/>
+          <a:lstStyle/>
+          <a:p>
+            <a:r>
+              <a:rPr lang="en-US" dirty="0"/>
+              <a:t/>
+            </a:r>
+            <a:endParaRPr lang="en-US" dirty="0"/>
+          </a:p>
+        </p:txBody>
+      </p:sp>
+      <p:sp>
+        <p:nvSpPr>
+          <p:cNvPr id="4" name="Slide Number Placeholder 3"/>
+          <p:cNvSpPr>
+            <a:spLocks noGrp="1"/>
+          </p:cNvSpPr>
+          <p:nvPr>
+            <p:ph type="sldNum" sz="quarter" idx="10"/>
+          </p:nvPr>
+        </p:nvSpPr>
+        <p:spPr/>
+        <p:txBody>
+          <a:bodyPr/>
+          <a:lstStyle/>
+          <a:p>
+            <a:fld id="{F7021451-1387-4CA6-816F-3879F97B5CBC}" type="slidenum">
+              <a:rPr lang="en-US"/>
+              <a:t>15</a:t>
+            </a:fld>
+            <a:endParaRPr lang="en-US"/>
+          </a:p>
+        </p:txBody>
+      </p:sp>
+    </p:spTree>
+    <p:extLst>
+      <p:ext uri="{BB962C8B-B14F-4D97-AF65-F5344CB8AC3E}">
+        <p14:creationId xmlns:p14="http://schemas.microsoft.com/office/powerpoint/2010/main" val="1024086991"/>
+      </p:ext>
+    </p:extLst>
+  </p:cSld>
+  <p:clrMapOvr>
+    <a:masterClrMapping/>
+  </p:clrMapOvr>
+</p:notes>
+</file>
+
+<file path=ppt/notesSlides/notesSlide16.xml><?xml version="1.0" encoding="utf-8"?>
+<p:notes xmlns:a="http://schemas.openxmlformats.org/drawingml/2006/main" xmlns:r="http://schemas.openxmlformats.org/officeDocument/2006/relationships" xmlns:p="http://schemas.openxmlformats.org/presentationml/2006/main">
+  <p:cSld>
+    <p:spTree>
+      <p:nvGrpSpPr>
+        <p:cNvPr id="1" name=""/>
+        <p:cNvGrpSpPr/>
+        <p:nvPr/>
+      </p:nvGrpSpPr>
+      <p:grpSpPr>
+        <a:xfrm>
+          <a:off x="0" y="0"/>
+          <a:ext cx="0" cy="0"/>
+          <a:chOff x="0" y="0"/>
+          <a:chExt cx="0" cy="0"/>
+        </a:xfrm>
+      </p:grpSpPr>
+      <p:sp>
+        <p:nvSpPr>
+          <p:cNvPr id="2" name="Slide Image Placeholder 1"/>
+          <p:cNvSpPr>
+            <a:spLocks noGrp="1" noRot="1" noChangeAspect="1"/>
+          </p:cNvSpPr>
+          <p:nvPr>
+            <p:ph type="sldImg"/>
+          </p:nvPr>
+        </p:nvSpPr>
+        <p:spPr/>
+      </p:sp>
+      <p:sp>
+        <p:nvSpPr>
+          <p:cNvPr id="3" name="Notes Placeholder 2"/>
+          <p:cNvSpPr>
+            <a:spLocks noGrp="1"/>
+          </p:cNvSpPr>
+          <p:nvPr>
+            <p:ph type="body" idx="1"/>
+          </p:nvPr>
+        </p:nvSpPr>
+        <p:spPr/>
+        <p:txBody>
+          <a:bodyPr/>
+          <a:lstStyle/>
+          <a:p>
+            <a:r>
+              <a:rPr lang="en-US" dirty="0"/>
+              <a:t/>
+            </a:r>
+            <a:endParaRPr lang="en-US" dirty="0"/>
+          </a:p>
+        </p:txBody>
+      </p:sp>
+      <p:sp>
+        <p:nvSpPr>
+          <p:cNvPr id="4" name="Slide Number Placeholder 3"/>
+          <p:cNvSpPr>
+            <a:spLocks noGrp="1"/>
+          </p:cNvSpPr>
+          <p:nvPr>
+            <p:ph type="sldNum" sz="quarter" idx="10"/>
+          </p:nvPr>
+        </p:nvSpPr>
+        <p:spPr/>
+        <p:txBody>
+          <a:bodyPr/>
+          <a:lstStyle/>
+          <a:p>
+            <a:fld id="{F7021451-1387-4CA6-816F-3879F97B5CBC}" type="slidenum">
+              <a:rPr lang="en-US"/>
+              <a:t>16</a:t>
+            </a:fld>
+            <a:endParaRPr lang="en-US"/>
+          </a:p>
+        </p:txBody>
+      </p:sp>
+    </p:spTree>
+    <p:extLst>
+      <p:ext uri="{BB962C8B-B14F-4D97-AF65-F5344CB8AC3E}">
+        <p14:creationId xmlns:p14="http://schemas.microsoft.com/office/powerpoint/2010/main" val="1024086991"/>
+      </p:ext>
+    </p:extLst>
+  </p:cSld>
+  <p:clrMapOvr>
+    <a:masterClrMapping/>
+  </p:clrMapOvr>
+</p:notes>
+</file>
+
+<file path=ppt/notesSlides/notesSlide17.xml><?xml version="1.0" encoding="utf-8"?>
+<p:notes xmlns:a="http://schemas.openxmlformats.org/drawingml/2006/main" xmlns:r="http://schemas.openxmlformats.org/officeDocument/2006/relationships" xmlns:p="http://schemas.openxmlformats.org/presentationml/2006/main">
+  <p:cSld>
+    <p:spTree>
+      <p:nvGrpSpPr>
+        <p:cNvPr id="1" name=""/>
+        <p:cNvGrpSpPr/>
+        <p:nvPr/>
+      </p:nvGrpSpPr>
+      <p:grpSpPr>
+        <a:xfrm>
+          <a:off x="0" y="0"/>
+          <a:ext cx="0" cy="0"/>
+          <a:chOff x="0" y="0"/>
+          <a:chExt cx="0" cy="0"/>
+        </a:xfrm>
+      </p:grpSpPr>
+      <p:sp>
+        <p:nvSpPr>
+          <p:cNvPr id="2" name="Slide Image Placeholder 1"/>
+          <p:cNvSpPr>
+            <a:spLocks noGrp="1" noRot="1" noChangeAspect="1"/>
+          </p:cNvSpPr>
+          <p:nvPr>
+            <p:ph type="sldImg"/>
+          </p:nvPr>
+        </p:nvSpPr>
+        <p:spPr/>
+      </p:sp>
+      <p:sp>
+        <p:nvSpPr>
+          <p:cNvPr id="3" name="Notes Placeholder 2"/>
+          <p:cNvSpPr>
+            <a:spLocks noGrp="1"/>
+          </p:cNvSpPr>
+          <p:nvPr>
+            <p:ph type="body" idx="1"/>
+          </p:nvPr>
+        </p:nvSpPr>
+        <p:spPr/>
+        <p:txBody>
+          <a:bodyPr/>
+          <a:lstStyle/>
+          <a:p>
+            <a:r>
+              <a:rPr lang="en-US" dirty="0"/>
+              <a:t/>
+            </a:r>
+            <a:endParaRPr lang="en-US" dirty="0"/>
+          </a:p>
+        </p:txBody>
+      </p:sp>
+      <p:sp>
+        <p:nvSpPr>
+          <p:cNvPr id="4" name="Slide Number Placeholder 3"/>
+          <p:cNvSpPr>
+            <a:spLocks noGrp="1"/>
+          </p:cNvSpPr>
+          <p:nvPr>
+            <p:ph type="sldNum" sz="quarter" idx="10"/>
+          </p:nvPr>
+        </p:nvSpPr>
+        <p:spPr/>
+        <p:txBody>
+          <a:bodyPr/>
+          <a:lstStyle/>
+          <a:p>
+            <a:fld id="{F7021451-1387-4CA6-816F-3879F97B5CBC}" type="slidenum">
+              <a:rPr lang="en-US"/>
+              <a:t>17</a:t>
+            </a:fld>
+            <a:endParaRPr lang="en-US"/>
+          </a:p>
+        </p:txBody>
+      </p:sp>
+    </p:spTree>
+    <p:extLst>
+      <p:ext uri="{BB962C8B-B14F-4D97-AF65-F5344CB8AC3E}">
+        <p14:creationId xmlns:p14="http://schemas.microsoft.com/office/powerpoint/2010/main" val="1024086991"/>
+      </p:ext>
+    </p:extLst>
+  </p:cSld>
+  <p:clrMapOvr>
+    <a:masterClrMapping/>
+  </p:clrMapOvr>
+</p:notes>
+</file>
+
+<file path=ppt/notesSlides/notesSlide18.xml><?xml version="1.0" encoding="utf-8"?>
+<p:notes xmlns:a="http://schemas.openxmlformats.org/drawingml/2006/main" xmlns:r="http://schemas.openxmlformats.org/officeDocument/2006/relationships" xmlns:p="http://schemas.openxmlformats.org/presentationml/2006/main">
+  <p:cSld>
+    <p:spTree>
+      <p:nvGrpSpPr>
+        <p:cNvPr id="1" name=""/>
+        <p:cNvGrpSpPr/>
+        <p:nvPr/>
+      </p:nvGrpSpPr>
+      <p:grpSpPr>
+        <a:xfrm>
+          <a:off x="0" y="0"/>
+          <a:ext cx="0" cy="0"/>
+          <a:chOff x="0" y="0"/>
+          <a:chExt cx="0" cy="0"/>
+        </a:xfrm>
+      </p:grpSpPr>
+      <p:sp>
+        <p:nvSpPr>
+          <p:cNvPr id="2" name="Slide Image Placeholder 1"/>
+          <p:cNvSpPr>
+            <a:spLocks noGrp="1" noRot="1" noChangeAspect="1"/>
+          </p:cNvSpPr>
+          <p:nvPr>
+            <p:ph type="sldImg"/>
+          </p:nvPr>
+        </p:nvSpPr>
+        <p:spPr/>
+      </p:sp>
+      <p:sp>
+        <p:nvSpPr>
+          <p:cNvPr id="3" name="Notes Placeholder 2"/>
+          <p:cNvSpPr>
+            <a:spLocks noGrp="1"/>
+          </p:cNvSpPr>
+          <p:nvPr>
+            <p:ph type="body" idx="1"/>
+          </p:nvPr>
+        </p:nvSpPr>
+        <p:spPr/>
+        <p:txBody>
+          <a:bodyPr/>
+          <a:lstStyle/>
+          <a:p>
+            <a:r>
+              <a:rPr lang="en-US" dirty="0"/>
+              <a:t/>
+            </a:r>
+            <a:endParaRPr lang="en-US" dirty="0"/>
+          </a:p>
+        </p:txBody>
+      </p:sp>
+      <p:sp>
+        <p:nvSpPr>
+          <p:cNvPr id="4" name="Slide Number Placeholder 3"/>
+          <p:cNvSpPr>
+            <a:spLocks noGrp="1"/>
+          </p:cNvSpPr>
+          <p:nvPr>
+            <p:ph type="sldNum" sz="quarter" idx="10"/>
+          </p:nvPr>
+        </p:nvSpPr>
+        <p:spPr/>
+        <p:txBody>
+          <a:bodyPr/>
+          <a:lstStyle/>
+          <a:p>
+            <a:fld id="{F7021451-1387-4CA6-816F-3879F97B5CBC}" type="slidenum">
+              <a:rPr lang="en-US"/>
+              <a:t>18</a:t>
+            </a:fld>
+            <a:endParaRPr lang="en-US"/>
+          </a:p>
+        </p:txBody>
+      </p:sp>
+    </p:spTree>
+    <p:extLst>
+      <p:ext uri="{BB962C8B-B14F-4D97-AF65-F5344CB8AC3E}">
+        <p14:creationId xmlns:p14="http://schemas.microsoft.com/office/powerpoint/2010/main" val="1024086991"/>
+      </p:ext>
+    </p:extLst>
+  </p:cSld>
+  <p:clrMapOvr>
+    <a:masterClrMapping/>
+  </p:clrMapOvr>
+</p:notes>
+</file>
+
+<file path=ppt/notesSlides/notesSlide19.xml><?xml version="1.0" encoding="utf-8"?>
+<p:notes xmlns:a="http://schemas.openxmlformats.org/drawingml/2006/main" xmlns:r="http://schemas.openxmlformats.org/officeDocument/2006/relationships" xmlns:p="http://schemas.openxmlformats.org/presentationml/2006/main">
+  <p:cSld>
+    <p:spTree>
+      <p:nvGrpSpPr>
+        <p:cNvPr id="1" name=""/>
+        <p:cNvGrpSpPr/>
+        <p:nvPr/>
+      </p:nvGrpSpPr>
+      <p:grpSpPr>
+        <a:xfrm>
+          <a:off x="0" y="0"/>
+          <a:ext cx="0" cy="0"/>
+          <a:chOff x="0" y="0"/>
+          <a:chExt cx="0" cy="0"/>
+        </a:xfrm>
+      </p:grpSpPr>
+      <p:sp>
+        <p:nvSpPr>
+          <p:cNvPr id="2" name="Slide Image Placeholder 1"/>
+          <p:cNvSpPr>
+            <a:spLocks noGrp="1" noRot="1" noChangeAspect="1"/>
+          </p:cNvSpPr>
+          <p:nvPr>
+            <p:ph type="sldImg"/>
+          </p:nvPr>
+        </p:nvSpPr>
+        <p:spPr/>
+      </p:sp>
+      <p:sp>
+        <p:nvSpPr>
+          <p:cNvPr id="3" name="Notes Placeholder 2"/>
+          <p:cNvSpPr>
+            <a:spLocks noGrp="1"/>
+          </p:cNvSpPr>
+          <p:nvPr>
+            <p:ph type="body" idx="1"/>
+          </p:nvPr>
+        </p:nvSpPr>
+        <p:spPr/>
+        <p:txBody>
+          <a:bodyPr/>
+          <a:lstStyle/>
+          <a:p>
+            <a:r>
+              <a:rPr lang="en-US" dirty="0"/>
+              <a:t/>
+            </a:r>
+            <a:endParaRPr lang="en-US" dirty="0"/>
+          </a:p>
+        </p:txBody>
+      </p:sp>
+      <p:sp>
+        <p:nvSpPr>
+          <p:cNvPr id="4" name="Slide Number Placeholder 3"/>
+          <p:cNvSpPr>
+            <a:spLocks noGrp="1"/>
+          </p:cNvSpPr>
+          <p:nvPr>
+            <p:ph type="sldNum" sz="quarter" idx="10"/>
+          </p:nvPr>
+        </p:nvSpPr>
+        <p:spPr/>
+        <p:txBody>
+          <a:bodyPr/>
+          <a:lstStyle/>
+          <a:p>
+            <a:fld id="{F7021451-1387-4CA6-816F-3879F97B5CBC}" type="slidenum">
+              <a:rPr lang="en-US"/>
+              <a:t>19</a:t>
+            </a:fld>
+            <a:endParaRPr lang="en-US"/>
+          </a:p>
+        </p:txBody>
+      </p:sp>
+    </p:spTree>
+    <p:extLst>
+      <p:ext uri="{BB962C8B-B14F-4D97-AF65-F5344CB8AC3E}">
+        <p14:creationId xmlns:p14="http://schemas.microsoft.com/office/powerpoint/2010/main" val="1024086991"/>
+      </p:ext>
+    </p:extLst>
+  </p:cSld>
+  <p:clrMapOvr>
+    <a:masterClrMapping/>
+  </p:clrMapOvr>
+</p:notes>
+</file>
+
 <file path=ppt/notesSlides/notesSlide2.xml><?xml version="1.0" encoding="utf-8"?>
 <p:notes xmlns:a="http://schemas.openxmlformats.org/drawingml/2006/main" xmlns:r="http://schemas.openxmlformats.org/officeDocument/2006/relationships" xmlns:p="http://schemas.openxmlformats.org/presentationml/2006/main">
   <p:cSld>
@@ -1067,6 +1514,182 @@
             <a:fld id="{F7021451-1387-4CA6-816F-3879F97B5CBC}" type="slidenum">
               <a:rPr lang="en-US"/>
               <a:t>2</a:t>
+            </a:fld>
+            <a:endParaRPr lang="en-US"/>
+          </a:p>
+        </p:txBody>
+      </p:sp>
+    </p:spTree>
+    <p:extLst>
+      <p:ext uri="{BB962C8B-B14F-4D97-AF65-F5344CB8AC3E}">
+        <p14:creationId xmlns:p14="http://schemas.microsoft.com/office/powerpoint/2010/main" val="1024086991"/>
+      </p:ext>
+    </p:extLst>
+  </p:cSld>
+  <p:clrMapOvr>
+    <a:masterClrMapping/>
+  </p:clrMapOvr>
+</p:notes>
+</file>
+
+<file path=ppt/notesSlides/notesSlide20.xml><?xml version="1.0" encoding="utf-8"?>
+<p:notes xmlns:a="http://schemas.openxmlformats.org/drawingml/2006/main" xmlns:r="http://schemas.openxmlformats.org/officeDocument/2006/relationships" xmlns:p="http://schemas.openxmlformats.org/presentationml/2006/main">
+  <p:cSld>
+    <p:spTree>
+      <p:nvGrpSpPr>
+        <p:cNvPr id="1" name=""/>
+        <p:cNvGrpSpPr/>
+        <p:nvPr/>
+      </p:nvGrpSpPr>
+      <p:grpSpPr>
+        <a:xfrm>
+          <a:off x="0" y="0"/>
+          <a:ext cx="0" cy="0"/>
+          <a:chOff x="0" y="0"/>
+          <a:chExt cx="0" cy="0"/>
+        </a:xfrm>
+      </p:grpSpPr>
+      <p:sp>
+        <p:nvSpPr>
+          <p:cNvPr id="2" name="Slide Image Placeholder 1"/>
+          <p:cNvSpPr>
+            <a:spLocks noGrp="1" noRot="1" noChangeAspect="1"/>
+          </p:cNvSpPr>
+          <p:nvPr>
+            <p:ph type="sldImg"/>
+          </p:nvPr>
+        </p:nvSpPr>
+        <p:spPr/>
+      </p:sp>
+      <p:sp>
+        <p:nvSpPr>
+          <p:cNvPr id="3" name="Notes Placeholder 2"/>
+          <p:cNvSpPr>
+            <a:spLocks noGrp="1"/>
+          </p:cNvSpPr>
+          <p:nvPr>
+            <p:ph type="body" idx="1"/>
+          </p:nvPr>
+        </p:nvSpPr>
+        <p:spPr/>
+        <p:txBody>
+          <a:bodyPr/>
+          <a:lstStyle/>
+          <a:p>
+            <a:r>
+              <a:rPr lang="en-US" dirty="0"/>
+              <a:t/>
+            </a:r>
+            <a:endParaRPr lang="en-US" dirty="0"/>
+          </a:p>
+        </p:txBody>
+      </p:sp>
+      <p:sp>
+        <p:nvSpPr>
+          <p:cNvPr id="4" name="Slide Number Placeholder 3"/>
+          <p:cNvSpPr>
+            <a:spLocks noGrp="1"/>
+          </p:cNvSpPr>
+          <p:nvPr>
+            <p:ph type="sldNum" sz="quarter" idx="10"/>
+          </p:nvPr>
+        </p:nvSpPr>
+        <p:spPr/>
+        <p:txBody>
+          <a:bodyPr/>
+          <a:lstStyle/>
+          <a:p>
+            <a:fld id="{F7021451-1387-4CA6-816F-3879F97B5CBC}" type="slidenum">
+              <a:rPr lang="en-US"/>
+              <a:t>20</a:t>
+            </a:fld>
+            <a:endParaRPr lang="en-US"/>
+          </a:p>
+        </p:txBody>
+      </p:sp>
+    </p:spTree>
+    <p:extLst>
+      <p:ext uri="{BB962C8B-B14F-4D97-AF65-F5344CB8AC3E}">
+        <p14:creationId xmlns:p14="http://schemas.microsoft.com/office/powerpoint/2010/main" val="1024086991"/>
+      </p:ext>
+    </p:extLst>
+  </p:cSld>
+  <p:clrMapOvr>
+    <a:masterClrMapping/>
+  </p:clrMapOvr>
+</p:notes>
+</file>
+
+<file path=ppt/notesSlides/notesSlide21.xml><?xml version="1.0" encoding="utf-8"?>
+<p:notes xmlns:a="http://schemas.openxmlformats.org/drawingml/2006/main" xmlns:r="http://schemas.openxmlformats.org/officeDocument/2006/relationships" xmlns:p="http://schemas.openxmlformats.org/presentationml/2006/main">
+  <p:cSld>
+    <p:spTree>
+      <p:nvGrpSpPr>
+        <p:cNvPr id="1" name=""/>
+        <p:cNvGrpSpPr/>
+        <p:nvPr/>
+      </p:nvGrpSpPr>
+      <p:grpSpPr>
+        <a:xfrm>
+          <a:off x="0" y="0"/>
+          <a:ext cx="0" cy="0"/>
+          <a:chOff x="0" y="0"/>
+          <a:chExt cx="0" cy="0"/>
+        </a:xfrm>
+      </p:grpSpPr>
+      <p:sp>
+        <p:nvSpPr>
+          <p:cNvPr id="2" name="Slide Image Placeholder 1"/>
+          <p:cNvSpPr>
+            <a:spLocks noGrp="1" noRot="1" noChangeAspect="1"/>
+          </p:cNvSpPr>
+          <p:nvPr>
+            <p:ph type="sldImg"/>
+          </p:nvPr>
+        </p:nvSpPr>
+        <p:spPr/>
+      </p:sp>
+      <p:sp>
+        <p:nvSpPr>
+          <p:cNvPr id="3" name="Notes Placeholder 2"/>
+          <p:cNvSpPr>
+            <a:spLocks noGrp="1"/>
+          </p:cNvSpPr>
+          <p:nvPr>
+            <p:ph type="body" idx="1"/>
+          </p:nvPr>
+        </p:nvSpPr>
+        <p:spPr/>
+        <p:txBody>
+          <a:bodyPr/>
+          <a:lstStyle/>
+          <a:p>
+            <a:r>
+              <a:rPr lang="en-US" dirty="0"/>
+              <a:t/>
+            </a:r>
+            <a:endParaRPr lang="en-US" dirty="0"/>
+          </a:p>
+        </p:txBody>
+      </p:sp>
+      <p:sp>
+        <p:nvSpPr>
+          <p:cNvPr id="4" name="Slide Number Placeholder 3"/>
+          <p:cNvSpPr>
+            <a:spLocks noGrp="1"/>
+          </p:cNvSpPr>
+          <p:nvPr>
+            <p:ph type="sldNum" sz="quarter" idx="10"/>
+          </p:nvPr>
+        </p:nvSpPr>
+        <p:spPr/>
+        <p:txBody>
+          <a:bodyPr/>
+          <a:lstStyle/>
+          <a:p>
+            <a:fld id="{F7021451-1387-4CA6-816F-3879F97B5CBC}" type="slidenum">
+              <a:rPr lang="en-US"/>
+              <a:t>21</a:t>
             </a:fld>
             <a:endParaRPr lang="en-US"/>
           </a:p>
@@ -2344,102 +2967,6 @@
         </p:nvSpPr>
         <p:spPr>
           <a:xfrm>
-            <a:off x="406301" y="1223963"/>
-            <a:ext cx="8498026" cy="274290"/>
-          </a:xfrm>
-          <a:prstGeom prst="rect">
-            <a:avLst/>
-          </a:prstGeom>
-          <a:noFill/>
-          <a:ln/>
-        </p:spPr>
-        <p:txBody>
-          <a:bodyPr wrap="square" lIns="0" tIns="0" rIns="0" bIns="0" rtlCol="0" anchor="t"/>
-          <a:lstStyle/>
-          <a:p>
-            <a:pPr algn="l" indent="0" marL="0">
-              <a:lnSpc>
-                <a:spcPts val="2160"/>
-              </a:lnSpc>
-              <a:spcBef>
-                <a:spcPts val="600"/>
-              </a:spcBef>
-              <a:spcAft>
-                <a:spcPts val="800"/>
-              </a:spcAft>
-              <a:buNone/>
-            </a:pPr>
-            <a:r>
-              <a:rPr lang="en-US" sz="1800" b="1" dirty="0">
-                <a:solidFill>
-                  <a:srgbClr val="FE4447"/>
-                </a:solidFill>
-                <a:latin typeface="Georgia" pitchFamily="34" charset="0"/>
-                <a:ea typeface="Georgia" pitchFamily="34" charset="-122"/>
-                <a:cs typeface="Georgia" pitchFamily="34" charset="-120"/>
-              </a:rPr>
-              <a:t>Learning objective</a:t>
-            </a:r>
-            <a:endParaRPr lang="en-US" sz="1800" dirty="0"/>
-          </a:p>
-        </p:txBody>
-      </p:sp>
-      <p:sp>
-        <p:nvSpPr>
-          <p:cNvPr id="6" name="Text 4"/>
-          <p:cNvSpPr/>
-          <p:nvPr/>
-        </p:nvSpPr>
-        <p:spPr>
-          <a:xfrm>
-            <a:off x="406301" y="1637854"/>
-            <a:ext cx="8498026" cy="426541"/>
-          </a:xfrm>
-          <a:prstGeom prst="rect">
-            <a:avLst/>
-          </a:prstGeom>
-          <a:noFill/>
-          <a:ln/>
-        </p:spPr>
-        <p:txBody>
-          <a:bodyPr wrap="square" lIns="0" tIns="0" rIns="0" bIns="0" rtlCol="0" anchor="t"/>
-          <a:lstStyle/>
-          <a:p>
-            <a:pPr algn="l" indent="0" marL="0">
-              <a:lnSpc>
-                <a:spcPts val="1680"/>
-              </a:lnSpc>
-              <a:spcBef>
-                <a:spcPts val="300"/>
-              </a:spcBef>
-              <a:spcAft>
-                <a:spcPts val="300"/>
-              </a:spcAft>
-              <a:buNone/>
-            </a:pPr>
-            <a:r>
-              <a:rPr lang="en-US" sz="1200" dirty="0">
-                <a:solidFill>
-                  <a:srgbClr val="1C2833"/>
-                </a:solidFill>
-                <a:latin typeface="Arial" pitchFamily="34" charset="0"/>
-                <a:ea typeface="Arial" pitchFamily="34" charset="-122"/>
-                <a:cs typeface="Arial" pitchFamily="34" charset="-120"/>
-              </a:rPr>
-              <a:t>By the end of this lesson, students will compute any 2-digit × 11 product where the digit-sum is less than 10, in under 3 seconds, and will have recorded a personal baseline time for the same problem using standard long multiplication.</a:t>
-            </a:r>
-            <a:endParaRPr lang="en-US" sz="1200" dirty="0"/>
-          </a:p>
-        </p:txBody>
-      </p:sp>
-      <p:sp>
-        <p:nvSpPr>
-          <p:cNvPr id="7" name="Text 5"/>
-          <p:cNvSpPr/>
-          <p:nvPr/>
-        </p:nvSpPr>
-        <p:spPr>
-          <a:xfrm>
             <a:off x="406301" y="4434929"/>
             <a:ext cx="8498026" cy="213271"/>
           </a:xfrm>
@@ -2584,7 +3111,7 @@
                 <a:ea typeface="Georgia" pitchFamily="34" charset="-122"/>
                 <a:cs typeface="Georgia" pitchFamily="34" charset="-120"/>
               </a:rPr>
-              <a:t>Student-facing content</a:t>
+              <a:t>Teacher demonstration (12 min) — The trick (cont.)</a:t>
             </a:r>
             <a:endParaRPr lang="en-US" sz="1800" dirty="0"/>
           </a:p>
@@ -2599,7 +3126,7 @@
         <p:spPr>
           <a:xfrm>
             <a:off x="406301" y="883593"/>
-            <a:ext cx="8331398" cy="2112169"/>
+            <a:ext cx="8331398" cy="777627"/>
           </a:xfrm>
           <a:prstGeom prst="rect">
             <a:avLst/>
@@ -2628,16 +3155,16 @@
         </p:nvSpPr>
         <p:spPr>
           <a:xfrm>
-            <a:off x="434876" y="883593"/>
-            <a:ext cx="0" cy="2112169"/>
+            <a:off x="430113" y="883593"/>
+            <a:ext cx="0" cy="777627"/>
           </a:xfrm>
           <a:prstGeom prst="line">
             <a:avLst/>
           </a:prstGeom>
           <a:noFill/>
-          <a:ln w="57150">
+          <a:ln w="47625">
             <a:solidFill>
-              <a:srgbClr val="FE4447"/>
+              <a:srgbClr val="277884"/>
             </a:solidFill>
             <a:prstDash val="solid"/>
           </a:ln>
@@ -2651,8 +3178,8 @@
         </p:nvSpPr>
         <p:spPr>
           <a:xfrm>
-            <a:off x="692051" y="1074093"/>
-            <a:ext cx="7973389" cy="230981"/>
+            <a:off x="631627" y="1010543"/>
+            <a:ext cx="8086939" cy="174575"/>
           </a:xfrm>
           <a:prstGeom prst="rect">
             <a:avLst/>
@@ -2666,7 +3193,133 @@
           <a:p>
             <a:pPr algn="l" indent="0" marL="0">
               <a:lnSpc>
-                <a:spcPts val="1820"/>
+                <a:spcPts val="1375"/>
+              </a:lnSpc>
+              <a:buNone/>
+            </a:pPr>
+            <a:r>
+              <a:rPr lang="en-US" sz="1100" dirty="0">
+                <a:solidFill>
+                  <a:srgbClr val="1C2833"/>
+                </a:solidFill>
+                <a:latin typeface="Courier New" pitchFamily="34" charset="0"/>
+                <a:ea typeface="Courier New" pitchFamily="34" charset="-122"/>
+                <a:cs typeface="Courier New" pitchFamily="34" charset="-120"/>
+              </a:rPr>
+              <a:t>Step 1: Split:    2  _  3</a:t>
+            </a:r>
+            <a:endParaRPr lang="en-US" sz="1100" dirty="0"/>
+          </a:p>
+        </p:txBody>
+      </p:sp>
+      <p:sp>
+        <p:nvSpPr>
+          <p:cNvPr id="7" name="Text 5"/>
+          <p:cNvSpPr/>
+          <p:nvPr/>
+        </p:nvSpPr>
+        <p:spPr>
+          <a:xfrm>
+            <a:off x="631627" y="1185118"/>
+            <a:ext cx="8086939" cy="174575"/>
+          </a:xfrm>
+          <a:prstGeom prst="rect">
+            <a:avLst/>
+          </a:prstGeom>
+          <a:noFill/>
+          <a:ln/>
+        </p:spPr>
+        <p:txBody>
+          <a:bodyPr wrap="square" lIns="0" tIns="0" rIns="0" bIns="0" rtlCol="0" anchor="t"/>
+          <a:lstStyle/>
+          <a:p>
+            <a:pPr algn="l" indent="0" marL="0">
+              <a:lnSpc>
+                <a:spcPts val="1375"/>
+              </a:lnSpc>
+              <a:buNone/>
+            </a:pPr>
+            <a:r>
+              <a:rPr lang="en-US" sz="1100" dirty="0">
+                <a:solidFill>
+                  <a:srgbClr val="1C2833"/>
+                </a:solidFill>
+                <a:latin typeface="Courier New" pitchFamily="34" charset="0"/>
+                <a:ea typeface="Courier New" pitchFamily="34" charset="-122"/>
+                <a:cs typeface="Courier New" pitchFamily="34" charset="-120"/>
+              </a:rPr>
+              <a:t>Step 2: Add:      2 + 3 = 5</a:t>
+            </a:r>
+            <a:endParaRPr lang="en-US" sz="1100" dirty="0"/>
+          </a:p>
+        </p:txBody>
+      </p:sp>
+      <p:sp>
+        <p:nvSpPr>
+          <p:cNvPr id="8" name="Text 6"/>
+          <p:cNvSpPr/>
+          <p:nvPr/>
+        </p:nvSpPr>
+        <p:spPr>
+          <a:xfrm>
+            <a:off x="631627" y="1359694"/>
+            <a:ext cx="8086939" cy="174575"/>
+          </a:xfrm>
+          <a:prstGeom prst="rect">
+            <a:avLst/>
+          </a:prstGeom>
+          <a:noFill/>
+          <a:ln/>
+        </p:spPr>
+        <p:txBody>
+          <a:bodyPr wrap="square" lIns="0" tIns="0" rIns="0" bIns="0" rtlCol="0" anchor="t"/>
+          <a:lstStyle/>
+          <a:p>
+            <a:pPr algn="l" indent="0" marL="0">
+              <a:lnSpc>
+                <a:spcPts val="1375"/>
+              </a:lnSpc>
+              <a:buNone/>
+            </a:pPr>
+            <a:r>
+              <a:rPr lang="en-US" sz="1100" dirty="0">
+                <a:solidFill>
+                  <a:srgbClr val="1C2833"/>
+                </a:solidFill>
+                <a:latin typeface="Courier New" pitchFamily="34" charset="0"/>
+                <a:ea typeface="Courier New" pitchFamily="34" charset="-122"/>
+                <a:cs typeface="Courier New" pitchFamily="34" charset="-120"/>
+              </a:rPr>
+              <a:t>Step 3: Drop in:  2  5  3   →   253.</a:t>
+            </a:r>
+            <a:endParaRPr lang="en-US" sz="1100" dirty="0"/>
+          </a:p>
+        </p:txBody>
+      </p:sp>
+      <p:sp>
+        <p:nvSpPr>
+          <p:cNvPr id="9" name="Text 7"/>
+          <p:cNvSpPr/>
+          <p:nvPr/>
+        </p:nvSpPr>
+        <p:spPr>
+          <a:xfrm>
+            <a:off x="406301" y="1750070"/>
+            <a:ext cx="8498026" cy="213271"/>
+          </a:xfrm>
+          <a:prstGeom prst="rect">
+            <a:avLst/>
+          </a:prstGeom>
+          <a:noFill/>
+          <a:ln/>
+        </p:spPr>
+        <p:txBody>
+          <a:bodyPr wrap="square" lIns="0" tIns="0" rIns="0" bIns="0" rtlCol="0" anchor="t"/>
+          <a:lstStyle/>
+          <a:p>
+            <a:pPr algn="l" indent="0" marL="0">
+              <a:lnSpc>
+                <a:spcPts val="1680"/>
               </a:lnSpc>
               <a:spcBef>
                 <a:spcPts val="300"/>
@@ -2677,345 +3330,17 @@
               <a:buNone/>
             </a:pPr>
             <a:r>
-              <a:rPr lang="en-US" sz="1300" b="1" i="1" dirty="0">
-                <a:solidFill>
-                  <a:srgbClr val="1C2833"/>
-                </a:solidFill>
-                <a:latin typeface="Georgia" pitchFamily="34" charset="0"/>
-                <a:ea typeface="Georgia" pitchFamily="34" charset="-122"/>
-                <a:cs typeface="Georgia" pitchFamily="34" charset="-120"/>
-              </a:rPr>
-              <a:t>The ×11 Trick (no-carry case)</a:t>
-            </a:r>
-            <a:endParaRPr lang="en-US" sz="1300" dirty="0"/>
-          </a:p>
-        </p:txBody>
-      </p:sp>
-      <p:sp>
-        <p:nvSpPr>
-          <p:cNvPr id="7" name="Text 5"/>
-          <p:cNvSpPr/>
-          <p:nvPr/>
-        </p:nvSpPr>
-        <p:spPr>
-          <a:xfrm>
-            <a:off x="692051" y="1343174"/>
-            <a:ext cx="7973389" cy="461963"/>
-          </a:xfrm>
-          <a:prstGeom prst="rect">
-            <a:avLst/>
-          </a:prstGeom>
-          <a:noFill/>
-          <a:ln/>
-        </p:spPr>
-        <p:txBody>
-          <a:bodyPr wrap="square" lIns="0" tIns="0" rIns="0" bIns="0" rtlCol="0" anchor="t"/>
-          <a:lstStyle/>
-          <a:p>
-            <a:pPr algn="l" indent="0" marL="0">
-              <a:lnSpc>
-                <a:spcPts val="1820"/>
-              </a:lnSpc>
-              <a:spcBef>
-                <a:spcPts val="300"/>
-              </a:spcBef>
-              <a:spcAft>
-                <a:spcPts val="300"/>
-              </a:spcAft>
-              <a:buNone/>
-            </a:pPr>
-            <a:r>
-              <a:rPr lang="en-US" sz="1300" dirty="0">
-                <a:solidFill>
-                  <a:srgbClr val="1C2833"/>
-                </a:solidFill>
-                <a:latin typeface="Georgia" pitchFamily="34" charset="0"/>
-                <a:ea typeface="Georgia" pitchFamily="34" charset="-122"/>
-                <a:cs typeface="Georgia" pitchFamily="34" charset="-120"/>
-              </a:rPr>
-              <a:t>For any 2-digit number with digit-sum &lt; 10: 1. </a:t>
-            </a:r>
-            <a:pPr algn="l" indent="0" marL="0">
-              <a:lnSpc>
-                <a:spcPts val="1820"/>
-              </a:lnSpc>
-              <a:spcBef>
-                <a:spcPts val="300"/>
-              </a:spcBef>
-              <a:spcAft>
-                <a:spcPts val="300"/>
-              </a:spcAft>
-              <a:buNone/>
-            </a:pPr>
-            <a:r>
-              <a:rPr lang="en-US" sz="1300" b="1" i="1" dirty="0">
-                <a:solidFill>
-                  <a:srgbClr val="1C2833"/>
-                </a:solidFill>
-                <a:latin typeface="Georgia" pitchFamily="34" charset="0"/>
-                <a:ea typeface="Georgia" pitchFamily="34" charset="-122"/>
-                <a:cs typeface="Georgia" pitchFamily="34" charset="-120"/>
-              </a:rPr>
-              <a:t>Split</a:t>
-            </a:r>
-            <a:pPr algn="l" indent="0" marL="0">
-              <a:lnSpc>
-                <a:spcPts val="1820"/>
-              </a:lnSpc>
-              <a:spcBef>
-                <a:spcPts val="300"/>
-              </a:spcBef>
-              <a:spcAft>
-                <a:spcPts val="300"/>
-              </a:spcAft>
-              <a:buNone/>
-            </a:pPr>
-            <a:r>
-              <a:rPr lang="en-US" sz="1300" dirty="0">
-                <a:solidFill>
-                  <a:srgbClr val="1C2833"/>
-                </a:solidFill>
-                <a:latin typeface="Georgia" pitchFamily="34" charset="0"/>
-                <a:ea typeface="Georgia" pitchFamily="34" charset="-122"/>
-                <a:cs typeface="Georgia" pitchFamily="34" charset="-120"/>
-              </a:rPr>
-              <a:t> the digits with a gap. 2. </a:t>
-            </a:r>
-            <a:pPr algn="l" indent="0" marL="0">
-              <a:lnSpc>
-                <a:spcPts val="1820"/>
-              </a:lnSpc>
-              <a:spcBef>
-                <a:spcPts val="300"/>
-              </a:spcBef>
-              <a:spcAft>
-                <a:spcPts val="300"/>
-              </a:spcAft>
-              <a:buNone/>
-            </a:pPr>
-            <a:r>
-              <a:rPr lang="en-US" sz="1300" b="1" i="1" dirty="0">
-                <a:solidFill>
-                  <a:srgbClr val="1C2833"/>
-                </a:solidFill>
-                <a:latin typeface="Georgia" pitchFamily="34" charset="0"/>
-                <a:ea typeface="Georgia" pitchFamily="34" charset="-122"/>
-                <a:cs typeface="Georgia" pitchFamily="34" charset="-120"/>
-              </a:rPr>
-              <a:t>Add</a:t>
-            </a:r>
-            <a:pPr algn="l" indent="0" marL="0">
-              <a:lnSpc>
-                <a:spcPts val="1820"/>
-              </a:lnSpc>
-              <a:spcBef>
-                <a:spcPts val="300"/>
-              </a:spcBef>
-              <a:spcAft>
-                <a:spcPts val="300"/>
-              </a:spcAft>
-              <a:buNone/>
-            </a:pPr>
-            <a:r>
-              <a:rPr lang="en-US" sz="1300" dirty="0">
-                <a:solidFill>
-                  <a:srgbClr val="1C2833"/>
-                </a:solidFill>
-                <a:latin typeface="Georgia" pitchFamily="34" charset="0"/>
-                <a:ea typeface="Georgia" pitchFamily="34" charset="-122"/>
-                <a:cs typeface="Georgia" pitchFamily="34" charset="-120"/>
-              </a:rPr>
-              <a:t> the two digits. 3. </a:t>
-            </a:r>
-            <a:pPr algn="l" indent="0" marL="0">
-              <a:lnSpc>
-                <a:spcPts val="1820"/>
-              </a:lnSpc>
-              <a:spcBef>
-                <a:spcPts val="300"/>
-              </a:spcBef>
-              <a:spcAft>
-                <a:spcPts val="300"/>
-              </a:spcAft>
-              <a:buNone/>
-            </a:pPr>
-            <a:r>
-              <a:rPr lang="en-US" sz="1300" b="1" i="1" dirty="0">
-                <a:solidFill>
-                  <a:srgbClr val="1C2833"/>
-                </a:solidFill>
-                <a:latin typeface="Georgia" pitchFamily="34" charset="0"/>
-                <a:ea typeface="Georgia" pitchFamily="34" charset="-122"/>
-                <a:cs typeface="Georgia" pitchFamily="34" charset="-120"/>
-              </a:rPr>
-              <a:t>Drop</a:t>
-            </a:r>
-            <a:pPr algn="l" indent="0" marL="0">
-              <a:lnSpc>
-                <a:spcPts val="1820"/>
-              </a:lnSpc>
-              <a:spcBef>
-                <a:spcPts val="300"/>
-              </a:spcBef>
-              <a:spcAft>
-                <a:spcPts val="300"/>
-              </a:spcAft>
-              <a:buNone/>
-            </a:pPr>
-            <a:r>
-              <a:rPr lang="en-US" sz="1300" dirty="0">
-                <a:solidFill>
-                  <a:srgbClr val="1C2833"/>
-                </a:solidFill>
-                <a:latin typeface="Georgia" pitchFamily="34" charset="0"/>
-                <a:ea typeface="Georgia" pitchFamily="34" charset="-122"/>
-                <a:cs typeface="Georgia" pitchFamily="34" charset="-120"/>
-              </a:rPr>
-              <a:t> the sum into the gap.</a:t>
-            </a:r>
-            <a:endParaRPr lang="en-US" sz="1300" dirty="0"/>
-          </a:p>
-        </p:txBody>
-      </p:sp>
-      <p:sp>
-        <p:nvSpPr>
-          <p:cNvPr id="8" name="Text 6"/>
-          <p:cNvSpPr/>
-          <p:nvPr/>
-        </p:nvSpPr>
-        <p:spPr>
-          <a:xfrm>
-            <a:off x="692051" y="1843236"/>
-            <a:ext cx="7973389" cy="230981"/>
-          </a:xfrm>
-          <a:prstGeom prst="rect">
-            <a:avLst/>
-          </a:prstGeom>
-          <a:noFill/>
-          <a:ln/>
-        </p:spPr>
-        <p:txBody>
-          <a:bodyPr wrap="square" lIns="0" tIns="0" rIns="0" bIns="0" rtlCol="0" anchor="t"/>
-          <a:lstStyle/>
-          <a:p>
-            <a:pPr algn="l" indent="0" marL="0">
-              <a:lnSpc>
-                <a:spcPts val="1820"/>
-              </a:lnSpc>
-              <a:spcBef>
-                <a:spcPts val="300"/>
-              </a:spcBef>
-              <a:spcAft>
-                <a:spcPts val="300"/>
-              </a:spcAft>
-              <a:buNone/>
-            </a:pPr>
-            <a:r>
-              <a:rPr lang="en-US" sz="1300" i="1" dirty="0">
-                <a:solidFill>
-                  <a:srgbClr val="1C2833"/>
-                </a:solidFill>
-                <a:latin typeface="Georgia" pitchFamily="34" charset="0"/>
-                <a:ea typeface="Georgia" pitchFamily="34" charset="-122"/>
-                <a:cs typeface="Georgia" pitchFamily="34" charset="-120"/>
-              </a:rPr>
-              <a:t>Example: 34 × 11 → 3 _ 4 → 3+4 = 7 → 374.</a:t>
-            </a:r>
-            <a:endParaRPr lang="en-US" sz="1300" dirty="0"/>
-          </a:p>
-        </p:txBody>
-      </p:sp>
-      <p:sp>
-        <p:nvSpPr>
-          <p:cNvPr id="9" name="Text 7"/>
-          <p:cNvSpPr/>
-          <p:nvPr/>
-        </p:nvSpPr>
-        <p:spPr>
-          <a:xfrm>
-            <a:off x="692051" y="2112318"/>
-            <a:ext cx="7973389" cy="692944"/>
-          </a:xfrm>
-          <a:prstGeom prst="rect">
-            <a:avLst/>
-          </a:prstGeom>
-          <a:noFill/>
-          <a:ln/>
-        </p:spPr>
-        <p:txBody>
-          <a:bodyPr wrap="square" lIns="0" tIns="0" rIns="0" bIns="0" rtlCol="0" anchor="t"/>
-          <a:lstStyle/>
-          <a:p>
-            <a:pPr algn="l" indent="0" marL="0">
-              <a:lnSpc>
-                <a:spcPts val="1820"/>
-              </a:lnSpc>
-              <a:spcBef>
-                <a:spcPts val="300"/>
-              </a:spcBef>
-              <a:spcAft>
-                <a:spcPts val="300"/>
-              </a:spcAft>
-              <a:buNone/>
-            </a:pPr>
-            <a:r>
-              <a:rPr lang="en-US" sz="1300" dirty="0">
-                <a:solidFill>
-                  <a:srgbClr val="1C2833"/>
-                </a:solidFill>
-                <a:latin typeface="Georgia" pitchFamily="34" charset="0"/>
-                <a:ea typeface="Georgia" pitchFamily="34" charset="-122"/>
-                <a:cs typeface="Georgia" pitchFamily="34" charset="-120"/>
-              </a:rPr>
-              <a:t>Tirthaji (1965) names the underlying sūtra </a:t>
-            </a:r>
-            <a:pPr algn="l" indent="0" marL="0">
-              <a:lnSpc>
-                <a:spcPts val="1820"/>
-              </a:lnSpc>
-              <a:spcBef>
-                <a:spcPts val="300"/>
-              </a:spcBef>
-              <a:spcAft>
-                <a:spcPts val="300"/>
-              </a:spcAft>
-              <a:buNone/>
-            </a:pPr>
-            <a:r>
-              <a:rPr lang="en-US" sz="1300" b="1" i="1" dirty="0">
-                <a:solidFill>
-                  <a:srgbClr val="1C2833"/>
-                </a:solidFill>
-                <a:latin typeface="Georgia" pitchFamily="34" charset="0"/>
-                <a:ea typeface="Georgia" pitchFamily="34" charset="-122"/>
-                <a:cs typeface="Georgia" pitchFamily="34" charset="-120"/>
-              </a:rPr>
-              <a:t>Ekādhikena Pūrveṇa</a:t>
-            </a:r>
-            <a:pPr algn="l" indent="0" marL="0">
-              <a:lnSpc>
-                <a:spcPts val="1820"/>
-              </a:lnSpc>
-              <a:spcBef>
-                <a:spcPts val="300"/>
-              </a:spcBef>
-              <a:spcAft>
-                <a:spcPts val="300"/>
-              </a:spcAft>
-              <a:buNone/>
-            </a:pPr>
-            <a:r>
-              <a:rPr lang="en-US" sz="1300" dirty="0">
-                <a:solidFill>
-                  <a:srgbClr val="1C2833"/>
-                </a:solidFill>
-                <a:latin typeface="Georgia" pitchFamily="34" charset="0"/>
-                <a:ea typeface="Georgia" pitchFamily="34" charset="-122"/>
-                <a:cs typeface="Georgia" pitchFamily="34" charset="-120"/>
-              </a:rPr>
-              <a:t> — "by one more than the previous." The trick is older than its modern Sanskrit name; the algebra (which we'll do on Day 3) is the same in every language.</a:t>
-            </a:r>
-            <a:endParaRPr lang="en-US" sz="1300" dirty="0"/>
+              <a:rPr lang="en-US" sz="1200" dirty="0">
+                <a:solidFill>
+                  <a:srgbClr val="1C2833"/>
+                </a:solidFill>
+                <a:latin typeface="Arial" pitchFamily="34" charset="0"/>
+                <a:ea typeface="Arial" pitchFamily="34" charset="-122"/>
+                <a:cs typeface="Arial" pitchFamily="34" charset="-120"/>
+              </a:rPr>
+              <a:t>Check on the board with long multiplication: 23 × 11 = 23 × 10 + 23 = 230 + 23 = 253. ✓</a:t>
+            </a:r>
+            <a:endParaRPr lang="en-US" sz="1200" dirty="0"/>
           </a:p>
         </p:txBody>
       </p:sp>
@@ -3171,7 +3496,7 @@
                 <a:ea typeface="Georgia" pitchFamily="34" charset="-122"/>
                 <a:cs typeface="Georgia" pitchFamily="34" charset="-120"/>
               </a:rPr>
-              <a:t>Homework</a:t>
+              <a:t>Teacher demonstration (12 min) — The trick (cont.)</a:t>
             </a:r>
             <a:endParaRPr lang="en-US" sz="1800" dirty="0"/>
           </a:p>
@@ -3185,8 +3510,8 @@
         </p:nvSpPr>
         <p:spPr>
           <a:xfrm>
-            <a:off x="406301" y="870942"/>
-            <a:ext cx="8498026" cy="426541"/>
+            <a:off x="634901" y="883593"/>
+            <a:ext cx="8102798" cy="281880"/>
           </a:xfrm>
           <a:prstGeom prst="rect">
             <a:avLst/>
@@ -3198,17 +3523,15 @@
           <a:bodyPr wrap="square" lIns="0" tIns="0" rIns="0" bIns="0" rtlCol="0" anchor="t"/>
           <a:lstStyle/>
           <a:p>
-            <a:pPr algn="l" indent="0" marL="0">
-              <a:lnSpc>
-                <a:spcPts val="1680"/>
-              </a:lnSpc>
-              <a:spcBef>
-                <a:spcPts val="300"/>
-              </a:spcBef>
-              <a:spcAft>
-                <a:spcPts val="300"/>
-              </a:spcAft>
-              <a:buNone/>
+            <a:pPr algn="l" marL="342900" indent="-342900">
+              <a:lnSpc>
+                <a:spcPts val="1620"/>
+              </a:lnSpc>
+              <a:spcAft>
+                <a:spcPts val="300"/>
+              </a:spcAft>
+              <a:buSzPct val="100000"/>
+              <a:buChar char="•"/>
             </a:pPr>
             <a:r>
               <a:rPr lang="en-US" sz="1200" dirty="0">
@@ -3219,7 +3542,47 @@
                 <a:ea typeface="Arial" pitchFamily="34" charset="-122"/>
                 <a:cs typeface="Arial" pitchFamily="34" charset="-120"/>
               </a:rPr>
-              <a:t>– Find any two 2-digit numbers (digit-sum &lt; 10) in your house — phone numbers, page numbers, prices. Compute each × 11 using the trick. Bring 5 worked examples to class tomorrow.</a:t>
+              <a:t>Try </a:t>
+            </a:r>
+            <a:pPr algn="l" indent="0" marL="0">
+              <a:lnSpc>
+                <a:spcPts val="1620"/>
+              </a:lnSpc>
+              <a:spcAft>
+                <a:spcPts val="300"/>
+              </a:spcAft>
+              <a:buNone/>
+            </a:pPr>
+            <a:r>
+              <a:rPr lang="en-US" sz="1200" b="1" dirty="0">
+                <a:solidFill>
+                  <a:srgbClr val="1C2833"/>
+                </a:solidFill>
+                <a:latin typeface="Arial" pitchFamily="34" charset="0"/>
+                <a:ea typeface="Arial" pitchFamily="34" charset="-122"/>
+                <a:cs typeface="Arial" pitchFamily="34" charset="-120"/>
+              </a:rPr>
+              <a:t>45 × 11</a:t>
+            </a:r>
+            <a:pPr algn="l" indent="0" marL="0">
+              <a:lnSpc>
+                <a:spcPts val="1620"/>
+              </a:lnSpc>
+              <a:spcAft>
+                <a:spcPts val="300"/>
+              </a:spcAft>
+              <a:buNone/>
+            </a:pPr>
+            <a:r>
+              <a:rPr lang="en-US" sz="1200" dirty="0">
+                <a:solidFill>
+                  <a:srgbClr val="1C2833"/>
+                </a:solidFill>
+                <a:latin typeface="Arial" pitchFamily="34" charset="0"/>
+                <a:ea typeface="Arial" pitchFamily="34" charset="-122"/>
+                <a:cs typeface="Arial" pitchFamily="34" charset="-120"/>
+              </a:rPr>
+              <a:t>:</a:t>
             </a:r>
             <a:endParaRPr lang="en-US" sz="1200" dirty="0"/>
           </a:p>
@@ -3228,6 +3591,187 @@
       <p:sp>
         <p:nvSpPr>
           <p:cNvPr id="5" name="Text 3"/>
+          <p:cNvSpPr/>
+          <p:nvPr/>
+        </p:nvSpPr>
+        <p:spPr>
+          <a:xfrm>
+            <a:off x="406301" y="1266974"/>
+            <a:ext cx="8331398" cy="428476"/>
+          </a:xfrm>
+          <a:prstGeom prst="rect">
+            <a:avLst/>
+          </a:prstGeom>
+          <a:solidFill>
+            <a:srgbClr val="F4F8F9"/>
+          </a:solidFill>
+          <a:ln/>
+        </p:spPr>
+        <p:txBody>
+          <a:bodyPr wrap="square" rtlCol="0" anchor="ctr"/>
+          <a:lstStyle/>
+          <a:p>
+            <a:pPr indent="0" marL="0">
+              <a:buNone/>
+            </a:pPr>
+            <a:endParaRPr lang="en-US" dirty="0"/>
+          </a:p>
+        </p:txBody>
+      </p:sp>
+      <p:sp>
+        <p:nvSpPr>
+          <p:cNvPr id="6" name="Shape 4"/>
+          <p:cNvSpPr/>
+          <p:nvPr/>
+        </p:nvSpPr>
+        <p:spPr>
+          <a:xfrm>
+            <a:off x="430113" y="1266974"/>
+            <a:ext cx="0" cy="428476"/>
+          </a:xfrm>
+          <a:prstGeom prst="line">
+            <a:avLst/>
+          </a:prstGeom>
+          <a:noFill/>
+          <a:ln w="47625">
+            <a:solidFill>
+              <a:srgbClr val="277884"/>
+            </a:solidFill>
+            <a:prstDash val="solid"/>
+          </a:ln>
+        </p:spPr>
+      </p:sp>
+      <p:sp>
+        <p:nvSpPr>
+          <p:cNvPr id="7" name="Text 5"/>
+          <p:cNvSpPr/>
+          <p:nvPr/>
+        </p:nvSpPr>
+        <p:spPr>
+          <a:xfrm>
+            <a:off x="631627" y="1393924"/>
+            <a:ext cx="8086939" cy="174575"/>
+          </a:xfrm>
+          <a:prstGeom prst="rect">
+            <a:avLst/>
+          </a:prstGeom>
+          <a:noFill/>
+          <a:ln/>
+        </p:spPr>
+        <p:txBody>
+          <a:bodyPr wrap="square" lIns="0" tIns="0" rIns="0" bIns="0" rtlCol="0" anchor="t"/>
+          <a:lstStyle/>
+          <a:p>
+            <a:pPr algn="l" indent="0" marL="0">
+              <a:lnSpc>
+                <a:spcPts val="1375"/>
+              </a:lnSpc>
+              <a:buNone/>
+            </a:pPr>
+            <a:r>
+              <a:rPr lang="en-US" sz="1100" dirty="0">
+                <a:solidFill>
+                  <a:srgbClr val="1C2833"/>
+                </a:solidFill>
+                <a:latin typeface="Courier New" pitchFamily="34" charset="0"/>
+                <a:ea typeface="Courier New" pitchFamily="34" charset="-122"/>
+                <a:cs typeface="Courier New" pitchFamily="34" charset="-120"/>
+              </a:rPr>
+              <a:t>4 _ 5  →  4 + 5 = 9  →  4 9 5  →  495.</a:t>
+            </a:r>
+            <a:endParaRPr lang="en-US" sz="1100" dirty="0"/>
+          </a:p>
+        </p:txBody>
+      </p:sp>
+      <p:sp>
+        <p:nvSpPr>
+          <p:cNvPr id="8" name="Text 6"/>
+          <p:cNvSpPr/>
+          <p:nvPr/>
+        </p:nvSpPr>
+        <p:spPr>
+          <a:xfrm>
+            <a:off x="634901" y="1796951"/>
+            <a:ext cx="8102798" cy="281880"/>
+          </a:xfrm>
+          <a:prstGeom prst="rect">
+            <a:avLst/>
+          </a:prstGeom>
+          <a:noFill/>
+          <a:ln/>
+        </p:spPr>
+        <p:txBody>
+          <a:bodyPr wrap="square" lIns="0" tIns="0" rIns="0" bIns="0" rtlCol="0" anchor="t"/>
+          <a:lstStyle/>
+          <a:p>
+            <a:pPr algn="l" marL="342900" indent="-342900">
+              <a:lnSpc>
+                <a:spcPts val="1620"/>
+              </a:lnSpc>
+              <a:spcAft>
+                <a:spcPts val="300"/>
+              </a:spcAft>
+              <a:buSzPct val="100000"/>
+              <a:buChar char="•"/>
+            </a:pPr>
+            <a:r>
+              <a:rPr lang="en-US" sz="1200" dirty="0">
+                <a:solidFill>
+                  <a:srgbClr val="1C2833"/>
+                </a:solidFill>
+                <a:latin typeface="Arial" pitchFamily="34" charset="0"/>
+                <a:ea typeface="Arial" pitchFamily="34" charset="-122"/>
+                <a:cs typeface="Arial" pitchFamily="34" charset="-120"/>
+              </a:rPr>
+              <a:t>Try </a:t>
+            </a:r>
+            <a:pPr algn="l" indent="0" marL="0">
+              <a:lnSpc>
+                <a:spcPts val="1620"/>
+              </a:lnSpc>
+              <a:spcAft>
+                <a:spcPts val="300"/>
+              </a:spcAft>
+              <a:buNone/>
+            </a:pPr>
+            <a:r>
+              <a:rPr lang="en-US" sz="1200" b="1" dirty="0">
+                <a:solidFill>
+                  <a:srgbClr val="1C2833"/>
+                </a:solidFill>
+                <a:latin typeface="Arial" pitchFamily="34" charset="0"/>
+                <a:ea typeface="Arial" pitchFamily="34" charset="-122"/>
+                <a:cs typeface="Arial" pitchFamily="34" charset="-120"/>
+              </a:rPr>
+              <a:t>62 × 11</a:t>
+            </a:r>
+            <a:pPr algn="l" indent="0" marL="0">
+              <a:lnSpc>
+                <a:spcPts val="1620"/>
+              </a:lnSpc>
+              <a:spcAft>
+                <a:spcPts val="300"/>
+              </a:spcAft>
+              <a:buNone/>
+            </a:pPr>
+            <a:r>
+              <a:rPr lang="en-US" sz="1200" dirty="0">
+                <a:solidFill>
+                  <a:srgbClr val="1C2833"/>
+                </a:solidFill>
+                <a:latin typeface="Arial" pitchFamily="34" charset="0"/>
+                <a:ea typeface="Arial" pitchFamily="34" charset="-122"/>
+                <a:cs typeface="Arial" pitchFamily="34" charset="-120"/>
+              </a:rPr>
+              <a:t>:</a:t>
+            </a:r>
+            <a:endParaRPr lang="en-US" sz="1200" dirty="0"/>
+          </a:p>
+        </p:txBody>
+      </p:sp>
+      <p:sp>
+        <p:nvSpPr>
+          <p:cNvPr id="9" name="Text 7"/>
           <p:cNvSpPr/>
           <p:nvPr/>
         </p:nvSpPr>
@@ -3377,7 +3921,7 @@
                 <a:ea typeface="Georgia" pitchFamily="34" charset="-122"/>
                 <a:cs typeface="Georgia" pitchFamily="34" charset="-120"/>
               </a:rPr>
-              <a:t>Differentiation</a:t>
+              <a:t>Teacher demonstration (12 min) — The trick (cont.)</a:t>
             </a:r>
             <a:endParaRPr lang="en-US" sz="1800" dirty="0"/>
           </a:p>
@@ -3391,8 +3935,103 @@
         </p:nvSpPr>
         <p:spPr>
           <a:xfrm>
-            <a:off x="634901" y="883593"/>
-            <a:ext cx="8102798" cy="731341"/>
+            <a:off x="406301" y="883593"/>
+            <a:ext cx="8331398" cy="428476"/>
+          </a:xfrm>
+          <a:prstGeom prst="rect">
+            <a:avLst/>
+          </a:prstGeom>
+          <a:solidFill>
+            <a:srgbClr val="F4F8F9"/>
+          </a:solidFill>
+          <a:ln/>
+        </p:spPr>
+        <p:txBody>
+          <a:bodyPr wrap="square" rtlCol="0" anchor="ctr"/>
+          <a:lstStyle/>
+          <a:p>
+            <a:pPr indent="0" marL="0">
+              <a:buNone/>
+            </a:pPr>
+            <a:endParaRPr lang="en-US" dirty="0"/>
+          </a:p>
+        </p:txBody>
+      </p:sp>
+      <p:sp>
+        <p:nvSpPr>
+          <p:cNvPr id="5" name="Shape 3"/>
+          <p:cNvSpPr/>
+          <p:nvPr/>
+        </p:nvSpPr>
+        <p:spPr>
+          <a:xfrm>
+            <a:off x="430113" y="883593"/>
+            <a:ext cx="0" cy="428476"/>
+          </a:xfrm>
+          <a:prstGeom prst="line">
+            <a:avLst/>
+          </a:prstGeom>
+          <a:noFill/>
+          <a:ln w="47625">
+            <a:solidFill>
+              <a:srgbClr val="277884"/>
+            </a:solidFill>
+            <a:prstDash val="solid"/>
+          </a:ln>
+        </p:spPr>
+      </p:sp>
+      <p:sp>
+        <p:nvSpPr>
+          <p:cNvPr id="6" name="Text 4"/>
+          <p:cNvSpPr/>
+          <p:nvPr/>
+        </p:nvSpPr>
+        <p:spPr>
+          <a:xfrm>
+            <a:off x="631627" y="1010543"/>
+            <a:ext cx="8086939" cy="174575"/>
+          </a:xfrm>
+          <a:prstGeom prst="rect">
+            <a:avLst/>
+          </a:prstGeom>
+          <a:noFill/>
+          <a:ln/>
+        </p:spPr>
+        <p:txBody>
+          <a:bodyPr wrap="square" lIns="0" tIns="0" rIns="0" bIns="0" rtlCol="0" anchor="t"/>
+          <a:lstStyle/>
+          <a:p>
+            <a:pPr algn="l" indent="0" marL="0">
+              <a:lnSpc>
+                <a:spcPts val="1375"/>
+              </a:lnSpc>
+              <a:buNone/>
+            </a:pPr>
+            <a:r>
+              <a:rPr lang="en-US" sz="1100" dirty="0">
+                <a:solidFill>
+                  <a:srgbClr val="1C2833"/>
+                </a:solidFill>
+                <a:latin typeface="Courier New" pitchFamily="34" charset="0"/>
+                <a:ea typeface="Courier New" pitchFamily="34" charset="-122"/>
+                <a:cs typeface="Courier New" pitchFamily="34" charset="-120"/>
+              </a:rPr>
+              <a:t>6 _ 2  →  6 + 2 = 8  →  6 8 2  →  682.</a:t>
+            </a:r>
+            <a:endParaRPr lang="en-US" sz="1100" dirty="0"/>
+          </a:p>
+        </p:txBody>
+      </p:sp>
+      <p:sp>
+        <p:nvSpPr>
+          <p:cNvPr id="7" name="Text 5"/>
+          <p:cNvSpPr/>
+          <p:nvPr/>
+        </p:nvSpPr>
+        <p:spPr>
+          <a:xfrm>
+            <a:off x="634901" y="1413570"/>
+            <a:ext cx="8102798" cy="281880"/>
           </a:xfrm>
           <a:prstGeom prst="rect">
             <a:avLst/>
@@ -3415,7 +4054,7 @@
               <a:buChar char="•"/>
             </a:pPr>
             <a:r>
-              <a:rPr lang="en-US" sz="1200" b="1" dirty="0">
+              <a:rPr lang="en-US" sz="1200" i="1" dirty="0">
                 <a:solidFill>
                   <a:srgbClr val="1C2833"/>
                 </a:solidFill>
@@ -3423,79 +4062,15 @@
                 <a:ea typeface="Arial" pitchFamily="34" charset="-122"/>
                 <a:cs typeface="Arial" pitchFamily="34" charset="-120"/>
               </a:rPr>
-              <a:t>Tier up:</a:t>
-            </a:r>
-            <a:pPr algn="l" indent="0" marL="0">
-              <a:lnSpc>
-                <a:spcPts val="1620"/>
-              </a:lnSpc>
-              <a:spcAft>
-                <a:spcPts val="300"/>
-              </a:spcAft>
-              <a:buNone/>
-            </a:pPr>
-            <a:r>
-              <a:rPr lang="en-US" sz="1200" dirty="0">
-                <a:solidFill>
-                  <a:srgbClr val="1C2833"/>
-                </a:solidFill>
-                <a:latin typeface="Arial" pitchFamily="34" charset="0"/>
-                <a:ea typeface="Arial" pitchFamily="34" charset="-122"/>
-                <a:cs typeface="Arial" pitchFamily="34" charset="-120"/>
-              </a:rPr>
-              <a:t> Try 3-digit × 11 (e.g. 234 × 11, 152 × 11). See if you can guess the pattern before Day 4.</a:t>
+              <a:t>"Pattern: outer digits stay the same; middle digit = their sum."</a:t>
             </a:r>
             <a:endParaRPr lang="en-US" sz="1200" dirty="0"/>
           </a:p>
-          <a:p>
-            <a:pPr algn="l" marL="342900" indent="-342900">
-              <a:lnSpc>
-                <a:spcPts val="1620"/>
-              </a:lnSpc>
-              <a:spcAft>
-                <a:spcPts val="300"/>
-              </a:spcAft>
-              <a:buSzPct val="100000"/>
-              <a:buChar char="•"/>
-            </a:pPr>
-            <a:r>
-              <a:rPr lang="en-US" sz="1200" b="1" dirty="0">
-                <a:solidFill>
-                  <a:srgbClr val="1C2833"/>
-                </a:solidFill>
-                <a:latin typeface="Arial" pitchFamily="34" charset="0"/>
-                <a:ea typeface="Arial" pitchFamily="34" charset="-122"/>
-                <a:cs typeface="Arial" pitchFamily="34" charset="-120"/>
-              </a:rPr>
-              <a:t>Tier down:</a:t>
-            </a:r>
-            <a:pPr algn="l" indent="0" marL="0">
-              <a:lnSpc>
-                <a:spcPts val="1620"/>
-              </a:lnSpc>
-              <a:spcAft>
-                <a:spcPts val="300"/>
-              </a:spcAft>
-              <a:buNone/>
-            </a:pPr>
-            <a:r>
-              <a:rPr lang="en-US" sz="1200" dirty="0">
-                <a:solidFill>
-                  <a:srgbClr val="1C2833"/>
-                </a:solidFill>
-                <a:latin typeface="Arial" pitchFamily="34" charset="0"/>
-                <a:ea typeface="Arial" pitchFamily="34" charset="-122"/>
-                <a:cs typeface="Arial" pitchFamily="34" charset="-120"/>
-              </a:rPr>
-              <a:t> If the gap is confusing, write the answer as a 3-digit number directly: hundreds = first digit, tens = sum, units = second digit.</a:t>
-            </a:r>
-            <a:endParaRPr lang="en-US" sz="1200" dirty="0"/>
-          </a:p>
-        </p:txBody>
-      </p:sp>
-      <p:sp>
-        <p:nvSpPr>
-          <p:cNvPr id="5" name="Text 3"/>
+        </p:txBody>
+      </p:sp>
+      <p:sp>
+        <p:nvSpPr>
+          <p:cNvPr id="8" name="Text 6"/>
           <p:cNvSpPr/>
           <p:nvPr/>
         </p:nvSpPr>
@@ -3645,7 +4220,7 @@
                 <a:ea typeface="Georgia" pitchFamily="34" charset="-122"/>
                 <a:cs typeface="Georgia" pitchFamily="34" charset="-120"/>
               </a:rPr>
-              <a:t>Teacher notes</a:t>
+              <a:t>Teacher demonstration (12 min) — The trick (cont.)</a:t>
             </a:r>
             <a:endParaRPr lang="en-US" sz="1800" dirty="0"/>
           </a:p>
@@ -3660,7 +4235,7 @@
         <p:spPr>
           <a:xfrm>
             <a:off x="634901" y="883593"/>
-            <a:ext cx="8102798" cy="281880"/>
+            <a:ext cx="8102798" cy="487561"/>
           </a:xfrm>
           <a:prstGeom prst="rect">
             <a:avLst/>
@@ -3683,7 +4258,7 @@
               <a:buChar char="•"/>
             </a:pPr>
             <a:r>
-              <a:rPr lang="en-US" sz="1200" b="1" dirty="0">
+              <a:rPr lang="en-US" sz="1200" dirty="0">
                 <a:solidFill>
                   <a:srgbClr val="1C2833"/>
                 </a:solidFill>
@@ -3691,7 +4266,7 @@
                 <a:ea typeface="Arial" pitchFamily="34" charset="-122"/>
                 <a:cs typeface="Arial" pitchFamily="34" charset="-120"/>
               </a:rPr>
-              <a:t>The baseline time matters.</a:t>
+              <a:t>Now name it. </a:t>
             </a:r>
             <a:pPr algn="l" indent="0" marL="0">
               <a:lnSpc>
@@ -3703,7 +4278,7 @@
               <a:buNone/>
             </a:pPr>
             <a:r>
-              <a:rPr lang="en-US" sz="1200" dirty="0">
+              <a:rPr lang="en-US" sz="1200" i="1" dirty="0">
                 <a:solidFill>
                   <a:srgbClr val="1C2833"/>
                 </a:solidFill>
@@ -3711,47 +4286,19 @@
                 <a:ea typeface="Arial" pitchFamily="34" charset="-122"/>
                 <a:cs typeface="Arial" pitchFamily="34" charset="-120"/>
               </a:rPr>
-              <a:t> Day 5's retest depends on having a Day 1 record.</a:t>
-            </a:r>
-            <a:endParaRPr lang="en-US" sz="1200" dirty="0"/>
-          </a:p>
-        </p:txBody>
-      </p:sp>
-      <p:sp>
-        <p:nvSpPr>
-          <p:cNvPr id="5" name="Text 3"/>
-          <p:cNvSpPr/>
-          <p:nvPr/>
-        </p:nvSpPr>
-        <p:spPr>
-          <a:xfrm>
-            <a:off x="406301" y="1254323"/>
-            <a:ext cx="8498026" cy="853083"/>
-          </a:xfrm>
-          <a:prstGeom prst="rect">
-            <a:avLst/>
-          </a:prstGeom>
-          <a:noFill/>
-          <a:ln/>
-        </p:spPr>
-        <p:txBody>
-          <a:bodyPr wrap="square" lIns="0" tIns="0" rIns="0" bIns="0" rtlCol="0" anchor="t"/>
-          <a:lstStyle/>
-          <a:p>
-            <a:pPr algn="l" indent="0" marL="0">
-              <a:lnSpc>
-                <a:spcPts val="1680"/>
-              </a:lnSpc>
-              <a:spcBef>
-                <a:spcPts val="300"/>
-              </a:spcBef>
-              <a:spcAft>
-                <a:spcPts val="300"/>
-              </a:spcAft>
-              <a:buNone/>
-            </a:pPr>
-            <a:r>
-              <a:rPr lang="en-US" sz="1200" dirty="0">
+              <a:t>"Tirthaji (1965) calls this </a:t>
+            </a:r>
+            <a:pPr algn="l" indent="0" marL="0">
+              <a:lnSpc>
+                <a:spcPts val="1620"/>
+              </a:lnSpc>
+              <a:spcAft>
+                <a:spcPts val="300"/>
+              </a:spcAft>
+              <a:buNone/>
+            </a:pPr>
+            <a:r>
+              <a:rPr lang="en-US" sz="1200" b="1" i="1" dirty="0">
                 <a:solidFill>
                   <a:srgbClr val="1C2833"/>
                 </a:solidFill>
@@ -3759,15 +4306,12 @@
                 <a:ea typeface="Arial" pitchFamily="34" charset="-122"/>
                 <a:cs typeface="Arial" pitchFamily="34" charset="-120"/>
               </a:rPr>
-              <a:t>– Don't dwell on the Sanskrit name today. </a:t>
-            </a:r>
-            <a:pPr algn="l" indent="0" marL="0">
-              <a:lnSpc>
-                <a:spcPts val="1680"/>
-              </a:lnSpc>
-              <a:spcBef>
-                <a:spcPts val="300"/>
-              </a:spcBef>
+              <a:t>Ekādhikena Pūrveṇa</a:t>
+            </a:r>
+            <a:pPr algn="l" indent="0" marL="0">
+              <a:lnSpc>
+                <a:spcPts val="1620"/>
+              </a:lnSpc>
               <a:spcAft>
                 <a:spcPts val="300"/>
               </a:spcAft>
@@ -3782,30 +4326,7 @@
                 <a:ea typeface="Arial" pitchFamily="34" charset="-122"/>
                 <a:cs typeface="Arial" pitchFamily="34" charset="-120"/>
               </a:rPr>
-              <a:t>Ekādhikena Pūrveṇa</a:t>
-            </a:r>
-            <a:pPr algn="l" indent="0" marL="0">
-              <a:lnSpc>
-                <a:spcPts val="1680"/>
-              </a:lnSpc>
-              <a:spcBef>
-                <a:spcPts val="300"/>
-              </a:spcBef>
-              <a:spcAft>
-                <a:spcPts val="300"/>
-              </a:spcAft>
-              <a:buNone/>
-            </a:pPr>
-            <a:r>
-              <a:rPr lang="en-US" sz="1200" dirty="0">
-                <a:solidFill>
-                  <a:srgbClr val="1C2833"/>
-                </a:solidFill>
-                <a:latin typeface="Arial" pitchFamily="34" charset="0"/>
-                <a:ea typeface="Arial" pitchFamily="34" charset="-122"/>
-                <a:cs typeface="Arial" pitchFamily="34" charset="-120"/>
-              </a:rPr>
-              <a:t> is the cultural anchor; the win is mental speed. – Some students will already know the trick (especially those from competitive-math backgrounds). Have them be peer-coaches. Reframe their advantage as "you'll learn the WHY this week." – About 30% of randomly-chosen 2-digit numbers have digit-sum ≥ 10 (the carry case). So today's worksheet hand-picks the no-carry ones; tomorrow we add the carries.</a:t>
+              <a:t> — 'by one more than the previous.' That is the Sanskrit name of the sūtra. The trick itself is just (10a + b) × 11 = 100a + 10(a+b) + b, which we'll prove on Day 3."</a:t>
             </a:r>
             <a:endParaRPr lang="en-US" sz="1200" dirty="0"/>
           </a:p>
@@ -3813,7 +4334,7 @@
       </p:sp>
       <p:sp>
         <p:nvSpPr>
-          <p:cNvPr id="6" name="Text 4"/>
+          <p:cNvPr id="5" name="Text 3"/>
           <p:cNvSpPr/>
           <p:nvPr/>
         </p:nvSpPr>
@@ -3963,7 +4484,7 @@
                 <a:ea typeface="Georgia" pitchFamily="34" charset="-122"/>
                 <a:cs typeface="Georgia" pitchFamily="34" charset="-120"/>
               </a:rPr>
-              <a:t>Citation(s) used in this lesson</a:t>
+              <a:t>Activity (15 min) — Try it yourself</a:t>
             </a:r>
             <a:endParaRPr lang="en-US" sz="1800" dirty="0"/>
           </a:p>
@@ -3977,8 +4498,8 @@
         </p:nvSpPr>
         <p:spPr>
           <a:xfrm>
-            <a:off x="406301" y="870942"/>
-            <a:ext cx="8498026" cy="213271"/>
+            <a:off x="634901" y="883593"/>
+            <a:ext cx="8102798" cy="281880"/>
           </a:xfrm>
           <a:prstGeom prst="rect">
             <a:avLst/>
@@ -3990,17 +4511,15 @@
           <a:bodyPr wrap="square" lIns="0" tIns="0" rIns="0" bIns="0" rtlCol="0" anchor="t"/>
           <a:lstStyle/>
           <a:p>
-            <a:pPr algn="l" indent="0" marL="0">
-              <a:lnSpc>
-                <a:spcPts val="1680"/>
-              </a:lnSpc>
-              <a:spcBef>
-                <a:spcPts val="300"/>
-              </a:spcBef>
-              <a:spcAft>
-                <a:spcPts val="300"/>
-              </a:spcAft>
-              <a:buNone/>
+            <a:pPr algn="l" marL="342900" indent="-342900">
+              <a:lnSpc>
+                <a:spcPts val="1620"/>
+              </a:lnSpc>
+              <a:spcAft>
+                <a:spcPts val="300"/>
+              </a:spcAft>
+              <a:buSzPct val="100000"/>
+              <a:buChar char="•"/>
             </a:pPr>
             <a:r>
               <a:rPr lang="en-US" sz="1200" dirty="0">
@@ -4011,22 +4530,182 @@
                 <a:ea typeface="Arial" pitchFamily="34" charset="-122"/>
                 <a:cs typeface="Arial" pitchFamily="34" charset="-120"/>
               </a:rPr>
-              <a:t>– Tirthaji, B. K. (1965). </a:t>
-            </a:r>
-            <a:pPr algn="l" indent="0" marL="0">
-              <a:lnSpc>
-                <a:spcPts val="1680"/>
-              </a:lnSpc>
-              <a:spcBef>
-                <a:spcPts val="300"/>
-              </a:spcBef>
-              <a:spcAft>
-                <a:spcPts val="300"/>
-              </a:spcAft>
-              <a:buNone/>
-            </a:pPr>
-            <a:r>
-              <a:rPr lang="en-US" sz="1200" i="1" dirty="0">
+              <a:t>Worksheet (handed out): 10 two-digit × 11 problems, ALL with digit-sum &lt; 10.</a:t>
+            </a:r>
+            <a:endParaRPr lang="en-US" sz="1200" dirty="0"/>
+          </a:p>
+        </p:txBody>
+      </p:sp>
+      <p:sp>
+        <p:nvSpPr>
+          <p:cNvPr id="5" name="Text 3"/>
+          <p:cNvSpPr/>
+          <p:nvPr/>
+        </p:nvSpPr>
+        <p:spPr>
+          <a:xfrm>
+            <a:off x="406301" y="1266974"/>
+            <a:ext cx="8331398" cy="603052"/>
+          </a:xfrm>
+          <a:prstGeom prst="rect">
+            <a:avLst/>
+          </a:prstGeom>
+          <a:solidFill>
+            <a:srgbClr val="F4F8F9"/>
+          </a:solidFill>
+          <a:ln/>
+        </p:spPr>
+        <p:txBody>
+          <a:bodyPr wrap="square" rtlCol="0" anchor="ctr"/>
+          <a:lstStyle/>
+          <a:p>
+            <a:pPr indent="0" marL="0">
+              <a:buNone/>
+            </a:pPr>
+            <a:endParaRPr lang="en-US" dirty="0"/>
+          </a:p>
+        </p:txBody>
+      </p:sp>
+      <p:sp>
+        <p:nvSpPr>
+          <p:cNvPr id="6" name="Shape 4"/>
+          <p:cNvSpPr/>
+          <p:nvPr/>
+        </p:nvSpPr>
+        <p:spPr>
+          <a:xfrm>
+            <a:off x="430113" y="1266974"/>
+            <a:ext cx="0" cy="603052"/>
+          </a:xfrm>
+          <a:prstGeom prst="line">
+            <a:avLst/>
+          </a:prstGeom>
+          <a:noFill/>
+          <a:ln w="47625">
+            <a:solidFill>
+              <a:srgbClr val="277884"/>
+            </a:solidFill>
+            <a:prstDash val="solid"/>
+          </a:ln>
+        </p:spPr>
+      </p:sp>
+      <p:sp>
+        <p:nvSpPr>
+          <p:cNvPr id="7" name="Text 5"/>
+          <p:cNvSpPr/>
+          <p:nvPr/>
+        </p:nvSpPr>
+        <p:spPr>
+          <a:xfrm>
+            <a:off x="631627" y="1393924"/>
+            <a:ext cx="8086939" cy="174575"/>
+          </a:xfrm>
+          <a:prstGeom prst="rect">
+            <a:avLst/>
+          </a:prstGeom>
+          <a:noFill/>
+          <a:ln/>
+        </p:spPr>
+        <p:txBody>
+          <a:bodyPr wrap="square" lIns="0" tIns="0" rIns="0" bIns="0" rtlCol="0" anchor="t"/>
+          <a:lstStyle/>
+          <a:p>
+            <a:pPr algn="l" indent="0" marL="0">
+              <a:lnSpc>
+                <a:spcPts val="1375"/>
+              </a:lnSpc>
+              <a:buNone/>
+            </a:pPr>
+            <a:r>
+              <a:rPr lang="en-US" sz="1100" dirty="0">
+                <a:solidFill>
+                  <a:srgbClr val="1C2833"/>
+                </a:solidFill>
+                <a:latin typeface="Courier New" pitchFamily="34" charset="0"/>
+                <a:ea typeface="Courier New" pitchFamily="34" charset="-122"/>
+                <a:cs typeface="Courier New" pitchFamily="34" charset="-120"/>
+              </a:rPr>
+              <a:t>12 × 11    23 × 11    34 × 11    45 × 11    52 × 11</a:t>
+            </a:r>
+            <a:endParaRPr lang="en-US" sz="1100" dirty="0"/>
+          </a:p>
+        </p:txBody>
+      </p:sp>
+      <p:sp>
+        <p:nvSpPr>
+          <p:cNvPr id="8" name="Text 6"/>
+          <p:cNvSpPr/>
+          <p:nvPr/>
+        </p:nvSpPr>
+        <p:spPr>
+          <a:xfrm>
+            <a:off x="631627" y="1568500"/>
+            <a:ext cx="8086939" cy="174575"/>
+          </a:xfrm>
+          <a:prstGeom prst="rect">
+            <a:avLst/>
+          </a:prstGeom>
+          <a:noFill/>
+          <a:ln/>
+        </p:spPr>
+        <p:txBody>
+          <a:bodyPr wrap="square" lIns="0" tIns="0" rIns="0" bIns="0" rtlCol="0" anchor="t"/>
+          <a:lstStyle/>
+          <a:p>
+            <a:pPr algn="l" indent="0" marL="0">
+              <a:lnSpc>
+                <a:spcPts val="1375"/>
+              </a:lnSpc>
+              <a:buNone/>
+            </a:pPr>
+            <a:r>
+              <a:rPr lang="en-US" sz="1100" dirty="0">
+                <a:solidFill>
+                  <a:srgbClr val="1C2833"/>
+                </a:solidFill>
+                <a:latin typeface="Courier New" pitchFamily="34" charset="0"/>
+                <a:ea typeface="Courier New" pitchFamily="34" charset="-122"/>
+                <a:cs typeface="Courier New" pitchFamily="34" charset="-120"/>
+              </a:rPr>
+              <a:t>61 × 11    16 × 11    27 × 11    35 × 11    44 × 11</a:t>
+            </a:r>
+            <a:endParaRPr lang="en-US" sz="1100" dirty="0"/>
+          </a:p>
+        </p:txBody>
+      </p:sp>
+      <p:sp>
+        <p:nvSpPr>
+          <p:cNvPr id="9" name="Text 7"/>
+          <p:cNvSpPr/>
+          <p:nvPr/>
+        </p:nvSpPr>
+        <p:spPr>
+          <a:xfrm>
+            <a:off x="634901" y="1971526"/>
+            <a:ext cx="8102798" cy="281880"/>
+          </a:xfrm>
+          <a:prstGeom prst="rect">
+            <a:avLst/>
+          </a:prstGeom>
+          <a:noFill/>
+          <a:ln/>
+        </p:spPr>
+        <p:txBody>
+          <a:bodyPr wrap="square" lIns="0" tIns="0" rIns="0" bIns="0" rtlCol="0" anchor="t"/>
+          <a:lstStyle/>
+          <a:p>
+            <a:pPr algn="l" marL="342900" indent="-342900">
+              <a:lnSpc>
+                <a:spcPts val="1620"/>
+              </a:lnSpc>
+              <a:spcAft>
+                <a:spcPts val="300"/>
+              </a:spcAft>
+              <a:buSzPct val="100000"/>
+              <a:buChar char="•"/>
+            </a:pPr>
+            <a:r>
+              <a:rPr lang="en-US" sz="1200" dirty="0">
                 <a:solidFill>
                   <a:srgbClr val="1C2833"/>
                 </a:solidFill>
@@ -4034,8 +4713,33 @@
                 <a:ea typeface="Arial" pitchFamily="34" charset="-122"/>
                 <a:cs typeface="Arial" pitchFamily="34" charset="-120"/>
               </a:rPr>
-              <a:t>Vedic Mathematics</a:t>
-            </a:r>
+              <a:t>Pair work. Partner times each other. Goal: each problem under 3 seconds.</a:t>
+            </a:r>
+            <a:endParaRPr lang="en-US" sz="1200" dirty="0"/>
+          </a:p>
+        </p:txBody>
+      </p:sp>
+      <p:sp>
+        <p:nvSpPr>
+          <p:cNvPr id="10" name="Text 8"/>
+          <p:cNvSpPr/>
+          <p:nvPr/>
+        </p:nvSpPr>
+        <p:spPr>
+          <a:xfrm>
+            <a:off x="406301" y="4434929"/>
+            <a:ext cx="8498026" cy="213271"/>
+          </a:xfrm>
+          <a:prstGeom prst="rect">
+            <a:avLst/>
+          </a:prstGeom>
+          <a:noFill/>
+          <a:ln/>
+        </p:spPr>
+        <p:txBody>
+          <a:bodyPr wrap="square" lIns="0" tIns="0" rIns="0" bIns="0" rtlCol="0" anchor="t"/>
+          <a:lstStyle/>
+          <a:p>
             <a:pPr algn="l" indent="0" marL="0">
               <a:lnSpc>
                 <a:spcPts val="1680"/>
@@ -4057,22 +4761,155 @@
                 <a:ea typeface="Arial" pitchFamily="34" charset="-122"/>
                 <a:cs typeface="Arial" pitchFamily="34" charset="-120"/>
               </a:rPr>
-              <a:t>. Motilal Banarsidass. Sūtra 1, </a:t>
-            </a:r>
-            <a:pPr algn="l" indent="0" marL="0">
-              <a:lnSpc>
-                <a:spcPts val="1680"/>
+              <a:t>Middle ·  · IKS Curriculum</a:t>
+            </a:r>
+            <a:endParaRPr lang="en-US" sz="1200" dirty="0"/>
+          </a:p>
+        </p:txBody>
+      </p:sp>
+    </p:spTree>
+  </p:cSld>
+  <p:clrMapOvr>
+    <a:masterClrMapping/>
+  </p:clrMapOvr>
+</p:sld>
+</file>
+
+<file path=ppt/slides/slide15.xml><?xml version="1.0" encoding="utf-8"?>
+<p:sld xmlns:a="http://schemas.openxmlformats.org/drawingml/2006/main" xmlns:r="http://schemas.openxmlformats.org/officeDocument/2006/relationships" xmlns:p="http://schemas.openxmlformats.org/presentationml/2006/main">
+  <p:cSld name="Slide 15">
+    <p:bg>
+      <p:bgPr>
+        <a:solidFill>
+          <a:srgbClr val="FFFFFF"/>
+        </a:solidFill>
+      </p:bgPr>
+    </p:bg>
+    <p:spTree>
+      <p:nvGrpSpPr>
+        <p:cNvPr id="1" name=""/>
+        <p:cNvGrpSpPr/>
+        <p:nvPr/>
+      </p:nvGrpSpPr>
+      <p:grpSpPr>
+        <a:xfrm>
+          <a:off x="0" y="0"/>
+          <a:ext cx="0" cy="0"/>
+          <a:chOff x="0" y="0"/>
+          <a:chExt cx="0" cy="0"/>
+        </a:xfrm>
+      </p:grpSpPr>
+      <p:sp>
+        <p:nvSpPr>
+          <p:cNvPr id="2" name="Text 0"/>
+          <p:cNvSpPr/>
+          <p:nvPr/>
+        </p:nvSpPr>
+        <p:spPr>
+          <a:xfrm>
+            <a:off x="0" y="0"/>
+            <a:ext cx="9144000" cy="101501"/>
+          </a:xfrm>
+          <a:prstGeom prst="rect">
+            <a:avLst/>
+          </a:prstGeom>
+          <a:solidFill>
+            <a:srgbClr val="277884"/>
+          </a:solidFill>
+          <a:ln/>
+        </p:spPr>
+        <p:txBody>
+          <a:bodyPr wrap="square" rtlCol="0" anchor="ctr"/>
+          <a:lstStyle/>
+          <a:p>
+            <a:pPr indent="0" marL="0">
+              <a:buNone/>
+            </a:pPr>
+            <a:endParaRPr lang="en-US" dirty="0"/>
+          </a:p>
+        </p:txBody>
+      </p:sp>
+      <p:sp>
+        <p:nvSpPr>
+          <p:cNvPr id="3" name="Text 1"/>
+          <p:cNvSpPr/>
+          <p:nvPr/>
+        </p:nvSpPr>
+        <p:spPr>
+          <a:xfrm>
+            <a:off x="406301" y="457051"/>
+            <a:ext cx="8498026" cy="274290"/>
+          </a:xfrm>
+          <a:prstGeom prst="rect">
+            <a:avLst/>
+          </a:prstGeom>
+          <a:noFill/>
+          <a:ln/>
+        </p:spPr>
+        <p:txBody>
+          <a:bodyPr wrap="square" lIns="0" tIns="0" rIns="0" bIns="0" rtlCol="0" anchor="t"/>
+          <a:lstStyle/>
+          <a:p>
+            <a:pPr algn="l" indent="0" marL="0">
+              <a:lnSpc>
+                <a:spcPts val="2160"/>
               </a:lnSpc>
               <a:spcBef>
-                <a:spcPts val="300"/>
+                <a:spcPts val="600"/>
               </a:spcBef>
               <a:spcAft>
-                <a:spcPts val="300"/>
-              </a:spcAft>
-              <a:buNone/>
-            </a:pPr>
-            <a:r>
-              <a:rPr lang="en-US" sz="1200" i="1" dirty="0">
+                <a:spcPts val="800"/>
+              </a:spcAft>
+              <a:buNone/>
+            </a:pPr>
+            <a:r>
+              <a:rPr lang="en-US" sz="1800" b="1" dirty="0">
+                <a:solidFill>
+                  <a:srgbClr val="FE4447"/>
+                </a:solidFill>
+                <a:latin typeface="Georgia" pitchFamily="34" charset="0"/>
+                <a:ea typeface="Georgia" pitchFamily="34" charset="-122"/>
+                <a:cs typeface="Georgia" pitchFamily="34" charset="-120"/>
+              </a:rPr>
+              <a:t>Activity (15 min) — Try it yourself (cont.)</a:t>
+            </a:r>
+            <a:endParaRPr lang="en-US" sz="1800" dirty="0"/>
+          </a:p>
+        </p:txBody>
+      </p:sp>
+      <p:sp>
+        <p:nvSpPr>
+          <p:cNvPr id="4" name="Text 2"/>
+          <p:cNvSpPr/>
+          <p:nvPr/>
+        </p:nvSpPr>
+        <p:spPr>
+          <a:xfrm>
+            <a:off x="634901" y="883593"/>
+            <a:ext cx="8102798" cy="281880"/>
+          </a:xfrm>
+          <a:prstGeom prst="rect">
+            <a:avLst/>
+          </a:prstGeom>
+          <a:noFill/>
+          <a:ln/>
+        </p:spPr>
+        <p:txBody>
+          <a:bodyPr wrap="square" lIns="0" tIns="0" rIns="0" bIns="0" rtlCol="0" anchor="t"/>
+          <a:lstStyle/>
+          <a:p>
+            <a:pPr algn="l" marL="342900" indent="-342900">
+              <a:lnSpc>
+                <a:spcPts val="1620"/>
+              </a:lnSpc>
+              <a:spcAft>
+                <a:spcPts val="300"/>
+              </a:spcAft>
+              <a:buSzPct val="100000"/>
+              <a:buChar char="•"/>
+            </a:pPr>
+            <a:r>
+              <a:rPr lang="en-US" sz="1200" dirty="0">
                 <a:solidFill>
                   <a:srgbClr val="1C2833"/>
                 </a:solidFill>
@@ -4080,22 +4917,19 @@
                 <a:ea typeface="Arial" pitchFamily="34" charset="-122"/>
                 <a:cs typeface="Arial" pitchFamily="34" charset="-120"/>
               </a:rPr>
-              <a:t>Ekādhikena Pūrveṇa</a:t>
-            </a:r>
-            <a:pPr algn="l" indent="0" marL="0">
-              <a:lnSpc>
-                <a:spcPts val="1680"/>
-              </a:lnSpc>
-              <a:spcBef>
-                <a:spcPts val="300"/>
-              </a:spcBef>
-              <a:spcAft>
-                <a:spcPts val="300"/>
-              </a:spcAft>
-              <a:buNone/>
-            </a:pPr>
-            <a:r>
-              <a:rPr lang="en-US" sz="1200" dirty="0">
+              <a:t>After 10 min, students re-do </a:t>
+            </a:r>
+            <a:pPr algn="l" indent="0" marL="0">
+              <a:lnSpc>
+                <a:spcPts val="1620"/>
+              </a:lnSpc>
+              <a:spcAft>
+                <a:spcPts val="300"/>
+              </a:spcAft>
+              <a:buNone/>
+            </a:pPr>
+            <a:r>
+              <a:rPr lang="en-US" sz="1200" b="1" dirty="0">
                 <a:solidFill>
                   <a:srgbClr val="1C2833"/>
                 </a:solidFill>
@@ -4103,7 +4937,1429 @@
                 <a:ea typeface="Arial" pitchFamily="34" charset="-122"/>
                 <a:cs typeface="Arial" pitchFamily="34" charset="-120"/>
               </a:rPr>
-              <a:t>.</a:t>
+              <a:t>73 × 11</a:t>
+            </a:r>
+            <a:pPr algn="l" indent="0" marL="0">
+              <a:lnSpc>
+                <a:spcPts val="1620"/>
+              </a:lnSpc>
+              <a:spcAft>
+                <a:spcPts val="300"/>
+              </a:spcAft>
+              <a:buNone/>
+            </a:pPr>
+            <a:r>
+              <a:rPr lang="en-US" sz="1200" dirty="0">
+                <a:solidFill>
+                  <a:srgbClr val="1C2833"/>
+                </a:solidFill>
+                <a:latin typeface="Arial" pitchFamily="34" charset="0"/>
+                <a:ea typeface="Arial" pitchFamily="34" charset="-122"/>
+                <a:cs typeface="Arial" pitchFamily="34" charset="-120"/>
+              </a:rPr>
+              <a:t> on the back of the baseline sheet. </a:t>
+            </a:r>
+            <a:pPr algn="l" indent="0" marL="0">
+              <a:lnSpc>
+                <a:spcPts val="1620"/>
+              </a:lnSpc>
+              <a:spcAft>
+                <a:spcPts val="300"/>
+              </a:spcAft>
+              <a:buNone/>
+            </a:pPr>
+            <a:r>
+              <a:rPr lang="en-US" sz="1200" i="1" dirty="0">
+                <a:solidFill>
+                  <a:srgbClr val="1C2833"/>
+                </a:solidFill>
+                <a:latin typeface="Arial" pitchFamily="34" charset="0"/>
+                <a:ea typeface="Arial" pitchFamily="34" charset="-122"/>
+                <a:cs typeface="Arial" pitchFamily="34" charset="-120"/>
+              </a:rPr>
+              <a:t>Hmm — 7 + 3 = 10. That's tomorrow's lesson.</a:t>
+            </a:r>
+            <a:endParaRPr lang="en-US" sz="1200" dirty="0"/>
+          </a:p>
+        </p:txBody>
+      </p:sp>
+      <p:sp>
+        <p:nvSpPr>
+          <p:cNvPr id="5" name="Text 3"/>
+          <p:cNvSpPr/>
+          <p:nvPr/>
+        </p:nvSpPr>
+        <p:spPr>
+          <a:xfrm>
+            <a:off x="406301" y="4434929"/>
+            <a:ext cx="8498026" cy="213271"/>
+          </a:xfrm>
+          <a:prstGeom prst="rect">
+            <a:avLst/>
+          </a:prstGeom>
+          <a:noFill/>
+          <a:ln/>
+        </p:spPr>
+        <p:txBody>
+          <a:bodyPr wrap="square" lIns="0" tIns="0" rIns="0" bIns="0" rtlCol="0" anchor="t"/>
+          <a:lstStyle/>
+          <a:p>
+            <a:pPr algn="l" indent="0" marL="0">
+              <a:lnSpc>
+                <a:spcPts val="1680"/>
+              </a:lnSpc>
+              <a:spcBef>
+                <a:spcPts val="300"/>
+              </a:spcBef>
+              <a:spcAft>
+                <a:spcPts val="300"/>
+              </a:spcAft>
+              <a:buNone/>
+            </a:pPr>
+            <a:r>
+              <a:rPr lang="en-US" sz="1200" dirty="0">
+                <a:solidFill>
+                  <a:srgbClr val="1C2833"/>
+                </a:solidFill>
+                <a:latin typeface="Arial" pitchFamily="34" charset="0"/>
+                <a:ea typeface="Arial" pitchFamily="34" charset="-122"/>
+                <a:cs typeface="Arial" pitchFamily="34" charset="-120"/>
+              </a:rPr>
+              <a:t>Middle ·  · IKS Curriculum</a:t>
+            </a:r>
+            <a:endParaRPr lang="en-US" sz="1200" dirty="0"/>
+          </a:p>
+        </p:txBody>
+      </p:sp>
+    </p:spTree>
+  </p:cSld>
+  <p:clrMapOvr>
+    <a:masterClrMapping/>
+  </p:clrMapOvr>
+</p:sld>
+</file>
+
+<file path=ppt/slides/slide16.xml><?xml version="1.0" encoding="utf-8"?>
+<p:sld xmlns:a="http://schemas.openxmlformats.org/drawingml/2006/main" xmlns:r="http://schemas.openxmlformats.org/officeDocument/2006/relationships" xmlns:p="http://schemas.openxmlformats.org/presentationml/2006/main">
+  <p:cSld name="Slide 16">
+    <p:bg>
+      <p:bgPr>
+        <a:solidFill>
+          <a:srgbClr val="FFFFFF"/>
+        </a:solidFill>
+      </p:bgPr>
+    </p:bg>
+    <p:spTree>
+      <p:nvGrpSpPr>
+        <p:cNvPr id="1" name=""/>
+        <p:cNvGrpSpPr/>
+        <p:nvPr/>
+      </p:nvGrpSpPr>
+      <p:grpSpPr>
+        <a:xfrm>
+          <a:off x="0" y="0"/>
+          <a:ext cx="0" cy="0"/>
+          <a:chOff x="0" y="0"/>
+          <a:chExt cx="0" cy="0"/>
+        </a:xfrm>
+      </p:grpSpPr>
+      <p:sp>
+        <p:nvSpPr>
+          <p:cNvPr id="2" name="Text 0"/>
+          <p:cNvSpPr/>
+          <p:nvPr/>
+        </p:nvSpPr>
+        <p:spPr>
+          <a:xfrm>
+            <a:off x="0" y="0"/>
+            <a:ext cx="9144000" cy="101501"/>
+          </a:xfrm>
+          <a:prstGeom prst="rect">
+            <a:avLst/>
+          </a:prstGeom>
+          <a:solidFill>
+            <a:srgbClr val="277884"/>
+          </a:solidFill>
+          <a:ln/>
+        </p:spPr>
+        <p:txBody>
+          <a:bodyPr wrap="square" rtlCol="0" anchor="ctr"/>
+          <a:lstStyle/>
+          <a:p>
+            <a:pPr indent="0" marL="0">
+              <a:buNone/>
+            </a:pPr>
+            <a:endParaRPr lang="en-US" dirty="0"/>
+          </a:p>
+        </p:txBody>
+      </p:sp>
+      <p:sp>
+        <p:nvSpPr>
+          <p:cNvPr id="3" name="Text 1"/>
+          <p:cNvSpPr/>
+          <p:nvPr/>
+        </p:nvSpPr>
+        <p:spPr>
+          <a:xfrm>
+            <a:off x="406301" y="457051"/>
+            <a:ext cx="8498026" cy="274290"/>
+          </a:xfrm>
+          <a:prstGeom prst="rect">
+            <a:avLst/>
+          </a:prstGeom>
+          <a:noFill/>
+          <a:ln/>
+        </p:spPr>
+        <p:txBody>
+          <a:bodyPr wrap="square" lIns="0" tIns="0" rIns="0" bIns="0" rtlCol="0" anchor="t"/>
+          <a:lstStyle/>
+          <a:p>
+            <a:pPr algn="l" indent="0" marL="0">
+              <a:lnSpc>
+                <a:spcPts val="2160"/>
+              </a:lnSpc>
+              <a:spcBef>
+                <a:spcPts val="600"/>
+              </a:spcBef>
+              <a:spcAft>
+                <a:spcPts val="800"/>
+              </a:spcAft>
+              <a:buNone/>
+            </a:pPr>
+            <a:r>
+              <a:rPr lang="en-US" sz="1800" b="1" dirty="0">
+                <a:solidFill>
+                  <a:srgbClr val="FE4447"/>
+                </a:solidFill>
+                <a:latin typeface="Georgia" pitchFamily="34" charset="0"/>
+                <a:ea typeface="Georgia" pitchFamily="34" charset="-122"/>
+                <a:cs typeface="Georgia" pitchFamily="34" charset="-120"/>
+              </a:rPr>
+              <a:t>Wrap-up (5 min)</a:t>
+            </a:r>
+            <a:endParaRPr lang="en-US" sz="1800" dirty="0"/>
+          </a:p>
+        </p:txBody>
+      </p:sp>
+      <p:sp>
+        <p:nvSpPr>
+          <p:cNvPr id="4" name="Text 2"/>
+          <p:cNvSpPr/>
+          <p:nvPr/>
+        </p:nvSpPr>
+        <p:spPr>
+          <a:xfrm>
+            <a:off x="634901" y="883593"/>
+            <a:ext cx="8102798" cy="731341"/>
+          </a:xfrm>
+          <a:prstGeom prst="rect">
+            <a:avLst/>
+          </a:prstGeom>
+          <a:noFill/>
+          <a:ln/>
+        </p:spPr>
+        <p:txBody>
+          <a:bodyPr wrap="square" lIns="0" tIns="0" rIns="0" bIns="0" rtlCol="0" anchor="t"/>
+          <a:lstStyle/>
+          <a:p>
+            <a:pPr algn="l" marL="342900" indent="-342900">
+              <a:lnSpc>
+                <a:spcPts val="1620"/>
+              </a:lnSpc>
+              <a:spcAft>
+                <a:spcPts val="300"/>
+              </a:spcAft>
+              <a:buSzPct val="100000"/>
+              <a:buChar char="•"/>
+            </a:pPr>
+            <a:r>
+              <a:rPr lang="en-US" sz="1200" dirty="0">
+                <a:solidFill>
+                  <a:srgbClr val="1C2833"/>
+                </a:solidFill>
+                <a:latin typeface="Arial" pitchFamily="34" charset="0"/>
+                <a:ea typeface="Arial" pitchFamily="34" charset="-122"/>
+                <a:cs typeface="Arial" pitchFamily="34" charset="-120"/>
+              </a:rPr>
+              <a:t>Show of hands: who finished all 10 in under 30 seconds? (Most will.)</a:t>
+            </a:r>
+            <a:endParaRPr lang="en-US" sz="1200" dirty="0"/>
+          </a:p>
+          <a:p>
+            <a:pPr algn="l" marL="342900" indent="-342900">
+              <a:lnSpc>
+                <a:spcPts val="1620"/>
+              </a:lnSpc>
+              <a:spcAft>
+                <a:spcPts val="300"/>
+              </a:spcAft>
+              <a:buSzPct val="100000"/>
+              <a:buChar char="•"/>
+            </a:pPr>
+            <a:r>
+              <a:rPr lang="en-US" sz="1200" dirty="0">
+                <a:solidFill>
+                  <a:srgbClr val="1C2833"/>
+                </a:solidFill>
+                <a:latin typeface="Arial" pitchFamily="34" charset="0"/>
+                <a:ea typeface="Arial" pitchFamily="34" charset="-122"/>
+                <a:cs typeface="Arial" pitchFamily="34" charset="-120"/>
+              </a:rPr>
+              <a:t>Tease tomorrow: </a:t>
+            </a:r>
+            <a:pPr algn="l" indent="0" marL="0">
+              <a:lnSpc>
+                <a:spcPts val="1620"/>
+              </a:lnSpc>
+              <a:spcAft>
+                <a:spcPts val="300"/>
+              </a:spcAft>
+              <a:buNone/>
+            </a:pPr>
+            <a:r>
+              <a:rPr lang="en-US" sz="1200" i="1" dirty="0">
+                <a:solidFill>
+                  <a:srgbClr val="1C2833"/>
+                </a:solidFill>
+                <a:latin typeface="Arial" pitchFamily="34" charset="0"/>
+                <a:ea typeface="Arial" pitchFamily="34" charset="-122"/>
+                <a:cs typeface="Arial" pitchFamily="34" charset="-120"/>
+              </a:rPr>
+              <a:t>"73 × 11 broke the rule because 7 + 3 = 10 and you can't write 10 in the middle of a number. Tomorrow — the carry case."</a:t>
+            </a:r>
+            <a:endParaRPr lang="en-US" sz="1200" dirty="0"/>
+          </a:p>
+        </p:txBody>
+      </p:sp>
+      <p:sp>
+        <p:nvSpPr>
+          <p:cNvPr id="5" name="Text 3"/>
+          <p:cNvSpPr/>
+          <p:nvPr/>
+        </p:nvSpPr>
+        <p:spPr>
+          <a:xfrm>
+            <a:off x="406301" y="4434929"/>
+            <a:ext cx="8498026" cy="213271"/>
+          </a:xfrm>
+          <a:prstGeom prst="rect">
+            <a:avLst/>
+          </a:prstGeom>
+          <a:noFill/>
+          <a:ln/>
+        </p:spPr>
+        <p:txBody>
+          <a:bodyPr wrap="square" lIns="0" tIns="0" rIns="0" bIns="0" rtlCol="0" anchor="t"/>
+          <a:lstStyle/>
+          <a:p>
+            <a:pPr algn="l" indent="0" marL="0">
+              <a:lnSpc>
+                <a:spcPts val="1680"/>
+              </a:lnSpc>
+              <a:spcBef>
+                <a:spcPts val="300"/>
+              </a:spcBef>
+              <a:spcAft>
+                <a:spcPts val="300"/>
+              </a:spcAft>
+              <a:buNone/>
+            </a:pPr>
+            <a:r>
+              <a:rPr lang="en-US" sz="1200" dirty="0">
+                <a:solidFill>
+                  <a:srgbClr val="1C2833"/>
+                </a:solidFill>
+                <a:latin typeface="Arial" pitchFamily="34" charset="0"/>
+                <a:ea typeface="Arial" pitchFamily="34" charset="-122"/>
+                <a:cs typeface="Arial" pitchFamily="34" charset="-120"/>
+              </a:rPr>
+              <a:t>Middle ·  · IKS Curriculum</a:t>
+            </a:r>
+            <a:endParaRPr lang="en-US" sz="1200" dirty="0"/>
+          </a:p>
+        </p:txBody>
+      </p:sp>
+    </p:spTree>
+  </p:cSld>
+  <p:clrMapOvr>
+    <a:masterClrMapping/>
+  </p:clrMapOvr>
+</p:sld>
+</file>
+
+<file path=ppt/slides/slide17.xml><?xml version="1.0" encoding="utf-8"?>
+<p:sld xmlns:a="http://schemas.openxmlformats.org/drawingml/2006/main" xmlns:r="http://schemas.openxmlformats.org/officeDocument/2006/relationships" xmlns:p="http://schemas.openxmlformats.org/presentationml/2006/main">
+  <p:cSld name="Slide 17">
+    <p:bg>
+      <p:bgPr>
+        <a:solidFill>
+          <a:srgbClr val="FFFFFF"/>
+        </a:solidFill>
+      </p:bgPr>
+    </p:bg>
+    <p:spTree>
+      <p:nvGrpSpPr>
+        <p:cNvPr id="1" name=""/>
+        <p:cNvGrpSpPr/>
+        <p:nvPr/>
+      </p:nvGrpSpPr>
+      <p:grpSpPr>
+        <a:xfrm>
+          <a:off x="0" y="0"/>
+          <a:ext cx="0" cy="0"/>
+          <a:chOff x="0" y="0"/>
+          <a:chExt cx="0" cy="0"/>
+        </a:xfrm>
+      </p:grpSpPr>
+      <p:sp>
+        <p:nvSpPr>
+          <p:cNvPr id="2" name="Text 0"/>
+          <p:cNvSpPr/>
+          <p:nvPr/>
+        </p:nvSpPr>
+        <p:spPr>
+          <a:xfrm>
+            <a:off x="0" y="0"/>
+            <a:ext cx="9144000" cy="101501"/>
+          </a:xfrm>
+          <a:prstGeom prst="rect">
+            <a:avLst/>
+          </a:prstGeom>
+          <a:solidFill>
+            <a:srgbClr val="277884"/>
+          </a:solidFill>
+          <a:ln/>
+        </p:spPr>
+        <p:txBody>
+          <a:bodyPr wrap="square" rtlCol="0" anchor="ctr"/>
+          <a:lstStyle/>
+          <a:p>
+            <a:pPr indent="0" marL="0">
+              <a:buNone/>
+            </a:pPr>
+            <a:endParaRPr lang="en-US" dirty="0"/>
+          </a:p>
+        </p:txBody>
+      </p:sp>
+      <p:sp>
+        <p:nvSpPr>
+          <p:cNvPr id="3" name="Text 1"/>
+          <p:cNvSpPr/>
+          <p:nvPr/>
+        </p:nvSpPr>
+        <p:spPr>
+          <a:xfrm>
+            <a:off x="406301" y="457051"/>
+            <a:ext cx="8498026" cy="274290"/>
+          </a:xfrm>
+          <a:prstGeom prst="rect">
+            <a:avLst/>
+          </a:prstGeom>
+          <a:noFill/>
+          <a:ln/>
+        </p:spPr>
+        <p:txBody>
+          <a:bodyPr wrap="square" lIns="0" tIns="0" rIns="0" bIns="0" rtlCol="0" anchor="t"/>
+          <a:lstStyle/>
+          <a:p>
+            <a:pPr algn="l" indent="0" marL="0">
+              <a:lnSpc>
+                <a:spcPts val="2160"/>
+              </a:lnSpc>
+              <a:spcBef>
+                <a:spcPts val="600"/>
+              </a:spcBef>
+              <a:spcAft>
+                <a:spcPts val="800"/>
+              </a:spcAft>
+              <a:buNone/>
+            </a:pPr>
+            <a:r>
+              <a:rPr lang="en-US" sz="1800" b="1" dirty="0">
+                <a:solidFill>
+                  <a:srgbClr val="FE4447"/>
+                </a:solidFill>
+                <a:latin typeface="Georgia" pitchFamily="34" charset="0"/>
+                <a:ea typeface="Georgia" pitchFamily="34" charset="-122"/>
+                <a:cs typeface="Georgia" pitchFamily="34" charset="-120"/>
+              </a:rPr>
+              <a:t>Student-facing content</a:t>
+            </a:r>
+            <a:endParaRPr lang="en-US" sz="1800" dirty="0"/>
+          </a:p>
+        </p:txBody>
+      </p:sp>
+      <p:sp>
+        <p:nvSpPr>
+          <p:cNvPr id="4" name="Text 2"/>
+          <p:cNvSpPr/>
+          <p:nvPr/>
+        </p:nvSpPr>
+        <p:spPr>
+          <a:xfrm>
+            <a:off x="406301" y="883593"/>
+            <a:ext cx="8331398" cy="2688431"/>
+          </a:xfrm>
+          <a:prstGeom prst="rect">
+            <a:avLst/>
+          </a:prstGeom>
+          <a:solidFill>
+            <a:srgbClr val="F4F8F9"/>
+          </a:solidFill>
+          <a:ln/>
+        </p:spPr>
+        <p:txBody>
+          <a:bodyPr wrap="square" rtlCol="0" anchor="ctr"/>
+          <a:lstStyle/>
+          <a:p>
+            <a:pPr indent="0" marL="0">
+              <a:buNone/>
+            </a:pPr>
+            <a:endParaRPr lang="en-US" dirty="0"/>
+          </a:p>
+        </p:txBody>
+      </p:sp>
+      <p:sp>
+        <p:nvSpPr>
+          <p:cNvPr id="5" name="Shape 3"/>
+          <p:cNvSpPr/>
+          <p:nvPr/>
+        </p:nvSpPr>
+        <p:spPr>
+          <a:xfrm>
+            <a:off x="434876" y="883593"/>
+            <a:ext cx="0" cy="2688431"/>
+          </a:xfrm>
+          <a:prstGeom prst="line">
+            <a:avLst/>
+          </a:prstGeom>
+          <a:noFill/>
+          <a:ln w="57150">
+            <a:solidFill>
+              <a:srgbClr val="FE4447"/>
+            </a:solidFill>
+            <a:prstDash val="solid"/>
+          </a:ln>
+        </p:spPr>
+      </p:sp>
+      <p:sp>
+        <p:nvSpPr>
+          <p:cNvPr id="6" name="Text 4"/>
+          <p:cNvSpPr/>
+          <p:nvPr/>
+        </p:nvSpPr>
+        <p:spPr>
+          <a:xfrm>
+            <a:off x="692051" y="1074093"/>
+            <a:ext cx="7973389" cy="230981"/>
+          </a:xfrm>
+          <a:prstGeom prst="rect">
+            <a:avLst/>
+          </a:prstGeom>
+          <a:noFill/>
+          <a:ln/>
+        </p:spPr>
+        <p:txBody>
+          <a:bodyPr wrap="square" lIns="0" tIns="0" rIns="0" bIns="0" rtlCol="0" anchor="t"/>
+          <a:lstStyle/>
+          <a:p>
+            <a:pPr algn="l" indent="0" marL="0">
+              <a:lnSpc>
+                <a:spcPts val="1820"/>
+              </a:lnSpc>
+              <a:spcBef>
+                <a:spcPts val="300"/>
+              </a:spcBef>
+              <a:spcAft>
+                <a:spcPts val="300"/>
+              </a:spcAft>
+              <a:buNone/>
+            </a:pPr>
+            <a:r>
+              <a:rPr lang="en-US" sz="1300" b="1" i="1" dirty="0">
+                <a:solidFill>
+                  <a:srgbClr val="1C2833"/>
+                </a:solidFill>
+                <a:latin typeface="Georgia" pitchFamily="34" charset="0"/>
+                <a:ea typeface="Georgia" pitchFamily="34" charset="-122"/>
+                <a:cs typeface="Georgia" pitchFamily="34" charset="-120"/>
+              </a:rPr>
+              <a:t>The ×11 Trick (no-carry case)</a:t>
+            </a:r>
+            <a:endParaRPr lang="en-US" sz="1300" dirty="0"/>
+          </a:p>
+        </p:txBody>
+      </p:sp>
+      <p:sp>
+        <p:nvSpPr>
+          <p:cNvPr id="7" name="Text 5"/>
+          <p:cNvSpPr/>
+          <p:nvPr/>
+        </p:nvSpPr>
+        <p:spPr>
+          <a:xfrm>
+            <a:off x="692051" y="1343174"/>
+            <a:ext cx="7973389" cy="230981"/>
+          </a:xfrm>
+          <a:prstGeom prst="rect">
+            <a:avLst/>
+          </a:prstGeom>
+          <a:noFill/>
+          <a:ln/>
+        </p:spPr>
+        <p:txBody>
+          <a:bodyPr wrap="square" lIns="0" tIns="0" rIns="0" bIns="0" rtlCol="0" anchor="t"/>
+          <a:lstStyle/>
+          <a:p>
+            <a:pPr algn="l" indent="0" marL="0">
+              <a:lnSpc>
+                <a:spcPts val="1820"/>
+              </a:lnSpc>
+              <a:spcBef>
+                <a:spcPts val="300"/>
+              </a:spcBef>
+              <a:spcAft>
+                <a:spcPts val="300"/>
+              </a:spcAft>
+              <a:buNone/>
+            </a:pPr>
+            <a:r>
+              <a:rPr lang="en-US" sz="1300" i="1" dirty="0">
+                <a:solidFill>
+                  <a:srgbClr val="1C2833"/>
+                </a:solidFill>
+                <a:latin typeface="Georgia" pitchFamily="34" charset="0"/>
+                <a:ea typeface="Georgia" pitchFamily="34" charset="-122"/>
+                <a:cs typeface="Georgia" pitchFamily="34" charset="-120"/>
+              </a:rPr>
+              <a:t>For any 2-digit number with digit-sum &lt; 10:</a:t>
+            </a:r>
+            <a:endParaRPr lang="en-US" sz="1300" dirty="0"/>
+          </a:p>
+        </p:txBody>
+      </p:sp>
+      <p:sp>
+        <p:nvSpPr>
+          <p:cNvPr id="8" name="Text 6"/>
+          <p:cNvSpPr/>
+          <p:nvPr/>
+        </p:nvSpPr>
+        <p:spPr>
+          <a:xfrm>
+            <a:off x="692051" y="1612255"/>
+            <a:ext cx="7973389" cy="230981"/>
+          </a:xfrm>
+          <a:prstGeom prst="rect">
+            <a:avLst/>
+          </a:prstGeom>
+          <a:noFill/>
+          <a:ln/>
+        </p:spPr>
+        <p:txBody>
+          <a:bodyPr wrap="square" lIns="0" tIns="0" rIns="0" bIns="0" rtlCol="0" anchor="t"/>
+          <a:lstStyle/>
+          <a:p>
+            <a:pPr algn="l" indent="0" marL="0">
+              <a:lnSpc>
+                <a:spcPts val="1820"/>
+              </a:lnSpc>
+              <a:spcBef>
+                <a:spcPts val="300"/>
+              </a:spcBef>
+              <a:spcAft>
+                <a:spcPts val="300"/>
+              </a:spcAft>
+              <a:buNone/>
+            </a:pPr>
+            <a:r>
+              <a:rPr lang="en-US" sz="1300" b="1" i="1" dirty="0">
+                <a:solidFill>
+                  <a:srgbClr val="1C2833"/>
+                </a:solidFill>
+                <a:latin typeface="Georgia" pitchFamily="34" charset="0"/>
+                <a:ea typeface="Georgia" pitchFamily="34" charset="-122"/>
+                <a:cs typeface="Georgia" pitchFamily="34" charset="-120"/>
+              </a:rPr>
+              <a:t>Split</a:t>
+            </a:r>
+            <a:pPr algn="l" indent="0" marL="0">
+              <a:lnSpc>
+                <a:spcPts val="1820"/>
+              </a:lnSpc>
+              <a:spcBef>
+                <a:spcPts val="300"/>
+              </a:spcBef>
+              <a:spcAft>
+                <a:spcPts val="300"/>
+              </a:spcAft>
+              <a:buNone/>
+            </a:pPr>
+            <a:r>
+              <a:rPr lang="en-US" sz="1300" dirty="0">
+                <a:solidFill>
+                  <a:srgbClr val="1C2833"/>
+                </a:solidFill>
+                <a:latin typeface="Georgia" pitchFamily="34" charset="0"/>
+                <a:ea typeface="Georgia" pitchFamily="34" charset="-122"/>
+                <a:cs typeface="Georgia" pitchFamily="34" charset="-120"/>
+              </a:rPr>
+              <a:t> the digits with a gap.</a:t>
+            </a:r>
+            <a:endParaRPr lang="en-US" sz="1300" dirty="0"/>
+          </a:p>
+        </p:txBody>
+      </p:sp>
+      <p:sp>
+        <p:nvSpPr>
+          <p:cNvPr id="9" name="Text 7"/>
+          <p:cNvSpPr/>
+          <p:nvPr/>
+        </p:nvSpPr>
+        <p:spPr>
+          <a:xfrm>
+            <a:off x="692051" y="1881336"/>
+            <a:ext cx="7973389" cy="230981"/>
+          </a:xfrm>
+          <a:prstGeom prst="rect">
+            <a:avLst/>
+          </a:prstGeom>
+          <a:noFill/>
+          <a:ln/>
+        </p:spPr>
+        <p:txBody>
+          <a:bodyPr wrap="square" lIns="0" tIns="0" rIns="0" bIns="0" rtlCol="0" anchor="t"/>
+          <a:lstStyle/>
+          <a:p>
+            <a:pPr algn="l" indent="0" marL="0">
+              <a:lnSpc>
+                <a:spcPts val="1820"/>
+              </a:lnSpc>
+              <a:spcBef>
+                <a:spcPts val="300"/>
+              </a:spcBef>
+              <a:spcAft>
+                <a:spcPts val="300"/>
+              </a:spcAft>
+              <a:buNone/>
+            </a:pPr>
+            <a:r>
+              <a:rPr lang="en-US" sz="1300" b="1" i="1" dirty="0">
+                <a:solidFill>
+                  <a:srgbClr val="1C2833"/>
+                </a:solidFill>
+                <a:latin typeface="Georgia" pitchFamily="34" charset="0"/>
+                <a:ea typeface="Georgia" pitchFamily="34" charset="-122"/>
+                <a:cs typeface="Georgia" pitchFamily="34" charset="-120"/>
+              </a:rPr>
+              <a:t>Add</a:t>
+            </a:r>
+            <a:pPr algn="l" indent="0" marL="0">
+              <a:lnSpc>
+                <a:spcPts val="1820"/>
+              </a:lnSpc>
+              <a:spcBef>
+                <a:spcPts val="300"/>
+              </a:spcBef>
+              <a:spcAft>
+                <a:spcPts val="300"/>
+              </a:spcAft>
+              <a:buNone/>
+            </a:pPr>
+            <a:r>
+              <a:rPr lang="en-US" sz="1300" dirty="0">
+                <a:solidFill>
+                  <a:srgbClr val="1C2833"/>
+                </a:solidFill>
+                <a:latin typeface="Georgia" pitchFamily="34" charset="0"/>
+                <a:ea typeface="Georgia" pitchFamily="34" charset="-122"/>
+                <a:cs typeface="Georgia" pitchFamily="34" charset="-120"/>
+              </a:rPr>
+              <a:t> the two digits.</a:t>
+            </a:r>
+            <a:endParaRPr lang="en-US" sz="1300" dirty="0"/>
+          </a:p>
+        </p:txBody>
+      </p:sp>
+      <p:sp>
+        <p:nvSpPr>
+          <p:cNvPr id="10" name="Text 8"/>
+          <p:cNvSpPr/>
+          <p:nvPr/>
+        </p:nvSpPr>
+        <p:spPr>
+          <a:xfrm>
+            <a:off x="692051" y="2150418"/>
+            <a:ext cx="7973389" cy="230981"/>
+          </a:xfrm>
+          <a:prstGeom prst="rect">
+            <a:avLst/>
+          </a:prstGeom>
+          <a:noFill/>
+          <a:ln/>
+        </p:spPr>
+        <p:txBody>
+          <a:bodyPr wrap="square" lIns="0" tIns="0" rIns="0" bIns="0" rtlCol="0" anchor="t"/>
+          <a:lstStyle/>
+          <a:p>
+            <a:pPr algn="l" indent="0" marL="0">
+              <a:lnSpc>
+                <a:spcPts val="1820"/>
+              </a:lnSpc>
+              <a:spcBef>
+                <a:spcPts val="300"/>
+              </a:spcBef>
+              <a:spcAft>
+                <a:spcPts val="300"/>
+              </a:spcAft>
+              <a:buNone/>
+            </a:pPr>
+            <a:r>
+              <a:rPr lang="en-US" sz="1300" b="1" i="1" dirty="0">
+                <a:solidFill>
+                  <a:srgbClr val="1C2833"/>
+                </a:solidFill>
+                <a:latin typeface="Georgia" pitchFamily="34" charset="0"/>
+                <a:ea typeface="Georgia" pitchFamily="34" charset="-122"/>
+                <a:cs typeface="Georgia" pitchFamily="34" charset="-120"/>
+              </a:rPr>
+              <a:t>Drop</a:t>
+            </a:r>
+            <a:pPr algn="l" indent="0" marL="0">
+              <a:lnSpc>
+                <a:spcPts val="1820"/>
+              </a:lnSpc>
+              <a:spcBef>
+                <a:spcPts val="300"/>
+              </a:spcBef>
+              <a:spcAft>
+                <a:spcPts val="300"/>
+              </a:spcAft>
+              <a:buNone/>
+            </a:pPr>
+            <a:r>
+              <a:rPr lang="en-US" sz="1300" dirty="0">
+                <a:solidFill>
+                  <a:srgbClr val="1C2833"/>
+                </a:solidFill>
+                <a:latin typeface="Georgia" pitchFamily="34" charset="0"/>
+                <a:ea typeface="Georgia" pitchFamily="34" charset="-122"/>
+                <a:cs typeface="Georgia" pitchFamily="34" charset="-120"/>
+              </a:rPr>
+              <a:t> the sum into the gap.</a:t>
+            </a:r>
+            <a:endParaRPr lang="en-US" sz="1300" dirty="0"/>
+          </a:p>
+        </p:txBody>
+      </p:sp>
+      <p:sp>
+        <p:nvSpPr>
+          <p:cNvPr id="11" name="Text 9"/>
+          <p:cNvSpPr/>
+          <p:nvPr/>
+        </p:nvSpPr>
+        <p:spPr>
+          <a:xfrm>
+            <a:off x="692051" y="2419499"/>
+            <a:ext cx="7973389" cy="230981"/>
+          </a:xfrm>
+          <a:prstGeom prst="rect">
+            <a:avLst/>
+          </a:prstGeom>
+          <a:noFill/>
+          <a:ln/>
+        </p:spPr>
+        <p:txBody>
+          <a:bodyPr wrap="square" lIns="0" tIns="0" rIns="0" bIns="0" rtlCol="0" anchor="t"/>
+          <a:lstStyle/>
+          <a:p>
+            <a:pPr algn="l" indent="0" marL="0">
+              <a:lnSpc>
+                <a:spcPts val="1820"/>
+              </a:lnSpc>
+              <a:spcBef>
+                <a:spcPts val="300"/>
+              </a:spcBef>
+              <a:spcAft>
+                <a:spcPts val="300"/>
+              </a:spcAft>
+              <a:buNone/>
+            </a:pPr>
+            <a:r>
+              <a:rPr lang="en-US" sz="1300" i="1" dirty="0">
+                <a:solidFill>
+                  <a:srgbClr val="1C2833"/>
+                </a:solidFill>
+                <a:latin typeface="Georgia" pitchFamily="34" charset="0"/>
+                <a:ea typeface="Georgia" pitchFamily="34" charset="-122"/>
+                <a:cs typeface="Georgia" pitchFamily="34" charset="-120"/>
+              </a:rPr>
+              <a:t>Example: 34 × 11 → 3 _ 4 → 3+4 = 7 → 374.</a:t>
+            </a:r>
+            <a:endParaRPr lang="en-US" sz="1300" dirty="0"/>
+          </a:p>
+        </p:txBody>
+      </p:sp>
+      <p:sp>
+        <p:nvSpPr>
+          <p:cNvPr id="12" name="Text 10"/>
+          <p:cNvSpPr/>
+          <p:nvPr/>
+        </p:nvSpPr>
+        <p:spPr>
+          <a:xfrm>
+            <a:off x="692051" y="2688580"/>
+            <a:ext cx="7973389" cy="692944"/>
+          </a:xfrm>
+          <a:prstGeom prst="rect">
+            <a:avLst/>
+          </a:prstGeom>
+          <a:noFill/>
+          <a:ln/>
+        </p:spPr>
+        <p:txBody>
+          <a:bodyPr wrap="square" lIns="0" tIns="0" rIns="0" bIns="0" rtlCol="0" anchor="t"/>
+          <a:lstStyle/>
+          <a:p>
+            <a:pPr algn="l" indent="0" marL="0">
+              <a:lnSpc>
+                <a:spcPts val="1820"/>
+              </a:lnSpc>
+              <a:spcBef>
+                <a:spcPts val="300"/>
+              </a:spcBef>
+              <a:spcAft>
+                <a:spcPts val="300"/>
+              </a:spcAft>
+              <a:buNone/>
+            </a:pPr>
+            <a:r>
+              <a:rPr lang="en-US" sz="1300" dirty="0">
+                <a:solidFill>
+                  <a:srgbClr val="1C2833"/>
+                </a:solidFill>
+                <a:latin typeface="Georgia" pitchFamily="34" charset="0"/>
+                <a:ea typeface="Georgia" pitchFamily="34" charset="-122"/>
+                <a:cs typeface="Georgia" pitchFamily="34" charset="-120"/>
+              </a:rPr>
+              <a:t>Tirthaji (1965) names the underlying sūtra </a:t>
+            </a:r>
+            <a:pPr algn="l" indent="0" marL="0">
+              <a:lnSpc>
+                <a:spcPts val="1820"/>
+              </a:lnSpc>
+              <a:spcBef>
+                <a:spcPts val="300"/>
+              </a:spcBef>
+              <a:spcAft>
+                <a:spcPts val="300"/>
+              </a:spcAft>
+              <a:buNone/>
+            </a:pPr>
+            <a:r>
+              <a:rPr lang="en-US" sz="1300" b="1" i="1" dirty="0">
+                <a:solidFill>
+                  <a:srgbClr val="1C2833"/>
+                </a:solidFill>
+                <a:latin typeface="Georgia" pitchFamily="34" charset="0"/>
+                <a:ea typeface="Georgia" pitchFamily="34" charset="-122"/>
+                <a:cs typeface="Georgia" pitchFamily="34" charset="-120"/>
+              </a:rPr>
+              <a:t>Ekādhikena Pūrveṇa</a:t>
+            </a:r>
+            <a:pPr algn="l" indent="0" marL="0">
+              <a:lnSpc>
+                <a:spcPts val="1820"/>
+              </a:lnSpc>
+              <a:spcBef>
+                <a:spcPts val="300"/>
+              </a:spcBef>
+              <a:spcAft>
+                <a:spcPts val="300"/>
+              </a:spcAft>
+              <a:buNone/>
+            </a:pPr>
+            <a:r>
+              <a:rPr lang="en-US" sz="1300" dirty="0">
+                <a:solidFill>
+                  <a:srgbClr val="1C2833"/>
+                </a:solidFill>
+                <a:latin typeface="Georgia" pitchFamily="34" charset="0"/>
+                <a:ea typeface="Georgia" pitchFamily="34" charset="-122"/>
+                <a:cs typeface="Georgia" pitchFamily="34" charset="-120"/>
+              </a:rPr>
+              <a:t> — "by one more than the previous." The trick is older than its modern Sanskrit name; the algebra (which we'll do on Day 3) is the same in every language.</a:t>
+            </a:r>
+            <a:endParaRPr lang="en-US" sz="1300" dirty="0"/>
+          </a:p>
+        </p:txBody>
+      </p:sp>
+      <p:sp>
+        <p:nvSpPr>
+          <p:cNvPr id="13" name="Text 11"/>
+          <p:cNvSpPr/>
+          <p:nvPr/>
+        </p:nvSpPr>
+        <p:spPr>
+          <a:xfrm>
+            <a:off x="406301" y="4434929"/>
+            <a:ext cx="8498026" cy="213271"/>
+          </a:xfrm>
+          <a:prstGeom prst="rect">
+            <a:avLst/>
+          </a:prstGeom>
+          <a:noFill/>
+          <a:ln/>
+        </p:spPr>
+        <p:txBody>
+          <a:bodyPr wrap="square" lIns="0" tIns="0" rIns="0" bIns="0" rtlCol="0" anchor="t"/>
+          <a:lstStyle/>
+          <a:p>
+            <a:pPr algn="l" indent="0" marL="0">
+              <a:lnSpc>
+                <a:spcPts val="1680"/>
+              </a:lnSpc>
+              <a:spcBef>
+                <a:spcPts val="300"/>
+              </a:spcBef>
+              <a:spcAft>
+                <a:spcPts val="300"/>
+              </a:spcAft>
+              <a:buNone/>
+            </a:pPr>
+            <a:r>
+              <a:rPr lang="en-US" sz="1200" dirty="0">
+                <a:solidFill>
+                  <a:srgbClr val="1C2833"/>
+                </a:solidFill>
+                <a:latin typeface="Arial" pitchFamily="34" charset="0"/>
+                <a:ea typeface="Arial" pitchFamily="34" charset="-122"/>
+                <a:cs typeface="Arial" pitchFamily="34" charset="-120"/>
+              </a:rPr>
+              <a:t>Middle ·  · IKS Curriculum</a:t>
+            </a:r>
+            <a:endParaRPr lang="en-US" sz="1200" dirty="0"/>
+          </a:p>
+        </p:txBody>
+      </p:sp>
+    </p:spTree>
+  </p:cSld>
+  <p:clrMapOvr>
+    <a:masterClrMapping/>
+  </p:clrMapOvr>
+</p:sld>
+</file>
+
+<file path=ppt/slides/slide18.xml><?xml version="1.0" encoding="utf-8"?>
+<p:sld xmlns:a="http://schemas.openxmlformats.org/drawingml/2006/main" xmlns:r="http://schemas.openxmlformats.org/officeDocument/2006/relationships" xmlns:p="http://schemas.openxmlformats.org/presentationml/2006/main">
+  <p:cSld name="Slide 18">
+    <p:bg>
+      <p:bgPr>
+        <a:solidFill>
+          <a:srgbClr val="FFFFFF"/>
+        </a:solidFill>
+      </p:bgPr>
+    </p:bg>
+    <p:spTree>
+      <p:nvGrpSpPr>
+        <p:cNvPr id="1" name=""/>
+        <p:cNvGrpSpPr/>
+        <p:nvPr/>
+      </p:nvGrpSpPr>
+      <p:grpSpPr>
+        <a:xfrm>
+          <a:off x="0" y="0"/>
+          <a:ext cx="0" cy="0"/>
+          <a:chOff x="0" y="0"/>
+          <a:chExt cx="0" cy="0"/>
+        </a:xfrm>
+      </p:grpSpPr>
+      <p:sp>
+        <p:nvSpPr>
+          <p:cNvPr id="2" name="Text 0"/>
+          <p:cNvSpPr/>
+          <p:nvPr/>
+        </p:nvSpPr>
+        <p:spPr>
+          <a:xfrm>
+            <a:off x="0" y="0"/>
+            <a:ext cx="9144000" cy="101501"/>
+          </a:xfrm>
+          <a:prstGeom prst="rect">
+            <a:avLst/>
+          </a:prstGeom>
+          <a:solidFill>
+            <a:srgbClr val="277884"/>
+          </a:solidFill>
+          <a:ln/>
+        </p:spPr>
+        <p:txBody>
+          <a:bodyPr wrap="square" rtlCol="0" anchor="ctr"/>
+          <a:lstStyle/>
+          <a:p>
+            <a:pPr indent="0" marL="0">
+              <a:buNone/>
+            </a:pPr>
+            <a:endParaRPr lang="en-US" dirty="0"/>
+          </a:p>
+        </p:txBody>
+      </p:sp>
+      <p:sp>
+        <p:nvSpPr>
+          <p:cNvPr id="3" name="Text 1"/>
+          <p:cNvSpPr/>
+          <p:nvPr/>
+        </p:nvSpPr>
+        <p:spPr>
+          <a:xfrm>
+            <a:off x="406301" y="457051"/>
+            <a:ext cx="8498026" cy="274290"/>
+          </a:xfrm>
+          <a:prstGeom prst="rect">
+            <a:avLst/>
+          </a:prstGeom>
+          <a:noFill/>
+          <a:ln/>
+        </p:spPr>
+        <p:txBody>
+          <a:bodyPr wrap="square" lIns="0" tIns="0" rIns="0" bIns="0" rtlCol="0" anchor="t"/>
+          <a:lstStyle/>
+          <a:p>
+            <a:pPr algn="l" indent="0" marL="0">
+              <a:lnSpc>
+                <a:spcPts val="2160"/>
+              </a:lnSpc>
+              <a:spcBef>
+                <a:spcPts val="600"/>
+              </a:spcBef>
+              <a:spcAft>
+                <a:spcPts val="800"/>
+              </a:spcAft>
+              <a:buNone/>
+            </a:pPr>
+            <a:r>
+              <a:rPr lang="en-US" sz="1800" b="1" dirty="0">
+                <a:solidFill>
+                  <a:srgbClr val="FE4447"/>
+                </a:solidFill>
+                <a:latin typeface="Georgia" pitchFamily="34" charset="0"/>
+                <a:ea typeface="Georgia" pitchFamily="34" charset="-122"/>
+                <a:cs typeface="Georgia" pitchFamily="34" charset="-120"/>
+              </a:rPr>
+              <a:t>Homework</a:t>
+            </a:r>
+            <a:endParaRPr lang="en-US" sz="1800" dirty="0"/>
+          </a:p>
+        </p:txBody>
+      </p:sp>
+      <p:sp>
+        <p:nvSpPr>
+          <p:cNvPr id="4" name="Text 2"/>
+          <p:cNvSpPr/>
+          <p:nvPr/>
+        </p:nvSpPr>
+        <p:spPr>
+          <a:xfrm>
+            <a:off x="634901" y="883593"/>
+            <a:ext cx="8102798" cy="487561"/>
+          </a:xfrm>
+          <a:prstGeom prst="rect">
+            <a:avLst/>
+          </a:prstGeom>
+          <a:noFill/>
+          <a:ln/>
+        </p:spPr>
+        <p:txBody>
+          <a:bodyPr wrap="square" lIns="0" tIns="0" rIns="0" bIns="0" rtlCol="0" anchor="t"/>
+          <a:lstStyle/>
+          <a:p>
+            <a:pPr algn="l" marL="342900" indent="-342900">
+              <a:lnSpc>
+                <a:spcPts val="1620"/>
+              </a:lnSpc>
+              <a:spcAft>
+                <a:spcPts val="300"/>
+              </a:spcAft>
+              <a:buSzPct val="100000"/>
+              <a:buChar char="•"/>
+            </a:pPr>
+            <a:r>
+              <a:rPr lang="en-US" sz="1200" dirty="0">
+                <a:solidFill>
+                  <a:srgbClr val="1C2833"/>
+                </a:solidFill>
+                <a:latin typeface="Arial" pitchFamily="34" charset="0"/>
+                <a:ea typeface="Arial" pitchFamily="34" charset="-122"/>
+                <a:cs typeface="Arial" pitchFamily="34" charset="-120"/>
+              </a:rPr>
+              <a:t>Find any two 2-digit numbers (digit-sum &lt; 10) in your house — phone numbers, page numbers, prices. Compute each × 11 using the trick. Bring 5 worked examples to class tomorrow.</a:t>
+            </a:r>
+            <a:endParaRPr lang="en-US" sz="1200" dirty="0"/>
+          </a:p>
+        </p:txBody>
+      </p:sp>
+      <p:sp>
+        <p:nvSpPr>
+          <p:cNvPr id="5" name="Text 3"/>
+          <p:cNvSpPr/>
+          <p:nvPr/>
+        </p:nvSpPr>
+        <p:spPr>
+          <a:xfrm>
+            <a:off x="406301" y="4434929"/>
+            <a:ext cx="8498026" cy="213271"/>
+          </a:xfrm>
+          <a:prstGeom prst="rect">
+            <a:avLst/>
+          </a:prstGeom>
+          <a:noFill/>
+          <a:ln/>
+        </p:spPr>
+        <p:txBody>
+          <a:bodyPr wrap="square" lIns="0" tIns="0" rIns="0" bIns="0" rtlCol="0" anchor="t"/>
+          <a:lstStyle/>
+          <a:p>
+            <a:pPr algn="l" indent="0" marL="0">
+              <a:lnSpc>
+                <a:spcPts val="1680"/>
+              </a:lnSpc>
+              <a:spcBef>
+                <a:spcPts val="300"/>
+              </a:spcBef>
+              <a:spcAft>
+                <a:spcPts val="300"/>
+              </a:spcAft>
+              <a:buNone/>
+            </a:pPr>
+            <a:r>
+              <a:rPr lang="en-US" sz="1200" dirty="0">
+                <a:solidFill>
+                  <a:srgbClr val="1C2833"/>
+                </a:solidFill>
+                <a:latin typeface="Arial" pitchFamily="34" charset="0"/>
+                <a:ea typeface="Arial" pitchFamily="34" charset="-122"/>
+                <a:cs typeface="Arial" pitchFamily="34" charset="-120"/>
+              </a:rPr>
+              <a:t>Middle ·  · IKS Curriculum</a:t>
+            </a:r>
+            <a:endParaRPr lang="en-US" sz="1200" dirty="0"/>
+          </a:p>
+        </p:txBody>
+      </p:sp>
+    </p:spTree>
+  </p:cSld>
+  <p:clrMapOvr>
+    <a:masterClrMapping/>
+  </p:clrMapOvr>
+</p:sld>
+</file>
+
+<file path=ppt/slides/slide19.xml><?xml version="1.0" encoding="utf-8"?>
+<p:sld xmlns:a="http://schemas.openxmlformats.org/drawingml/2006/main" xmlns:r="http://schemas.openxmlformats.org/officeDocument/2006/relationships" xmlns:p="http://schemas.openxmlformats.org/presentationml/2006/main">
+  <p:cSld name="Slide 19">
+    <p:bg>
+      <p:bgPr>
+        <a:solidFill>
+          <a:srgbClr val="FFFFFF"/>
+        </a:solidFill>
+      </p:bgPr>
+    </p:bg>
+    <p:spTree>
+      <p:nvGrpSpPr>
+        <p:cNvPr id="1" name=""/>
+        <p:cNvGrpSpPr/>
+        <p:nvPr/>
+      </p:nvGrpSpPr>
+      <p:grpSpPr>
+        <a:xfrm>
+          <a:off x="0" y="0"/>
+          <a:ext cx="0" cy="0"/>
+          <a:chOff x="0" y="0"/>
+          <a:chExt cx="0" cy="0"/>
+        </a:xfrm>
+      </p:grpSpPr>
+      <p:sp>
+        <p:nvSpPr>
+          <p:cNvPr id="2" name="Text 0"/>
+          <p:cNvSpPr/>
+          <p:nvPr/>
+        </p:nvSpPr>
+        <p:spPr>
+          <a:xfrm>
+            <a:off x="0" y="0"/>
+            <a:ext cx="9144000" cy="101501"/>
+          </a:xfrm>
+          <a:prstGeom prst="rect">
+            <a:avLst/>
+          </a:prstGeom>
+          <a:solidFill>
+            <a:srgbClr val="277884"/>
+          </a:solidFill>
+          <a:ln/>
+        </p:spPr>
+        <p:txBody>
+          <a:bodyPr wrap="square" rtlCol="0" anchor="ctr"/>
+          <a:lstStyle/>
+          <a:p>
+            <a:pPr indent="0" marL="0">
+              <a:buNone/>
+            </a:pPr>
+            <a:endParaRPr lang="en-US" dirty="0"/>
+          </a:p>
+        </p:txBody>
+      </p:sp>
+      <p:sp>
+        <p:nvSpPr>
+          <p:cNvPr id="3" name="Text 1"/>
+          <p:cNvSpPr/>
+          <p:nvPr/>
+        </p:nvSpPr>
+        <p:spPr>
+          <a:xfrm>
+            <a:off x="406301" y="457051"/>
+            <a:ext cx="8498026" cy="274290"/>
+          </a:xfrm>
+          <a:prstGeom prst="rect">
+            <a:avLst/>
+          </a:prstGeom>
+          <a:noFill/>
+          <a:ln/>
+        </p:spPr>
+        <p:txBody>
+          <a:bodyPr wrap="square" lIns="0" tIns="0" rIns="0" bIns="0" rtlCol="0" anchor="t"/>
+          <a:lstStyle/>
+          <a:p>
+            <a:pPr algn="l" indent="0" marL="0">
+              <a:lnSpc>
+                <a:spcPts val="2160"/>
+              </a:lnSpc>
+              <a:spcBef>
+                <a:spcPts val="600"/>
+              </a:spcBef>
+              <a:spcAft>
+                <a:spcPts val="800"/>
+              </a:spcAft>
+              <a:buNone/>
+            </a:pPr>
+            <a:r>
+              <a:rPr lang="en-US" sz="1800" b="1" dirty="0">
+                <a:solidFill>
+                  <a:srgbClr val="FE4447"/>
+                </a:solidFill>
+                <a:latin typeface="Georgia" pitchFamily="34" charset="0"/>
+                <a:ea typeface="Georgia" pitchFamily="34" charset="-122"/>
+                <a:cs typeface="Georgia" pitchFamily="34" charset="-120"/>
+              </a:rPr>
+              <a:t>Differentiation</a:t>
+            </a:r>
+            <a:endParaRPr lang="en-US" sz="1800" dirty="0"/>
+          </a:p>
+        </p:txBody>
+      </p:sp>
+      <p:sp>
+        <p:nvSpPr>
+          <p:cNvPr id="4" name="Text 2"/>
+          <p:cNvSpPr/>
+          <p:nvPr/>
+        </p:nvSpPr>
+        <p:spPr>
+          <a:xfrm>
+            <a:off x="634901" y="883593"/>
+            <a:ext cx="8102798" cy="731341"/>
+          </a:xfrm>
+          <a:prstGeom prst="rect">
+            <a:avLst/>
+          </a:prstGeom>
+          <a:noFill/>
+          <a:ln/>
+        </p:spPr>
+        <p:txBody>
+          <a:bodyPr wrap="square" lIns="0" tIns="0" rIns="0" bIns="0" rtlCol="0" anchor="t"/>
+          <a:lstStyle/>
+          <a:p>
+            <a:pPr algn="l" marL="342900" indent="-342900">
+              <a:lnSpc>
+                <a:spcPts val="1620"/>
+              </a:lnSpc>
+              <a:spcAft>
+                <a:spcPts val="300"/>
+              </a:spcAft>
+              <a:buSzPct val="100000"/>
+              <a:buChar char="•"/>
+            </a:pPr>
+            <a:r>
+              <a:rPr lang="en-US" sz="1200" b="1" dirty="0">
+                <a:solidFill>
+                  <a:srgbClr val="1C2833"/>
+                </a:solidFill>
+                <a:latin typeface="Arial" pitchFamily="34" charset="0"/>
+                <a:ea typeface="Arial" pitchFamily="34" charset="-122"/>
+                <a:cs typeface="Arial" pitchFamily="34" charset="-120"/>
+              </a:rPr>
+              <a:t>Tier up:</a:t>
+            </a:r>
+            <a:pPr algn="l" indent="0" marL="0">
+              <a:lnSpc>
+                <a:spcPts val="1620"/>
+              </a:lnSpc>
+              <a:spcAft>
+                <a:spcPts val="300"/>
+              </a:spcAft>
+              <a:buNone/>
+            </a:pPr>
+            <a:r>
+              <a:rPr lang="en-US" sz="1200" dirty="0">
+                <a:solidFill>
+                  <a:srgbClr val="1C2833"/>
+                </a:solidFill>
+                <a:latin typeface="Arial" pitchFamily="34" charset="0"/>
+                <a:ea typeface="Arial" pitchFamily="34" charset="-122"/>
+                <a:cs typeface="Arial" pitchFamily="34" charset="-120"/>
+              </a:rPr>
+              <a:t> Try 3-digit × 11 (e.g. 234 × 11, 152 × 11). See if you can guess the pattern before Day 4.</a:t>
+            </a:r>
+            <a:endParaRPr lang="en-US" sz="1200" dirty="0"/>
+          </a:p>
+          <a:p>
+            <a:pPr algn="l" marL="342900" indent="-342900">
+              <a:lnSpc>
+                <a:spcPts val="1620"/>
+              </a:lnSpc>
+              <a:spcAft>
+                <a:spcPts val="300"/>
+              </a:spcAft>
+              <a:buSzPct val="100000"/>
+              <a:buChar char="•"/>
+            </a:pPr>
+            <a:r>
+              <a:rPr lang="en-US" sz="1200" b="1" dirty="0">
+                <a:solidFill>
+                  <a:srgbClr val="1C2833"/>
+                </a:solidFill>
+                <a:latin typeface="Arial" pitchFamily="34" charset="0"/>
+                <a:ea typeface="Arial" pitchFamily="34" charset="-122"/>
+                <a:cs typeface="Arial" pitchFamily="34" charset="-120"/>
+              </a:rPr>
+              <a:t>Tier down:</a:t>
+            </a:r>
+            <a:pPr algn="l" indent="0" marL="0">
+              <a:lnSpc>
+                <a:spcPts val="1620"/>
+              </a:lnSpc>
+              <a:spcAft>
+                <a:spcPts val="300"/>
+              </a:spcAft>
+              <a:buNone/>
+            </a:pPr>
+            <a:r>
+              <a:rPr lang="en-US" sz="1200" dirty="0">
+                <a:solidFill>
+                  <a:srgbClr val="1C2833"/>
+                </a:solidFill>
+                <a:latin typeface="Arial" pitchFamily="34" charset="0"/>
+                <a:ea typeface="Arial" pitchFamily="34" charset="-122"/>
+                <a:cs typeface="Arial" pitchFamily="34" charset="-120"/>
+              </a:rPr>
+              <a:t> If the gap is confusing, write the answer as a 3-digit number directly: hundreds = first digit, tens = sum, units = second digit.</a:t>
             </a:r>
             <a:endParaRPr lang="en-US" sz="1200" dirty="0"/>
           </a:p>
@@ -4261,7 +6517,7 @@
                 <a:ea typeface="Georgia" pitchFamily="34" charset="-122"/>
                 <a:cs typeface="Georgia" pitchFamily="34" charset="-120"/>
               </a:rPr>
-              <a:t>Materials</a:t>
+              <a:t>Learning objective</a:t>
             </a:r>
             <a:endParaRPr lang="en-US" sz="1800" dirty="0"/>
           </a:p>
@@ -4309,7 +6565,627 @@
                 <a:ea typeface="Arial" pitchFamily="34" charset="-122"/>
                 <a:cs typeface="Arial" pitchFamily="34" charset="-120"/>
               </a:rPr>
-              <a:t>– Printed baseline sheet: ONE multiplication problem (73 × 11). One per student. – Stopwatch or wall clock with a second hand. (One per pair is plenty.) – Whiteboard / large paper to demonstrate.</a:t>
+              <a:t>By the end of this lesson, students will compute any 2-digit × 11 product where the digit-sum is less than 10, in under 3 seconds, and will have recorded a personal baseline time for the same problem using standard long multiplication.</a:t>
+            </a:r>
+            <a:endParaRPr lang="en-US" sz="1200" dirty="0"/>
+          </a:p>
+        </p:txBody>
+      </p:sp>
+      <p:sp>
+        <p:nvSpPr>
+          <p:cNvPr id="5" name="Text 3"/>
+          <p:cNvSpPr/>
+          <p:nvPr/>
+        </p:nvSpPr>
+        <p:spPr>
+          <a:xfrm>
+            <a:off x="406301" y="4434929"/>
+            <a:ext cx="8498026" cy="213271"/>
+          </a:xfrm>
+          <a:prstGeom prst="rect">
+            <a:avLst/>
+          </a:prstGeom>
+          <a:noFill/>
+          <a:ln/>
+        </p:spPr>
+        <p:txBody>
+          <a:bodyPr wrap="square" lIns="0" tIns="0" rIns="0" bIns="0" rtlCol="0" anchor="t"/>
+          <a:lstStyle/>
+          <a:p>
+            <a:pPr algn="l" indent="0" marL="0">
+              <a:lnSpc>
+                <a:spcPts val="1680"/>
+              </a:lnSpc>
+              <a:spcBef>
+                <a:spcPts val="300"/>
+              </a:spcBef>
+              <a:spcAft>
+                <a:spcPts val="300"/>
+              </a:spcAft>
+              <a:buNone/>
+            </a:pPr>
+            <a:r>
+              <a:rPr lang="en-US" sz="1200" dirty="0">
+                <a:solidFill>
+                  <a:srgbClr val="1C2833"/>
+                </a:solidFill>
+                <a:latin typeface="Arial" pitchFamily="34" charset="0"/>
+                <a:ea typeface="Arial" pitchFamily="34" charset="-122"/>
+                <a:cs typeface="Arial" pitchFamily="34" charset="-120"/>
+              </a:rPr>
+              <a:t>Middle ·  · IKS Curriculum</a:t>
+            </a:r>
+            <a:endParaRPr lang="en-US" sz="1200" dirty="0"/>
+          </a:p>
+        </p:txBody>
+      </p:sp>
+    </p:spTree>
+  </p:cSld>
+  <p:clrMapOvr>
+    <a:masterClrMapping/>
+  </p:clrMapOvr>
+</p:sld>
+</file>
+
+<file path=ppt/slides/slide20.xml><?xml version="1.0" encoding="utf-8"?>
+<p:sld xmlns:a="http://schemas.openxmlformats.org/drawingml/2006/main" xmlns:r="http://schemas.openxmlformats.org/officeDocument/2006/relationships" xmlns:p="http://schemas.openxmlformats.org/presentationml/2006/main">
+  <p:cSld name="Slide 20">
+    <p:bg>
+      <p:bgPr>
+        <a:solidFill>
+          <a:srgbClr val="FFFFFF"/>
+        </a:solidFill>
+      </p:bgPr>
+    </p:bg>
+    <p:spTree>
+      <p:nvGrpSpPr>
+        <p:cNvPr id="1" name=""/>
+        <p:cNvGrpSpPr/>
+        <p:nvPr/>
+      </p:nvGrpSpPr>
+      <p:grpSpPr>
+        <a:xfrm>
+          <a:off x="0" y="0"/>
+          <a:ext cx="0" cy="0"/>
+          <a:chOff x="0" y="0"/>
+          <a:chExt cx="0" cy="0"/>
+        </a:xfrm>
+      </p:grpSpPr>
+      <p:sp>
+        <p:nvSpPr>
+          <p:cNvPr id="2" name="Text 0"/>
+          <p:cNvSpPr/>
+          <p:nvPr/>
+        </p:nvSpPr>
+        <p:spPr>
+          <a:xfrm>
+            <a:off x="0" y="0"/>
+            <a:ext cx="9144000" cy="101501"/>
+          </a:xfrm>
+          <a:prstGeom prst="rect">
+            <a:avLst/>
+          </a:prstGeom>
+          <a:solidFill>
+            <a:srgbClr val="277884"/>
+          </a:solidFill>
+          <a:ln/>
+        </p:spPr>
+        <p:txBody>
+          <a:bodyPr wrap="square" rtlCol="0" anchor="ctr"/>
+          <a:lstStyle/>
+          <a:p>
+            <a:pPr indent="0" marL="0">
+              <a:buNone/>
+            </a:pPr>
+            <a:endParaRPr lang="en-US" dirty="0"/>
+          </a:p>
+        </p:txBody>
+      </p:sp>
+      <p:sp>
+        <p:nvSpPr>
+          <p:cNvPr id="3" name="Text 1"/>
+          <p:cNvSpPr/>
+          <p:nvPr/>
+        </p:nvSpPr>
+        <p:spPr>
+          <a:xfrm>
+            <a:off x="406301" y="457051"/>
+            <a:ext cx="8498026" cy="274290"/>
+          </a:xfrm>
+          <a:prstGeom prst="rect">
+            <a:avLst/>
+          </a:prstGeom>
+          <a:noFill/>
+          <a:ln/>
+        </p:spPr>
+        <p:txBody>
+          <a:bodyPr wrap="square" lIns="0" tIns="0" rIns="0" bIns="0" rtlCol="0" anchor="t"/>
+          <a:lstStyle/>
+          <a:p>
+            <a:pPr algn="l" indent="0" marL="0">
+              <a:lnSpc>
+                <a:spcPts val="2160"/>
+              </a:lnSpc>
+              <a:spcBef>
+                <a:spcPts val="600"/>
+              </a:spcBef>
+              <a:spcAft>
+                <a:spcPts val="800"/>
+              </a:spcAft>
+              <a:buNone/>
+            </a:pPr>
+            <a:r>
+              <a:rPr lang="en-US" sz="1800" b="1" dirty="0">
+                <a:solidFill>
+                  <a:srgbClr val="FE4447"/>
+                </a:solidFill>
+                <a:latin typeface="Georgia" pitchFamily="34" charset="0"/>
+                <a:ea typeface="Georgia" pitchFamily="34" charset="-122"/>
+                <a:cs typeface="Georgia" pitchFamily="34" charset="-120"/>
+              </a:rPr>
+              <a:t>Teacher notes</a:t>
+            </a:r>
+            <a:endParaRPr lang="en-US" sz="1800" dirty="0"/>
+          </a:p>
+        </p:txBody>
+      </p:sp>
+      <p:sp>
+        <p:nvSpPr>
+          <p:cNvPr id="4" name="Text 2"/>
+          <p:cNvSpPr/>
+          <p:nvPr/>
+        </p:nvSpPr>
+        <p:spPr>
+          <a:xfrm>
+            <a:off x="634901" y="883593"/>
+            <a:ext cx="8102798" cy="1424583"/>
+          </a:xfrm>
+          <a:prstGeom prst="rect">
+            <a:avLst/>
+          </a:prstGeom>
+          <a:noFill/>
+          <a:ln/>
+        </p:spPr>
+        <p:txBody>
+          <a:bodyPr wrap="square" lIns="0" tIns="0" rIns="0" bIns="0" rtlCol="0" anchor="t"/>
+          <a:lstStyle/>
+          <a:p>
+            <a:pPr algn="l" marL="342900" indent="-342900">
+              <a:lnSpc>
+                <a:spcPts val="1620"/>
+              </a:lnSpc>
+              <a:spcAft>
+                <a:spcPts val="300"/>
+              </a:spcAft>
+              <a:buSzPct val="100000"/>
+              <a:buChar char="•"/>
+            </a:pPr>
+            <a:r>
+              <a:rPr lang="en-US" sz="1200" b="1" dirty="0">
+                <a:solidFill>
+                  <a:srgbClr val="1C2833"/>
+                </a:solidFill>
+                <a:latin typeface="Arial" pitchFamily="34" charset="0"/>
+                <a:ea typeface="Arial" pitchFamily="34" charset="-122"/>
+                <a:cs typeface="Arial" pitchFamily="34" charset="-120"/>
+              </a:rPr>
+              <a:t>The baseline time matters.</a:t>
+            </a:r>
+            <a:pPr algn="l" indent="0" marL="0">
+              <a:lnSpc>
+                <a:spcPts val="1620"/>
+              </a:lnSpc>
+              <a:spcAft>
+                <a:spcPts val="300"/>
+              </a:spcAft>
+              <a:buNone/>
+            </a:pPr>
+            <a:r>
+              <a:rPr lang="en-US" sz="1200" dirty="0">
+                <a:solidFill>
+                  <a:srgbClr val="1C2833"/>
+                </a:solidFill>
+                <a:latin typeface="Arial" pitchFamily="34" charset="0"/>
+                <a:ea typeface="Arial" pitchFamily="34" charset="-122"/>
+                <a:cs typeface="Arial" pitchFamily="34" charset="-120"/>
+              </a:rPr>
+              <a:t> Day 5's retest depends on having a Day 1 record.</a:t>
+            </a:r>
+            <a:endParaRPr lang="en-US" sz="1200" dirty="0"/>
+          </a:p>
+          <a:p>
+            <a:pPr algn="l" marL="342900" indent="-342900">
+              <a:lnSpc>
+                <a:spcPts val="1620"/>
+              </a:lnSpc>
+              <a:spcAft>
+                <a:spcPts val="300"/>
+              </a:spcAft>
+              <a:buSzPct val="100000"/>
+              <a:buChar char="•"/>
+            </a:pPr>
+            <a:r>
+              <a:rPr lang="en-US" sz="1200" dirty="0">
+                <a:solidFill>
+                  <a:srgbClr val="1C2833"/>
+                </a:solidFill>
+                <a:latin typeface="Arial" pitchFamily="34" charset="0"/>
+                <a:ea typeface="Arial" pitchFamily="34" charset="-122"/>
+                <a:cs typeface="Arial" pitchFamily="34" charset="-120"/>
+              </a:rPr>
+              <a:t>Don't dwell on the Sanskrit name today. </a:t>
+            </a:r>
+            <a:pPr algn="l" indent="0" marL="0">
+              <a:lnSpc>
+                <a:spcPts val="1620"/>
+              </a:lnSpc>
+              <a:spcAft>
+                <a:spcPts val="300"/>
+              </a:spcAft>
+              <a:buNone/>
+            </a:pPr>
+            <a:r>
+              <a:rPr lang="en-US" sz="1200" i="1" dirty="0">
+                <a:solidFill>
+                  <a:srgbClr val="1C2833"/>
+                </a:solidFill>
+                <a:latin typeface="Arial" pitchFamily="34" charset="0"/>
+                <a:ea typeface="Arial" pitchFamily="34" charset="-122"/>
+                <a:cs typeface="Arial" pitchFamily="34" charset="-120"/>
+              </a:rPr>
+              <a:t>Ekādhikena Pūrveṇa</a:t>
+            </a:r>
+            <a:pPr algn="l" indent="0" marL="0">
+              <a:lnSpc>
+                <a:spcPts val="1620"/>
+              </a:lnSpc>
+              <a:spcAft>
+                <a:spcPts val="300"/>
+              </a:spcAft>
+              <a:buNone/>
+            </a:pPr>
+            <a:r>
+              <a:rPr lang="en-US" sz="1200" dirty="0">
+                <a:solidFill>
+                  <a:srgbClr val="1C2833"/>
+                </a:solidFill>
+                <a:latin typeface="Arial" pitchFamily="34" charset="0"/>
+                <a:ea typeface="Arial" pitchFamily="34" charset="-122"/>
+                <a:cs typeface="Arial" pitchFamily="34" charset="-120"/>
+              </a:rPr>
+              <a:t> is the cultural anchor; the win is mental speed.</a:t>
+            </a:r>
+            <a:endParaRPr lang="en-US" sz="1200" dirty="0"/>
+          </a:p>
+          <a:p>
+            <a:pPr algn="l" marL="342900" indent="-342900">
+              <a:lnSpc>
+                <a:spcPts val="1620"/>
+              </a:lnSpc>
+              <a:spcAft>
+                <a:spcPts val="300"/>
+              </a:spcAft>
+              <a:buSzPct val="100000"/>
+              <a:buChar char="•"/>
+            </a:pPr>
+            <a:r>
+              <a:rPr lang="en-US" sz="1200" dirty="0">
+                <a:solidFill>
+                  <a:srgbClr val="1C2833"/>
+                </a:solidFill>
+                <a:latin typeface="Arial" pitchFamily="34" charset="0"/>
+                <a:ea typeface="Arial" pitchFamily="34" charset="-122"/>
+                <a:cs typeface="Arial" pitchFamily="34" charset="-120"/>
+              </a:rPr>
+              <a:t>Some students will already know the trick (especially those from competitive-math backgrounds). Have them be peer-coaches. Reframe their advantage as "you'll learn the WHY this week."</a:t>
+            </a:r>
+            <a:endParaRPr lang="en-US" sz="1200" dirty="0"/>
+          </a:p>
+          <a:p>
+            <a:pPr algn="l" marL="342900" indent="-342900">
+              <a:lnSpc>
+                <a:spcPts val="1620"/>
+              </a:lnSpc>
+              <a:spcAft>
+                <a:spcPts val="300"/>
+              </a:spcAft>
+              <a:buSzPct val="100000"/>
+              <a:buChar char="•"/>
+            </a:pPr>
+            <a:r>
+              <a:rPr lang="en-US" sz="1200" dirty="0">
+                <a:solidFill>
+                  <a:srgbClr val="1C2833"/>
+                </a:solidFill>
+                <a:latin typeface="Arial" pitchFamily="34" charset="0"/>
+                <a:ea typeface="Arial" pitchFamily="34" charset="-122"/>
+                <a:cs typeface="Arial" pitchFamily="34" charset="-120"/>
+              </a:rPr>
+              <a:t>About 30% of randomly-chosen 2-digit numbers have digit-sum ≥ 10 (the carry case). So today's worksheet hand-picks the no-carry ones; tomorrow we add the carries.</a:t>
+            </a:r>
+            <a:endParaRPr lang="en-US" sz="1200" dirty="0"/>
+          </a:p>
+        </p:txBody>
+      </p:sp>
+      <p:sp>
+        <p:nvSpPr>
+          <p:cNvPr id="5" name="Text 3"/>
+          <p:cNvSpPr/>
+          <p:nvPr/>
+        </p:nvSpPr>
+        <p:spPr>
+          <a:xfrm>
+            <a:off x="406301" y="4434929"/>
+            <a:ext cx="8498026" cy="213271"/>
+          </a:xfrm>
+          <a:prstGeom prst="rect">
+            <a:avLst/>
+          </a:prstGeom>
+          <a:noFill/>
+          <a:ln/>
+        </p:spPr>
+        <p:txBody>
+          <a:bodyPr wrap="square" lIns="0" tIns="0" rIns="0" bIns="0" rtlCol="0" anchor="t"/>
+          <a:lstStyle/>
+          <a:p>
+            <a:pPr algn="l" indent="0" marL="0">
+              <a:lnSpc>
+                <a:spcPts val="1680"/>
+              </a:lnSpc>
+              <a:spcBef>
+                <a:spcPts val="300"/>
+              </a:spcBef>
+              <a:spcAft>
+                <a:spcPts val="300"/>
+              </a:spcAft>
+              <a:buNone/>
+            </a:pPr>
+            <a:r>
+              <a:rPr lang="en-US" sz="1200" dirty="0">
+                <a:solidFill>
+                  <a:srgbClr val="1C2833"/>
+                </a:solidFill>
+                <a:latin typeface="Arial" pitchFamily="34" charset="0"/>
+                <a:ea typeface="Arial" pitchFamily="34" charset="-122"/>
+                <a:cs typeface="Arial" pitchFamily="34" charset="-120"/>
+              </a:rPr>
+              <a:t>Middle ·  · IKS Curriculum</a:t>
+            </a:r>
+            <a:endParaRPr lang="en-US" sz="1200" dirty="0"/>
+          </a:p>
+        </p:txBody>
+      </p:sp>
+    </p:spTree>
+  </p:cSld>
+  <p:clrMapOvr>
+    <a:masterClrMapping/>
+  </p:clrMapOvr>
+</p:sld>
+</file>
+
+<file path=ppt/slides/slide21.xml><?xml version="1.0" encoding="utf-8"?>
+<p:sld xmlns:a="http://schemas.openxmlformats.org/drawingml/2006/main" xmlns:r="http://schemas.openxmlformats.org/officeDocument/2006/relationships" xmlns:p="http://schemas.openxmlformats.org/presentationml/2006/main">
+  <p:cSld name="Slide 21">
+    <p:bg>
+      <p:bgPr>
+        <a:solidFill>
+          <a:srgbClr val="FFFFFF"/>
+        </a:solidFill>
+      </p:bgPr>
+    </p:bg>
+    <p:spTree>
+      <p:nvGrpSpPr>
+        <p:cNvPr id="1" name=""/>
+        <p:cNvGrpSpPr/>
+        <p:nvPr/>
+      </p:nvGrpSpPr>
+      <p:grpSpPr>
+        <a:xfrm>
+          <a:off x="0" y="0"/>
+          <a:ext cx="0" cy="0"/>
+          <a:chOff x="0" y="0"/>
+          <a:chExt cx="0" cy="0"/>
+        </a:xfrm>
+      </p:grpSpPr>
+      <p:sp>
+        <p:nvSpPr>
+          <p:cNvPr id="2" name="Text 0"/>
+          <p:cNvSpPr/>
+          <p:nvPr/>
+        </p:nvSpPr>
+        <p:spPr>
+          <a:xfrm>
+            <a:off x="0" y="0"/>
+            <a:ext cx="9144000" cy="101501"/>
+          </a:xfrm>
+          <a:prstGeom prst="rect">
+            <a:avLst/>
+          </a:prstGeom>
+          <a:solidFill>
+            <a:srgbClr val="277884"/>
+          </a:solidFill>
+          <a:ln/>
+        </p:spPr>
+        <p:txBody>
+          <a:bodyPr wrap="square" rtlCol="0" anchor="ctr"/>
+          <a:lstStyle/>
+          <a:p>
+            <a:pPr indent="0" marL="0">
+              <a:buNone/>
+            </a:pPr>
+            <a:endParaRPr lang="en-US" dirty="0"/>
+          </a:p>
+        </p:txBody>
+      </p:sp>
+      <p:sp>
+        <p:nvSpPr>
+          <p:cNvPr id="3" name="Text 1"/>
+          <p:cNvSpPr/>
+          <p:nvPr/>
+        </p:nvSpPr>
+        <p:spPr>
+          <a:xfrm>
+            <a:off x="406301" y="457051"/>
+            <a:ext cx="8498026" cy="274290"/>
+          </a:xfrm>
+          <a:prstGeom prst="rect">
+            <a:avLst/>
+          </a:prstGeom>
+          <a:noFill/>
+          <a:ln/>
+        </p:spPr>
+        <p:txBody>
+          <a:bodyPr wrap="square" lIns="0" tIns="0" rIns="0" bIns="0" rtlCol="0" anchor="t"/>
+          <a:lstStyle/>
+          <a:p>
+            <a:pPr algn="l" indent="0" marL="0">
+              <a:lnSpc>
+                <a:spcPts val="2160"/>
+              </a:lnSpc>
+              <a:spcBef>
+                <a:spcPts val="600"/>
+              </a:spcBef>
+              <a:spcAft>
+                <a:spcPts val="800"/>
+              </a:spcAft>
+              <a:buNone/>
+            </a:pPr>
+            <a:r>
+              <a:rPr lang="en-US" sz="1800" b="1" dirty="0">
+                <a:solidFill>
+                  <a:srgbClr val="FE4447"/>
+                </a:solidFill>
+                <a:latin typeface="Georgia" pitchFamily="34" charset="0"/>
+                <a:ea typeface="Georgia" pitchFamily="34" charset="-122"/>
+                <a:cs typeface="Georgia" pitchFamily="34" charset="-120"/>
+              </a:rPr>
+              <a:t>Citation(s) used in this lesson</a:t>
+            </a:r>
+            <a:endParaRPr lang="en-US" sz="1800" dirty="0"/>
+          </a:p>
+        </p:txBody>
+      </p:sp>
+      <p:sp>
+        <p:nvSpPr>
+          <p:cNvPr id="4" name="Text 2"/>
+          <p:cNvSpPr/>
+          <p:nvPr/>
+        </p:nvSpPr>
+        <p:spPr>
+          <a:xfrm>
+            <a:off x="634901" y="883593"/>
+            <a:ext cx="8102798" cy="281880"/>
+          </a:xfrm>
+          <a:prstGeom prst="rect">
+            <a:avLst/>
+          </a:prstGeom>
+          <a:noFill/>
+          <a:ln/>
+        </p:spPr>
+        <p:txBody>
+          <a:bodyPr wrap="square" lIns="0" tIns="0" rIns="0" bIns="0" rtlCol="0" anchor="t"/>
+          <a:lstStyle/>
+          <a:p>
+            <a:pPr algn="l" marL="342900" indent="-342900">
+              <a:lnSpc>
+                <a:spcPts val="1620"/>
+              </a:lnSpc>
+              <a:spcAft>
+                <a:spcPts val="300"/>
+              </a:spcAft>
+              <a:buSzPct val="100000"/>
+              <a:buChar char="•"/>
+            </a:pPr>
+            <a:r>
+              <a:rPr lang="en-US" sz="1200" dirty="0">
+                <a:solidFill>
+                  <a:srgbClr val="1C2833"/>
+                </a:solidFill>
+                <a:latin typeface="Arial" pitchFamily="34" charset="0"/>
+                <a:ea typeface="Arial" pitchFamily="34" charset="-122"/>
+                <a:cs typeface="Arial" pitchFamily="34" charset="-120"/>
+              </a:rPr>
+              <a:t>Tirthaji, B. K. (1965). </a:t>
+            </a:r>
+            <a:pPr algn="l" indent="0" marL="0">
+              <a:lnSpc>
+                <a:spcPts val="1620"/>
+              </a:lnSpc>
+              <a:spcAft>
+                <a:spcPts val="300"/>
+              </a:spcAft>
+              <a:buNone/>
+            </a:pPr>
+            <a:r>
+              <a:rPr lang="en-US" sz="1200" i="1" dirty="0">
+                <a:solidFill>
+                  <a:srgbClr val="1C2833"/>
+                </a:solidFill>
+                <a:latin typeface="Arial" pitchFamily="34" charset="0"/>
+                <a:ea typeface="Arial" pitchFamily="34" charset="-122"/>
+                <a:cs typeface="Arial" pitchFamily="34" charset="-120"/>
+              </a:rPr>
+              <a:t>Vedic Mathematics</a:t>
+            </a:r>
+            <a:pPr algn="l" indent="0" marL="0">
+              <a:lnSpc>
+                <a:spcPts val="1620"/>
+              </a:lnSpc>
+              <a:spcAft>
+                <a:spcPts val="300"/>
+              </a:spcAft>
+              <a:buNone/>
+            </a:pPr>
+            <a:r>
+              <a:rPr lang="en-US" sz="1200" dirty="0">
+                <a:solidFill>
+                  <a:srgbClr val="1C2833"/>
+                </a:solidFill>
+                <a:latin typeface="Arial" pitchFamily="34" charset="0"/>
+                <a:ea typeface="Arial" pitchFamily="34" charset="-122"/>
+                <a:cs typeface="Arial" pitchFamily="34" charset="-120"/>
+              </a:rPr>
+              <a:t>. Motilal Banarsidass. Sūtra 1, </a:t>
+            </a:r>
+            <a:pPr algn="l" indent="0" marL="0">
+              <a:lnSpc>
+                <a:spcPts val="1620"/>
+              </a:lnSpc>
+              <a:spcAft>
+                <a:spcPts val="300"/>
+              </a:spcAft>
+              <a:buNone/>
+            </a:pPr>
+            <a:r>
+              <a:rPr lang="en-US" sz="1200" i="1" dirty="0">
+                <a:solidFill>
+                  <a:srgbClr val="1C2833"/>
+                </a:solidFill>
+                <a:latin typeface="Arial" pitchFamily="34" charset="0"/>
+                <a:ea typeface="Arial" pitchFamily="34" charset="-122"/>
+                <a:cs typeface="Arial" pitchFamily="34" charset="-120"/>
+              </a:rPr>
+              <a:t>Ekādhikena Pūrveṇa</a:t>
+            </a:r>
+            <a:pPr algn="l" indent="0" marL="0">
+              <a:lnSpc>
+                <a:spcPts val="1620"/>
+              </a:lnSpc>
+              <a:spcAft>
+                <a:spcPts val="300"/>
+              </a:spcAft>
+              <a:buNone/>
+            </a:pPr>
+            <a:r>
+              <a:rPr lang="en-US" sz="1200" dirty="0">
+                <a:solidFill>
+                  <a:srgbClr val="1C2833"/>
+                </a:solidFill>
+                <a:latin typeface="Arial" pitchFamily="34" charset="0"/>
+                <a:ea typeface="Arial" pitchFamily="34" charset="-122"/>
+                <a:cs typeface="Arial" pitchFamily="34" charset="-120"/>
+              </a:rPr>
+              <a:t>.</a:t>
             </a:r>
             <a:endParaRPr lang="en-US" sz="1200" dirty="0"/>
           </a:p>
@@ -4467,7 +7343,7 @@
                 <a:ea typeface="Georgia" pitchFamily="34" charset="-122"/>
                 <a:cs typeface="Georgia" pitchFamily="34" charset="-120"/>
               </a:rPr>
-              <a:t>Vocabulary introduced today</a:t>
+              <a:t>Materials</a:t>
             </a:r>
             <a:endParaRPr lang="en-US" sz="1800" dirty="0"/>
           </a:p>
@@ -4482,7 +7358,7 @@
         <p:spPr>
           <a:xfrm>
             <a:off x="634901" y="883593"/>
-            <a:ext cx="8102798" cy="487561"/>
+            <a:ext cx="8102798" cy="769441"/>
           </a:xfrm>
           <a:prstGeom prst="rect">
             <a:avLst/>
@@ -4505,7 +7381,7 @@
               <a:buChar char="•"/>
             </a:pPr>
             <a:r>
-              <a:rPr lang="en-US" sz="1200" i="1" dirty="0">
+              <a:rPr lang="en-US" sz="1200" dirty="0">
                 <a:solidFill>
                   <a:srgbClr val="1C2833"/>
                 </a:solidFill>
@@ -4513,16 +7389,20 @@
                 <a:ea typeface="Arial" pitchFamily="34" charset="-122"/>
                 <a:cs typeface="Arial" pitchFamily="34" charset="-120"/>
               </a:rPr>
-              <a:t>Ekādhikena Pūrveṇa</a:t>
-            </a:r>
-            <a:pPr algn="l" indent="0" marL="0">
+              <a:t>Printed baseline sheet: ONE multiplication problem (73 × 11). One per student.</a:t>
+            </a:r>
+            <a:endParaRPr lang="en-US" sz="1200" dirty="0"/>
+          </a:p>
+          <a:p>
+            <a:pPr algn="l" marL="342900" indent="-342900">
               <a:lnSpc>
                 <a:spcPts val="1620"/>
               </a:lnSpc>
               <a:spcAft>
                 <a:spcPts val="300"/>
               </a:spcAft>
-              <a:buNone/>
+              <a:buSzPct val="100000"/>
+              <a:buChar char="•"/>
             </a:pPr>
             <a:r>
               <a:rPr lang="en-US" sz="1200" dirty="0">
@@ -4533,7 +7413,31 @@
                 <a:ea typeface="Arial" pitchFamily="34" charset="-122"/>
                 <a:cs typeface="Arial" pitchFamily="34" charset="-120"/>
               </a:rPr>
-              <a:t> (IAST: ekādhikena pūrveṇa; lit. "by one more than the previous") — the Sanskrit name Tirthaji (1965) gives the underlying sūtra. We use it as the cultural anchor; the technique is what students take home.</a:t>
+              <a:t>Stopwatch or wall clock with a second hand. (One per pair is plenty.)</a:t>
+            </a:r>
+            <a:endParaRPr lang="en-US" sz="1200" dirty="0"/>
+          </a:p>
+          <a:p>
+            <a:pPr algn="l" marL="342900" indent="-342900">
+              <a:lnSpc>
+                <a:spcPts val="1620"/>
+              </a:lnSpc>
+              <a:spcAft>
+                <a:spcPts val="300"/>
+              </a:spcAft>
+              <a:buSzPct val="100000"/>
+              <a:buChar char="•"/>
+            </a:pPr>
+            <a:r>
+              <a:rPr lang="en-US" sz="1200" dirty="0">
+                <a:solidFill>
+                  <a:srgbClr val="1C2833"/>
+                </a:solidFill>
+                <a:latin typeface="Arial" pitchFamily="34" charset="0"/>
+                <a:ea typeface="Arial" pitchFamily="34" charset="-122"/>
+                <a:cs typeface="Arial" pitchFamily="34" charset="-120"/>
+              </a:rPr>
+              <a:t>Whiteboard / large paper to demonstrate.</a:t>
             </a:r>
             <a:endParaRPr lang="en-US" sz="1200" dirty="0"/>
           </a:p>
@@ -4691,7 +7595,7 @@
                 <a:ea typeface="Georgia" pitchFamily="34" charset="-122"/>
                 <a:cs typeface="Georgia" pitchFamily="34" charset="-120"/>
               </a:rPr>
-              <a:t>Lesson flow</a:t>
+              <a:t>Vocabulary introduced today</a:t>
             </a:r>
             <a:endParaRPr lang="en-US" sz="1800" dirty="0"/>
           </a:p>
@@ -4700,6 +7604,72 @@
       <p:sp>
         <p:nvSpPr>
           <p:cNvPr id="4" name="Text 2"/>
+          <p:cNvSpPr/>
+          <p:nvPr/>
+        </p:nvSpPr>
+        <p:spPr>
+          <a:xfrm>
+            <a:off x="634901" y="883593"/>
+            <a:ext cx="8102798" cy="487561"/>
+          </a:xfrm>
+          <a:prstGeom prst="rect">
+            <a:avLst/>
+          </a:prstGeom>
+          <a:noFill/>
+          <a:ln/>
+        </p:spPr>
+        <p:txBody>
+          <a:bodyPr wrap="square" lIns="0" tIns="0" rIns="0" bIns="0" rtlCol="0" anchor="t"/>
+          <a:lstStyle/>
+          <a:p>
+            <a:pPr algn="l" marL="342900" indent="-342900">
+              <a:lnSpc>
+                <a:spcPts val="1620"/>
+              </a:lnSpc>
+              <a:spcAft>
+                <a:spcPts val="300"/>
+              </a:spcAft>
+              <a:buSzPct val="100000"/>
+              <a:buChar char="•"/>
+            </a:pPr>
+            <a:r>
+              <a:rPr lang="en-US" sz="1200" i="1" dirty="0">
+                <a:solidFill>
+                  <a:srgbClr val="1C2833"/>
+                </a:solidFill>
+                <a:latin typeface="Arial" pitchFamily="34" charset="0"/>
+                <a:ea typeface="Arial" pitchFamily="34" charset="-122"/>
+                <a:cs typeface="Arial" pitchFamily="34" charset="-120"/>
+              </a:rPr>
+              <a:t>Ekādhikena Pūrveṇa</a:t>
+            </a:r>
+            <a:pPr algn="l" indent="0" marL="0">
+              <a:lnSpc>
+                <a:spcPts val="1620"/>
+              </a:lnSpc>
+              <a:spcAft>
+                <a:spcPts val="300"/>
+              </a:spcAft>
+              <a:buNone/>
+            </a:pPr>
+            <a:r>
+              <a:rPr lang="en-US" sz="1200" dirty="0">
+                <a:solidFill>
+                  <a:srgbClr val="1C2833"/>
+                </a:solidFill>
+                <a:latin typeface="Arial" pitchFamily="34" charset="0"/>
+                <a:ea typeface="Arial" pitchFamily="34" charset="-122"/>
+                <a:cs typeface="Arial" pitchFamily="34" charset="-120"/>
+              </a:rPr>
+              <a:t> (IAST: ekādhikena pūrveṇa; lit. "by one more than the previous") — the Sanskrit name Tirthaji (1965) gives the underlying sūtra. We use it as the cultural anchor; the technique is what students take home.</a:t>
+            </a:r>
+            <a:endParaRPr lang="en-US" sz="1200" dirty="0"/>
+          </a:p>
+        </p:txBody>
+      </p:sp>
+      <p:sp>
+        <p:nvSpPr>
+          <p:cNvPr id="5" name="Text 3"/>
           <p:cNvSpPr/>
           <p:nvPr/>
         </p:nvSpPr>
@@ -4849,7 +7819,7 @@
                 <a:ea typeface="Georgia" pitchFamily="34" charset="-122"/>
                 <a:cs typeface="Georgia" pitchFamily="34" charset="-120"/>
               </a:rPr>
-              <a:t>Warm-up (5 min)</a:t>
+              <a:t>Lesson flow</a:t>
             </a:r>
             <a:endParaRPr lang="en-US" sz="1800" dirty="0"/>
           </a:p>
@@ -4858,100 +7828,6 @@
       <p:sp>
         <p:nvSpPr>
           <p:cNvPr id="4" name="Text 2"/>
-          <p:cNvSpPr/>
-          <p:nvPr/>
-        </p:nvSpPr>
-        <p:spPr>
-          <a:xfrm>
-            <a:off x="406301" y="870942"/>
-            <a:ext cx="8498026" cy="426541"/>
-          </a:xfrm>
-          <a:prstGeom prst="rect">
-            <a:avLst/>
-          </a:prstGeom>
-          <a:noFill/>
-          <a:ln/>
-        </p:spPr>
-        <p:txBody>
-          <a:bodyPr wrap="square" lIns="0" tIns="0" rIns="0" bIns="0" rtlCol="0" anchor="t"/>
-          <a:lstStyle/>
-          <a:p>
-            <a:pPr algn="l" indent="0" marL="0">
-              <a:lnSpc>
-                <a:spcPts val="1680"/>
-              </a:lnSpc>
-              <a:spcBef>
-                <a:spcPts val="300"/>
-              </a:spcBef>
-              <a:spcAft>
-                <a:spcPts val="300"/>
-              </a:spcAft>
-              <a:buNone/>
-            </a:pPr>
-            <a:r>
-              <a:rPr lang="en-US" sz="1200" dirty="0">
-                <a:solidFill>
-                  <a:srgbClr val="1C2833"/>
-                </a:solidFill>
-                <a:latin typeface="Arial" pitchFamily="34" charset="0"/>
-                <a:ea typeface="Arial" pitchFamily="34" charset="-122"/>
-                <a:cs typeface="Arial" pitchFamily="34" charset="-120"/>
-              </a:rPr>
-              <a:t>– Teacher: </a:t>
-            </a:r>
-            <a:pPr algn="l" indent="0" marL="0">
-              <a:lnSpc>
-                <a:spcPts val="1680"/>
-              </a:lnSpc>
-              <a:spcBef>
-                <a:spcPts val="300"/>
-              </a:spcBef>
-              <a:spcAft>
-                <a:spcPts val="300"/>
-              </a:spcAft>
-              <a:buNone/>
-            </a:pPr>
-            <a:r>
-              <a:rPr lang="en-US" sz="1200" i="1" dirty="0">
-                <a:solidFill>
-                  <a:srgbClr val="1C2833"/>
-                </a:solidFill>
-                <a:latin typeface="Arial" pitchFamily="34" charset="0"/>
-                <a:ea typeface="Arial" pitchFamily="34" charset="-122"/>
-                <a:cs typeface="Arial" pitchFamily="34" charset="-120"/>
-              </a:rPr>
-              <a:t>"How long does it take you to compute 73 × 11 the normal way? Make a guess."</a:t>
-            </a:r>
-            <a:pPr algn="l" indent="0" marL="0">
-              <a:lnSpc>
-                <a:spcPts val="1680"/>
-              </a:lnSpc>
-              <a:spcBef>
-                <a:spcPts val="300"/>
-              </a:spcBef>
-              <a:spcAft>
-                <a:spcPts val="300"/>
-              </a:spcAft>
-              <a:buNone/>
-            </a:pPr>
-            <a:r>
-              <a:rPr lang="en-US" sz="1200" dirty="0">
-                <a:solidFill>
-                  <a:srgbClr val="1C2833"/>
-                </a:solidFill>
-                <a:latin typeface="Arial" pitchFamily="34" charset="0"/>
-                <a:ea typeface="Arial" pitchFamily="34" charset="-122"/>
-                <a:cs typeface="Arial" pitchFamily="34" charset="-120"/>
-              </a:rPr>
-              <a:t> – Take 3–4 guesses. Write the range on the board.</a:t>
-            </a:r>
-            <a:endParaRPr lang="en-US" sz="1200" dirty="0"/>
-          </a:p>
-        </p:txBody>
-      </p:sp>
-      <p:sp>
-        <p:nvSpPr>
-          <p:cNvPr id="5" name="Text 3"/>
           <p:cNvSpPr/>
           <p:nvPr/>
         </p:nvSpPr>
@@ -5101,7 +7977,7 @@
                 <a:ea typeface="Georgia" pitchFamily="34" charset="-122"/>
                 <a:cs typeface="Georgia" pitchFamily="34" charset="-120"/>
               </a:rPr>
-              <a:t>Baseline timing (8 min)</a:t>
+              <a:t>Warm-up (5 min)</a:t>
             </a:r>
             <a:endParaRPr lang="en-US" sz="1800" dirty="0"/>
           </a:p>
@@ -5115,8 +7991,8 @@
         </p:nvSpPr>
         <p:spPr>
           <a:xfrm>
-            <a:off x="406301" y="870942"/>
-            <a:ext cx="8498026" cy="639812"/>
+            <a:off x="634901" y="883593"/>
+            <a:ext cx="8102798" cy="525661"/>
           </a:xfrm>
           <a:prstGeom prst="rect">
             <a:avLst/>
@@ -5128,17 +8004,15 @@
           <a:bodyPr wrap="square" lIns="0" tIns="0" rIns="0" bIns="0" rtlCol="0" anchor="t"/>
           <a:lstStyle/>
           <a:p>
-            <a:pPr algn="l" indent="0" marL="0">
-              <a:lnSpc>
-                <a:spcPts val="1680"/>
-              </a:lnSpc>
-              <a:spcBef>
-                <a:spcPts val="300"/>
-              </a:spcBef>
-              <a:spcAft>
-                <a:spcPts val="300"/>
-              </a:spcAft>
-              <a:buNone/>
+            <a:pPr algn="l" marL="342900" indent="-342900">
+              <a:lnSpc>
+                <a:spcPts val="1620"/>
+              </a:lnSpc>
+              <a:spcAft>
+                <a:spcPts val="300"/>
+              </a:spcAft>
+              <a:buSzPct val="100000"/>
+              <a:buChar char="•"/>
             </a:pPr>
             <a:r>
               <a:rPr lang="en-US" sz="1200" dirty="0">
@@ -5149,7 +8023,51 @@
                 <a:ea typeface="Arial" pitchFamily="34" charset="-122"/>
                 <a:cs typeface="Arial" pitchFamily="34" charset="-120"/>
               </a:rPr>
-              <a:t>– Hand out the baseline sheet face-down. Students write their name and predicted time on the back. – On "Go," flip and solve 73 × 11 using long multiplication. – Record actual time honestly. Mark answer themselves. – Expected range: 15–60 seconds.</a:t>
+              <a:t>Teacher: </a:t>
+            </a:r>
+            <a:pPr algn="l" indent="0" marL="0">
+              <a:lnSpc>
+                <a:spcPts val="1620"/>
+              </a:lnSpc>
+              <a:spcAft>
+                <a:spcPts val="300"/>
+              </a:spcAft>
+              <a:buNone/>
+            </a:pPr>
+            <a:r>
+              <a:rPr lang="en-US" sz="1200" i="1" dirty="0">
+                <a:solidFill>
+                  <a:srgbClr val="1C2833"/>
+                </a:solidFill>
+                <a:latin typeface="Arial" pitchFamily="34" charset="0"/>
+                <a:ea typeface="Arial" pitchFamily="34" charset="-122"/>
+                <a:cs typeface="Arial" pitchFamily="34" charset="-120"/>
+              </a:rPr>
+              <a:t>"How long does it take you to compute 73 × 11 the normal way? Make a guess."</a:t>
+            </a:r>
+            <a:endParaRPr lang="en-US" sz="1200" dirty="0"/>
+          </a:p>
+          <a:p>
+            <a:pPr algn="l" marL="342900" indent="-342900">
+              <a:lnSpc>
+                <a:spcPts val="1620"/>
+              </a:lnSpc>
+              <a:spcAft>
+                <a:spcPts val="300"/>
+              </a:spcAft>
+              <a:buSzPct val="100000"/>
+              <a:buChar char="•"/>
+            </a:pPr>
+            <a:r>
+              <a:rPr lang="en-US" sz="1200" dirty="0">
+                <a:solidFill>
+                  <a:srgbClr val="1C2833"/>
+                </a:solidFill>
+                <a:latin typeface="Arial" pitchFamily="34" charset="0"/>
+                <a:ea typeface="Arial" pitchFamily="34" charset="-122"/>
+                <a:cs typeface="Arial" pitchFamily="34" charset="-120"/>
+              </a:rPr>
+              <a:t>Take 3–4 guesses. Write the range on the board.</a:t>
             </a:r>
             <a:endParaRPr lang="en-US" sz="1200" dirty="0"/>
           </a:p>
@@ -5307,7 +8225,7 @@
                 <a:ea typeface="Georgia" pitchFamily="34" charset="-122"/>
                 <a:cs typeface="Georgia" pitchFamily="34" charset="-120"/>
               </a:rPr>
-              <a:t>Teacher demonstration (12 min) — The trick</a:t>
+              <a:t>Baseline timing (8 min)</a:t>
             </a:r>
             <a:endParaRPr lang="en-US" sz="1800" dirty="0"/>
           </a:p>
@@ -5321,8 +8239,8 @@
         </p:nvSpPr>
         <p:spPr>
           <a:xfrm>
-            <a:off x="406301" y="870942"/>
-            <a:ext cx="8498026" cy="213271"/>
+            <a:off x="634901" y="883593"/>
+            <a:ext cx="8102798" cy="1013222"/>
           </a:xfrm>
           <a:prstGeom prst="rect">
             <a:avLst/>
@@ -5334,17 +8252,15 @@
           <a:bodyPr wrap="square" lIns="0" tIns="0" rIns="0" bIns="0" rtlCol="0" anchor="t"/>
           <a:lstStyle/>
           <a:p>
-            <a:pPr algn="l" indent="0" marL="0">
-              <a:lnSpc>
-                <a:spcPts val="1680"/>
-              </a:lnSpc>
-              <a:spcBef>
-                <a:spcPts val="300"/>
-              </a:spcBef>
-              <a:spcAft>
-                <a:spcPts val="300"/>
-              </a:spcAft>
-              <a:buNone/>
+            <a:pPr algn="l" marL="342900" indent="-342900">
+              <a:lnSpc>
+                <a:spcPts val="1620"/>
+              </a:lnSpc>
+              <a:spcAft>
+                <a:spcPts val="300"/>
+              </a:spcAft>
+              <a:buSzPct val="100000"/>
+              <a:buChar char="•"/>
             </a:pPr>
             <a:r>
               <a:rPr lang="en-US" sz="1200" dirty="0">
@@ -5355,127 +8271,10 @@
                 <a:ea typeface="Arial" pitchFamily="34" charset="-122"/>
                 <a:cs typeface="Arial" pitchFamily="34" charset="-120"/>
               </a:rPr>
-              <a:t>– Write on the board:</a:t>
+              <a:t>Hand out the baseline sheet face-down. Students write their name and predicted time on the back.</a:t>
             </a:r>
             <a:endParaRPr lang="en-US" sz="1200" dirty="0"/>
           </a:p>
-        </p:txBody>
-      </p:sp>
-      <p:sp>
-        <p:nvSpPr>
-          <p:cNvPr id="5" name="Text 3"/>
-          <p:cNvSpPr/>
-          <p:nvPr/>
-        </p:nvSpPr>
-        <p:spPr>
-          <a:xfrm>
-            <a:off x="406301" y="1173063"/>
-            <a:ext cx="8331398" cy="428476"/>
-          </a:xfrm>
-          <a:prstGeom prst="rect">
-            <a:avLst/>
-          </a:prstGeom>
-          <a:solidFill>
-            <a:srgbClr val="F4F8F9"/>
-          </a:solidFill>
-          <a:ln/>
-        </p:spPr>
-        <p:txBody>
-          <a:bodyPr wrap="square" rtlCol="0" anchor="ctr"/>
-          <a:lstStyle/>
-          <a:p>
-            <a:pPr indent="0" marL="0">
-              <a:buNone/>
-            </a:pPr>
-            <a:endParaRPr lang="en-US" dirty="0"/>
-          </a:p>
-        </p:txBody>
-      </p:sp>
-      <p:sp>
-        <p:nvSpPr>
-          <p:cNvPr id="6" name="Shape 4"/>
-          <p:cNvSpPr/>
-          <p:nvPr/>
-        </p:nvSpPr>
-        <p:spPr>
-          <a:xfrm>
-            <a:off x="430113" y="1173063"/>
-            <a:ext cx="0" cy="428476"/>
-          </a:xfrm>
-          <a:prstGeom prst="line">
-            <a:avLst/>
-          </a:prstGeom>
-          <a:noFill/>
-          <a:ln w="47625">
-            <a:solidFill>
-              <a:srgbClr val="277884"/>
-            </a:solidFill>
-            <a:prstDash val="solid"/>
-          </a:ln>
-        </p:spPr>
-      </p:sp>
-      <p:sp>
-        <p:nvSpPr>
-          <p:cNvPr id="7" name="Text 5"/>
-          <p:cNvSpPr/>
-          <p:nvPr/>
-        </p:nvSpPr>
-        <p:spPr>
-          <a:xfrm>
-            <a:off x="631627" y="1300014"/>
-            <a:ext cx="8086939" cy="174575"/>
-          </a:xfrm>
-          <a:prstGeom prst="rect">
-            <a:avLst/>
-          </a:prstGeom>
-          <a:noFill/>
-          <a:ln/>
-        </p:spPr>
-        <p:txBody>
-          <a:bodyPr wrap="square" lIns="0" tIns="0" rIns="0" bIns="0" rtlCol="0" anchor="t"/>
-          <a:lstStyle/>
-          <a:p>
-            <a:pPr algn="l" indent="0" marL="0">
-              <a:lnSpc>
-                <a:spcPts val="1375"/>
-              </a:lnSpc>
-              <a:buNone/>
-            </a:pPr>
-            <a:r>
-              <a:rPr lang="en-US" sz="1100" dirty="0">
-                <a:solidFill>
-                  <a:srgbClr val="1C2833"/>
-                </a:solidFill>
-                <a:latin typeface="Courier New" pitchFamily="34" charset="0"/>
-                <a:ea typeface="Courier New" pitchFamily="34" charset="-122"/>
-                <a:cs typeface="Courier New" pitchFamily="34" charset="-120"/>
-              </a:rPr>
-              <a:t>73 × 11 = ?</a:t>
-            </a:r>
-            <a:endParaRPr lang="en-US" sz="1100" dirty="0"/>
-          </a:p>
-        </p:txBody>
-      </p:sp>
-      <p:sp>
-        <p:nvSpPr>
-          <p:cNvPr id="8" name="Text 6"/>
-          <p:cNvSpPr/>
-          <p:nvPr/>
-        </p:nvSpPr>
-        <p:spPr>
-          <a:xfrm>
-            <a:off x="634901" y="1703040"/>
-            <a:ext cx="8102798" cy="281880"/>
-          </a:xfrm>
-          <a:prstGeom prst="rect">
-            <a:avLst/>
-          </a:prstGeom>
-          <a:noFill/>
-          <a:ln/>
-        </p:spPr>
-        <p:txBody>
-          <a:bodyPr wrap="square" lIns="0" tIns="0" rIns="0" bIns="0" rtlCol="0" anchor="t"/>
-          <a:lstStyle/>
           <a:p>
             <a:pPr algn="l" marL="342900" indent="-342900">
               <a:lnSpc>
@@ -5488,7 +8287,7 @@
               <a:buChar char="•"/>
             </a:pPr>
             <a:r>
-              <a:rPr lang="en-US" sz="1200" i="1" dirty="0">
+              <a:rPr lang="en-US" sz="1200" dirty="0">
                 <a:solidFill>
                   <a:srgbClr val="1C2833"/>
                 </a:solidFill>
@@ -5496,211 +8295,10 @@
                 <a:ea typeface="Arial" pitchFamily="34" charset="-122"/>
                 <a:cs typeface="Arial" pitchFamily="34" charset="-120"/>
               </a:rPr>
-              <a:t>"I'm going to show you a method that takes about 2 seconds, then we'll figure out why it works."</a:t>
+              <a:t>On "Go," flip and solve 73 × 11 using long multiplication.</a:t>
             </a:r>
             <a:endParaRPr lang="en-US" sz="1200" dirty="0"/>
           </a:p>
-        </p:txBody>
-      </p:sp>
-      <p:sp>
-        <p:nvSpPr>
-          <p:cNvPr id="9" name="Text 7"/>
-          <p:cNvSpPr/>
-          <p:nvPr/>
-        </p:nvSpPr>
-        <p:spPr>
-          <a:xfrm>
-            <a:off x="406301" y="2086421"/>
-            <a:ext cx="8331398" cy="777627"/>
-          </a:xfrm>
-          <a:prstGeom prst="rect">
-            <a:avLst/>
-          </a:prstGeom>
-          <a:solidFill>
-            <a:srgbClr val="F4F8F9"/>
-          </a:solidFill>
-          <a:ln/>
-        </p:spPr>
-        <p:txBody>
-          <a:bodyPr wrap="square" rtlCol="0" anchor="ctr"/>
-          <a:lstStyle/>
-          <a:p>
-            <a:pPr indent="0" marL="0">
-              <a:buNone/>
-            </a:pPr>
-            <a:endParaRPr lang="en-US" dirty="0"/>
-          </a:p>
-        </p:txBody>
-      </p:sp>
-      <p:sp>
-        <p:nvSpPr>
-          <p:cNvPr id="10" name="Shape 8"/>
-          <p:cNvSpPr/>
-          <p:nvPr/>
-        </p:nvSpPr>
-        <p:spPr>
-          <a:xfrm>
-            <a:off x="430113" y="2086421"/>
-            <a:ext cx="0" cy="777627"/>
-          </a:xfrm>
-          <a:prstGeom prst="line">
-            <a:avLst/>
-          </a:prstGeom>
-          <a:noFill/>
-          <a:ln w="47625">
-            <a:solidFill>
-              <a:srgbClr val="277884"/>
-            </a:solidFill>
-            <a:prstDash val="solid"/>
-          </a:ln>
-        </p:spPr>
-      </p:sp>
-      <p:sp>
-        <p:nvSpPr>
-          <p:cNvPr id="11" name="Text 9"/>
-          <p:cNvSpPr/>
-          <p:nvPr/>
-        </p:nvSpPr>
-        <p:spPr>
-          <a:xfrm>
-            <a:off x="631627" y="2213372"/>
-            <a:ext cx="8086939" cy="174575"/>
-          </a:xfrm>
-          <a:prstGeom prst="rect">
-            <a:avLst/>
-          </a:prstGeom>
-          <a:noFill/>
-          <a:ln/>
-        </p:spPr>
-        <p:txBody>
-          <a:bodyPr wrap="square" lIns="0" tIns="0" rIns="0" bIns="0" rtlCol="0" anchor="t"/>
-          <a:lstStyle/>
-          <a:p>
-            <a:pPr algn="l" indent="0" marL="0">
-              <a:lnSpc>
-                <a:spcPts val="1375"/>
-              </a:lnSpc>
-              <a:buNone/>
-            </a:pPr>
-            <a:r>
-              <a:rPr lang="en-US" sz="1100" dirty="0">
-                <a:solidFill>
-                  <a:srgbClr val="1C2833"/>
-                </a:solidFill>
-                <a:latin typeface="Courier New" pitchFamily="34" charset="0"/>
-                <a:ea typeface="Courier New" pitchFamily="34" charset="-122"/>
-                <a:cs typeface="Courier New" pitchFamily="34" charset="-120"/>
-              </a:rPr>
-              <a:t>Step 1: Write the digits, with a gap:    7  _  3</a:t>
-            </a:r>
-            <a:endParaRPr lang="en-US" sz="1100" dirty="0"/>
-          </a:p>
-        </p:txBody>
-      </p:sp>
-      <p:sp>
-        <p:nvSpPr>
-          <p:cNvPr id="12" name="Text 10"/>
-          <p:cNvSpPr/>
-          <p:nvPr/>
-        </p:nvSpPr>
-        <p:spPr>
-          <a:xfrm>
-            <a:off x="631627" y="2387947"/>
-            <a:ext cx="8086939" cy="174575"/>
-          </a:xfrm>
-          <a:prstGeom prst="rect">
-            <a:avLst/>
-          </a:prstGeom>
-          <a:noFill/>
-          <a:ln/>
-        </p:spPr>
-        <p:txBody>
-          <a:bodyPr wrap="square" lIns="0" tIns="0" rIns="0" bIns="0" rtlCol="0" anchor="t"/>
-          <a:lstStyle/>
-          <a:p>
-            <a:pPr algn="l" indent="0" marL="0">
-              <a:lnSpc>
-                <a:spcPts val="1375"/>
-              </a:lnSpc>
-              <a:buNone/>
-            </a:pPr>
-            <a:r>
-              <a:rPr lang="en-US" sz="1100" dirty="0">
-                <a:solidFill>
-                  <a:srgbClr val="1C2833"/>
-                </a:solidFill>
-                <a:latin typeface="Courier New" pitchFamily="34" charset="0"/>
-                <a:ea typeface="Courier New" pitchFamily="34" charset="-122"/>
-                <a:cs typeface="Courier New" pitchFamily="34" charset="-120"/>
-              </a:rPr>
-              <a:t>Step 2: Add the two digits: 7 + 3 = 10.</a:t>
-            </a:r>
-            <a:endParaRPr lang="en-US" sz="1100" dirty="0"/>
-          </a:p>
-        </p:txBody>
-      </p:sp>
-      <p:sp>
-        <p:nvSpPr>
-          <p:cNvPr id="13" name="Text 11"/>
-          <p:cNvSpPr/>
-          <p:nvPr/>
-        </p:nvSpPr>
-        <p:spPr>
-          <a:xfrm>
-            <a:off x="631627" y="2562523"/>
-            <a:ext cx="8086939" cy="174575"/>
-          </a:xfrm>
-          <a:prstGeom prst="rect">
-            <a:avLst/>
-          </a:prstGeom>
-          <a:noFill/>
-          <a:ln/>
-        </p:spPr>
-        <p:txBody>
-          <a:bodyPr wrap="square" lIns="0" tIns="0" rIns="0" bIns="0" rtlCol="0" anchor="t"/>
-          <a:lstStyle/>
-          <a:p>
-            <a:pPr algn="l" indent="0" marL="0">
-              <a:lnSpc>
-                <a:spcPts val="1375"/>
-              </a:lnSpc>
-              <a:buNone/>
-            </a:pPr>
-            <a:r>
-              <a:rPr lang="en-US" sz="1100" dirty="0">
-                <a:solidFill>
-                  <a:srgbClr val="1C2833"/>
-                </a:solidFill>
-                <a:latin typeface="Courier New" pitchFamily="34" charset="0"/>
-                <a:ea typeface="Courier New" pitchFamily="34" charset="-122"/>
-                <a:cs typeface="Courier New" pitchFamily="34" charset="-120"/>
-              </a:rPr>
-              <a:t>Wait — that's the carry case. Park it.</a:t>
-            </a:r>
-            <a:endParaRPr lang="en-US" sz="1100" dirty="0"/>
-          </a:p>
-        </p:txBody>
-      </p:sp>
-      <p:sp>
-        <p:nvSpPr>
-          <p:cNvPr id="14" name="Text 12"/>
-          <p:cNvSpPr/>
-          <p:nvPr/>
-        </p:nvSpPr>
-        <p:spPr>
-          <a:xfrm>
-            <a:off x="634901" y="2965549"/>
-            <a:ext cx="8102798" cy="281880"/>
-          </a:xfrm>
-          <a:prstGeom prst="rect">
-            <a:avLst/>
-          </a:prstGeom>
-          <a:noFill/>
-          <a:ln/>
-        </p:spPr>
-        <p:txBody>
-          <a:bodyPr wrap="square" lIns="0" tIns="0" rIns="0" bIns="0" rtlCol="0" anchor="t"/>
-          <a:lstStyle/>
           <a:p>
             <a:pPr algn="l" marL="342900" indent="-342900">
               <a:lnSpc>
@@ -5713,7 +8311,7 @@
               <a:buChar char="•"/>
             </a:pPr>
             <a:r>
-              <a:rPr lang="en-US" sz="1200" i="1" dirty="0">
+              <a:rPr lang="en-US" sz="1200" dirty="0">
                 <a:solidFill>
                   <a:srgbClr val="1C2833"/>
                 </a:solidFill>
@@ -5721,16 +8319,20 @@
                 <a:ea typeface="Arial" pitchFamily="34" charset="-122"/>
                 <a:cs typeface="Arial" pitchFamily="34" charset="-120"/>
               </a:rPr>
-              <a:t>Reset. Different number first.</a:t>
-            </a:r>
-            <a:pPr algn="l" indent="0" marL="0">
+              <a:t>Record actual time honestly. Mark answer themselves.</a:t>
+            </a:r>
+            <a:endParaRPr lang="en-US" sz="1200" dirty="0"/>
+          </a:p>
+          <a:p>
+            <a:pPr algn="l" marL="342900" indent="-342900">
               <a:lnSpc>
                 <a:spcPts val="1620"/>
               </a:lnSpc>
               <a:spcAft>
                 <a:spcPts val="300"/>
               </a:spcAft>
-              <a:buNone/>
+              <a:buSzPct val="100000"/>
+              <a:buChar char="•"/>
             </a:pPr>
             <a:r>
               <a:rPr lang="en-US" sz="1200" dirty="0">
@@ -5741,47 +8343,7 @@
                 <a:ea typeface="Arial" pitchFamily="34" charset="-122"/>
                 <a:cs typeface="Arial" pitchFamily="34" charset="-120"/>
               </a:rPr>
-              <a:t> Try </a:t>
-            </a:r>
-            <a:pPr algn="l" indent="0" marL="0">
-              <a:lnSpc>
-                <a:spcPts val="1620"/>
-              </a:lnSpc>
-              <a:spcAft>
-                <a:spcPts val="300"/>
-              </a:spcAft>
-              <a:buNone/>
-            </a:pPr>
-            <a:r>
-              <a:rPr lang="en-US" sz="1200" b="1" dirty="0">
-                <a:solidFill>
-                  <a:srgbClr val="1C2833"/>
-                </a:solidFill>
-                <a:latin typeface="Arial" pitchFamily="34" charset="0"/>
-                <a:ea typeface="Arial" pitchFamily="34" charset="-122"/>
-                <a:cs typeface="Arial" pitchFamily="34" charset="-120"/>
-              </a:rPr>
-              <a:t>23 × 11</a:t>
-            </a:r>
-            <a:pPr algn="l" indent="0" marL="0">
-              <a:lnSpc>
-                <a:spcPts val="1620"/>
-              </a:lnSpc>
-              <a:spcAft>
-                <a:spcPts val="300"/>
-              </a:spcAft>
-              <a:buNone/>
-            </a:pPr>
-            <a:r>
-              <a:rPr lang="en-US" sz="1200" dirty="0">
-                <a:solidFill>
-                  <a:srgbClr val="1C2833"/>
-                </a:solidFill>
-                <a:latin typeface="Arial" pitchFamily="34" charset="0"/>
-                <a:ea typeface="Arial" pitchFamily="34" charset="-122"/>
-                <a:cs typeface="Arial" pitchFamily="34" charset="-120"/>
-              </a:rPr>
-              <a:t>:</a:t>
+              <a:t>Expected range: 15–60 seconds.</a:t>
             </a:r>
             <a:endParaRPr lang="en-US" sz="1200" dirty="0"/>
           </a:p>
@@ -5789,781 +8351,13 @@
       </p:sp>
       <p:sp>
         <p:nvSpPr>
-          <p:cNvPr id="15" name="Text 13"/>
-          <p:cNvSpPr/>
-          <p:nvPr/>
-        </p:nvSpPr>
-        <p:spPr>
-          <a:xfrm>
-            <a:off x="406301" y="3348930"/>
-            <a:ext cx="8331398" cy="777627"/>
-          </a:xfrm>
-          <a:prstGeom prst="rect">
-            <a:avLst/>
-          </a:prstGeom>
-          <a:solidFill>
-            <a:srgbClr val="F4F8F9"/>
-          </a:solidFill>
-          <a:ln/>
-        </p:spPr>
-        <p:txBody>
-          <a:bodyPr wrap="square" rtlCol="0" anchor="ctr"/>
-          <a:lstStyle/>
-          <a:p>
-            <a:pPr indent="0" marL="0">
-              <a:buNone/>
-            </a:pPr>
-            <a:endParaRPr lang="en-US" dirty="0"/>
-          </a:p>
-        </p:txBody>
-      </p:sp>
-      <p:sp>
-        <p:nvSpPr>
-          <p:cNvPr id="16" name="Shape 14"/>
-          <p:cNvSpPr/>
-          <p:nvPr/>
-        </p:nvSpPr>
-        <p:spPr>
-          <a:xfrm>
-            <a:off x="430113" y="3348930"/>
-            <a:ext cx="0" cy="777627"/>
-          </a:xfrm>
-          <a:prstGeom prst="line">
-            <a:avLst/>
-          </a:prstGeom>
-          <a:noFill/>
-          <a:ln w="47625">
-            <a:solidFill>
-              <a:srgbClr val="277884"/>
-            </a:solidFill>
-            <a:prstDash val="solid"/>
-          </a:ln>
-        </p:spPr>
-      </p:sp>
-      <p:sp>
-        <p:nvSpPr>
-          <p:cNvPr id="17" name="Text 15"/>
-          <p:cNvSpPr/>
-          <p:nvPr/>
-        </p:nvSpPr>
-        <p:spPr>
-          <a:xfrm>
-            <a:off x="631627" y="3475881"/>
-            <a:ext cx="8086939" cy="174575"/>
-          </a:xfrm>
-          <a:prstGeom prst="rect">
-            <a:avLst/>
-          </a:prstGeom>
-          <a:noFill/>
-          <a:ln/>
-        </p:spPr>
-        <p:txBody>
-          <a:bodyPr wrap="square" lIns="0" tIns="0" rIns="0" bIns="0" rtlCol="0" anchor="t"/>
-          <a:lstStyle/>
-          <a:p>
-            <a:pPr algn="l" indent="0" marL="0">
-              <a:lnSpc>
-                <a:spcPts val="1375"/>
-              </a:lnSpc>
-              <a:buNone/>
-            </a:pPr>
-            <a:r>
-              <a:rPr lang="en-US" sz="1100" dirty="0">
-                <a:solidFill>
-                  <a:srgbClr val="1C2833"/>
-                </a:solidFill>
-                <a:latin typeface="Courier New" pitchFamily="34" charset="0"/>
-                <a:ea typeface="Courier New" pitchFamily="34" charset="-122"/>
-                <a:cs typeface="Courier New" pitchFamily="34" charset="-120"/>
-              </a:rPr>
-              <a:t>Step 1: Split:    2  _  3</a:t>
-            </a:r>
-            <a:endParaRPr lang="en-US" sz="1100" dirty="0"/>
-          </a:p>
-        </p:txBody>
-      </p:sp>
-      <p:sp>
-        <p:nvSpPr>
-          <p:cNvPr id="18" name="Text 16"/>
-          <p:cNvSpPr/>
-          <p:nvPr/>
-        </p:nvSpPr>
-        <p:spPr>
-          <a:xfrm>
-            <a:off x="631627" y="3650456"/>
-            <a:ext cx="8086939" cy="174575"/>
-          </a:xfrm>
-          <a:prstGeom prst="rect">
-            <a:avLst/>
-          </a:prstGeom>
-          <a:noFill/>
-          <a:ln/>
-        </p:spPr>
-        <p:txBody>
-          <a:bodyPr wrap="square" lIns="0" tIns="0" rIns="0" bIns="0" rtlCol="0" anchor="t"/>
-          <a:lstStyle/>
-          <a:p>
-            <a:pPr algn="l" indent="0" marL="0">
-              <a:lnSpc>
-                <a:spcPts val="1375"/>
-              </a:lnSpc>
-              <a:buNone/>
-            </a:pPr>
-            <a:r>
-              <a:rPr lang="en-US" sz="1100" dirty="0">
-                <a:solidFill>
-                  <a:srgbClr val="1C2833"/>
-                </a:solidFill>
-                <a:latin typeface="Courier New" pitchFamily="34" charset="0"/>
-                <a:ea typeface="Courier New" pitchFamily="34" charset="-122"/>
-                <a:cs typeface="Courier New" pitchFamily="34" charset="-120"/>
-              </a:rPr>
-              <a:t>Step 2: Add:      2 + 3 = 5</a:t>
-            </a:r>
-            <a:endParaRPr lang="en-US" sz="1100" dirty="0"/>
-          </a:p>
-        </p:txBody>
-      </p:sp>
-      <p:sp>
-        <p:nvSpPr>
-          <p:cNvPr id="19" name="Text 17"/>
-          <p:cNvSpPr/>
-          <p:nvPr/>
-        </p:nvSpPr>
-        <p:spPr>
-          <a:xfrm>
-            <a:off x="631627" y="3825032"/>
-            <a:ext cx="8086939" cy="174575"/>
-          </a:xfrm>
-          <a:prstGeom prst="rect">
-            <a:avLst/>
-          </a:prstGeom>
-          <a:noFill/>
-          <a:ln/>
-        </p:spPr>
-        <p:txBody>
-          <a:bodyPr wrap="square" lIns="0" tIns="0" rIns="0" bIns="0" rtlCol="0" anchor="t"/>
-          <a:lstStyle/>
-          <a:p>
-            <a:pPr algn="l" indent="0" marL="0">
-              <a:lnSpc>
-                <a:spcPts val="1375"/>
-              </a:lnSpc>
-              <a:buNone/>
-            </a:pPr>
-            <a:r>
-              <a:rPr lang="en-US" sz="1100" dirty="0">
-                <a:solidFill>
-                  <a:srgbClr val="1C2833"/>
-                </a:solidFill>
-                <a:latin typeface="Courier New" pitchFamily="34" charset="0"/>
-                <a:ea typeface="Courier New" pitchFamily="34" charset="-122"/>
-                <a:cs typeface="Courier New" pitchFamily="34" charset="-120"/>
-              </a:rPr>
-              <a:t>Step 3: Drop in:  2  5  3   →   253.</a:t>
-            </a:r>
-            <a:endParaRPr lang="en-US" sz="1100" dirty="0"/>
-          </a:p>
-        </p:txBody>
-      </p:sp>
-      <p:sp>
-        <p:nvSpPr>
-          <p:cNvPr id="20" name="Text 18"/>
-          <p:cNvSpPr/>
-          <p:nvPr/>
-        </p:nvSpPr>
-        <p:spPr>
-          <a:xfrm>
-            <a:off x="406301" y="4215408"/>
-            <a:ext cx="8498026" cy="213271"/>
-          </a:xfrm>
-          <a:prstGeom prst="rect">
-            <a:avLst/>
-          </a:prstGeom>
-          <a:noFill/>
-          <a:ln/>
-        </p:spPr>
-        <p:txBody>
-          <a:bodyPr wrap="square" lIns="0" tIns="0" rIns="0" bIns="0" rtlCol="0" anchor="t"/>
-          <a:lstStyle/>
-          <a:p>
-            <a:pPr algn="l" indent="0" marL="0">
-              <a:lnSpc>
-                <a:spcPts val="1680"/>
-              </a:lnSpc>
-              <a:spcBef>
-                <a:spcPts val="300"/>
-              </a:spcBef>
-              <a:spcAft>
-                <a:spcPts val="300"/>
-              </a:spcAft>
-              <a:buNone/>
-            </a:pPr>
-            <a:r>
-              <a:rPr lang="en-US" sz="1200" dirty="0">
-                <a:solidFill>
-                  <a:srgbClr val="1C2833"/>
-                </a:solidFill>
-                <a:latin typeface="Arial" pitchFamily="34" charset="0"/>
-                <a:ea typeface="Arial" pitchFamily="34" charset="-122"/>
-                <a:cs typeface="Arial" pitchFamily="34" charset="-120"/>
-              </a:rPr>
-              <a:t>Check on the board with long multiplication: 23 × 11 = 23 × 10 + 23 = 230 + 23 = 253. ✓</a:t>
-            </a:r>
-            <a:endParaRPr lang="en-US" sz="1200" dirty="0"/>
-          </a:p>
-        </p:txBody>
-      </p:sp>
-      <p:sp>
-        <p:nvSpPr>
-          <p:cNvPr id="21" name="Text 19"/>
-          <p:cNvSpPr/>
-          <p:nvPr/>
-        </p:nvSpPr>
-        <p:spPr>
-          <a:xfrm>
-            <a:off x="406301" y="4504879"/>
-            <a:ext cx="8498026" cy="213271"/>
-          </a:xfrm>
-          <a:prstGeom prst="rect">
-            <a:avLst/>
-          </a:prstGeom>
-          <a:noFill/>
-          <a:ln/>
-        </p:spPr>
-        <p:txBody>
-          <a:bodyPr wrap="square" lIns="0" tIns="0" rIns="0" bIns="0" rtlCol="0" anchor="t"/>
-          <a:lstStyle/>
-          <a:p>
-            <a:pPr algn="l" indent="0" marL="0">
-              <a:lnSpc>
-                <a:spcPts val="1680"/>
-              </a:lnSpc>
-              <a:spcBef>
-                <a:spcPts val="300"/>
-              </a:spcBef>
-              <a:spcAft>
-                <a:spcPts val="300"/>
-              </a:spcAft>
-              <a:buNone/>
-            </a:pPr>
-            <a:r>
-              <a:rPr lang="en-US" sz="1200" dirty="0">
-                <a:solidFill>
-                  <a:srgbClr val="1C2833"/>
-                </a:solidFill>
-                <a:latin typeface="Arial" pitchFamily="34" charset="0"/>
-                <a:ea typeface="Arial" pitchFamily="34" charset="-122"/>
-                <a:cs typeface="Arial" pitchFamily="34" charset="-120"/>
-              </a:rPr>
-              <a:t>– Try </a:t>
-            </a:r>
-            <a:pPr algn="l" indent="0" marL="0">
-              <a:lnSpc>
-                <a:spcPts val="1680"/>
-              </a:lnSpc>
-              <a:spcBef>
-                <a:spcPts val="300"/>
-              </a:spcBef>
-              <a:spcAft>
-                <a:spcPts val="300"/>
-              </a:spcAft>
-              <a:buNone/>
-            </a:pPr>
-            <a:r>
-              <a:rPr lang="en-US" sz="1200" b="1" dirty="0">
-                <a:solidFill>
-                  <a:srgbClr val="1C2833"/>
-                </a:solidFill>
-                <a:latin typeface="Arial" pitchFamily="34" charset="0"/>
-                <a:ea typeface="Arial" pitchFamily="34" charset="-122"/>
-                <a:cs typeface="Arial" pitchFamily="34" charset="-120"/>
-              </a:rPr>
-              <a:t>45 × 11</a:t>
-            </a:r>
-            <a:pPr algn="l" indent="0" marL="0">
-              <a:lnSpc>
-                <a:spcPts val="1680"/>
-              </a:lnSpc>
-              <a:spcBef>
-                <a:spcPts val="300"/>
-              </a:spcBef>
-              <a:spcAft>
-                <a:spcPts val="300"/>
-              </a:spcAft>
-              <a:buNone/>
-            </a:pPr>
-            <a:r>
-              <a:rPr lang="en-US" sz="1200" dirty="0">
-                <a:solidFill>
-                  <a:srgbClr val="1C2833"/>
-                </a:solidFill>
-                <a:latin typeface="Arial" pitchFamily="34" charset="0"/>
-                <a:ea typeface="Arial" pitchFamily="34" charset="-122"/>
-                <a:cs typeface="Arial" pitchFamily="34" charset="-120"/>
-              </a:rPr>
-              <a:t>:</a:t>
-            </a:r>
-            <a:endParaRPr lang="en-US" sz="1200" dirty="0"/>
-          </a:p>
-        </p:txBody>
-      </p:sp>
-      <p:sp>
-        <p:nvSpPr>
-          <p:cNvPr id="22" name="Text 20"/>
-          <p:cNvSpPr/>
-          <p:nvPr/>
-        </p:nvSpPr>
-        <p:spPr>
-          <a:xfrm>
-            <a:off x="406301" y="4807000"/>
-            <a:ext cx="8331398" cy="428476"/>
-          </a:xfrm>
-          <a:prstGeom prst="rect">
-            <a:avLst/>
-          </a:prstGeom>
-          <a:solidFill>
-            <a:srgbClr val="F4F8F9"/>
-          </a:solidFill>
-          <a:ln/>
-        </p:spPr>
-        <p:txBody>
-          <a:bodyPr wrap="square" rtlCol="0" anchor="ctr"/>
-          <a:lstStyle/>
-          <a:p>
-            <a:pPr indent="0" marL="0">
-              <a:buNone/>
-            </a:pPr>
-            <a:endParaRPr lang="en-US" dirty="0"/>
-          </a:p>
-        </p:txBody>
-      </p:sp>
-      <p:sp>
-        <p:nvSpPr>
-          <p:cNvPr id="23" name="Shape 21"/>
-          <p:cNvSpPr/>
-          <p:nvPr/>
-        </p:nvSpPr>
-        <p:spPr>
-          <a:xfrm>
-            <a:off x="430113" y="4807000"/>
-            <a:ext cx="0" cy="428476"/>
-          </a:xfrm>
-          <a:prstGeom prst="line">
-            <a:avLst/>
-          </a:prstGeom>
-          <a:noFill/>
-          <a:ln w="47625">
-            <a:solidFill>
-              <a:srgbClr val="277884"/>
-            </a:solidFill>
-            <a:prstDash val="solid"/>
-          </a:ln>
-        </p:spPr>
-      </p:sp>
-      <p:sp>
-        <p:nvSpPr>
-          <p:cNvPr id="24" name="Text 22"/>
-          <p:cNvSpPr/>
-          <p:nvPr/>
-        </p:nvSpPr>
-        <p:spPr>
-          <a:xfrm>
-            <a:off x="631627" y="4933950"/>
-            <a:ext cx="8086939" cy="174575"/>
-          </a:xfrm>
-          <a:prstGeom prst="rect">
-            <a:avLst/>
-          </a:prstGeom>
-          <a:noFill/>
-          <a:ln/>
-        </p:spPr>
-        <p:txBody>
-          <a:bodyPr wrap="square" lIns="0" tIns="0" rIns="0" bIns="0" rtlCol="0" anchor="t"/>
-          <a:lstStyle/>
-          <a:p>
-            <a:pPr algn="l" indent="0" marL="0">
-              <a:lnSpc>
-                <a:spcPts val="1375"/>
-              </a:lnSpc>
-              <a:buNone/>
-            </a:pPr>
-            <a:r>
-              <a:rPr lang="en-US" sz="1100" dirty="0">
-                <a:solidFill>
-                  <a:srgbClr val="1C2833"/>
-                </a:solidFill>
-                <a:latin typeface="Courier New" pitchFamily="34" charset="0"/>
-                <a:ea typeface="Courier New" pitchFamily="34" charset="-122"/>
-                <a:cs typeface="Courier New" pitchFamily="34" charset="-120"/>
-              </a:rPr>
-              <a:t>4 _ 5  →  4 + 5 = 9  →  4 9 5  →  495.</a:t>
-            </a:r>
-            <a:endParaRPr lang="en-US" sz="1100" dirty="0"/>
-          </a:p>
-        </p:txBody>
-      </p:sp>
-      <p:sp>
-        <p:nvSpPr>
-          <p:cNvPr id="25" name="Text 23"/>
-          <p:cNvSpPr/>
-          <p:nvPr/>
-        </p:nvSpPr>
-        <p:spPr>
-          <a:xfrm>
-            <a:off x="406301" y="5324326"/>
-            <a:ext cx="8498026" cy="213271"/>
-          </a:xfrm>
-          <a:prstGeom prst="rect">
-            <a:avLst/>
-          </a:prstGeom>
-          <a:noFill/>
-          <a:ln/>
-        </p:spPr>
-        <p:txBody>
-          <a:bodyPr wrap="square" lIns="0" tIns="0" rIns="0" bIns="0" rtlCol="0" anchor="t"/>
-          <a:lstStyle/>
-          <a:p>
-            <a:pPr algn="l" indent="0" marL="0">
-              <a:lnSpc>
-                <a:spcPts val="1680"/>
-              </a:lnSpc>
-              <a:spcBef>
-                <a:spcPts val="300"/>
-              </a:spcBef>
-              <a:spcAft>
-                <a:spcPts val="300"/>
-              </a:spcAft>
-              <a:buNone/>
-            </a:pPr>
-            <a:r>
-              <a:rPr lang="en-US" sz="1200" dirty="0">
-                <a:solidFill>
-                  <a:srgbClr val="1C2833"/>
-                </a:solidFill>
-                <a:latin typeface="Arial" pitchFamily="34" charset="0"/>
-                <a:ea typeface="Arial" pitchFamily="34" charset="-122"/>
-                <a:cs typeface="Arial" pitchFamily="34" charset="-120"/>
-              </a:rPr>
-              <a:t>– Try </a:t>
-            </a:r>
-            <a:pPr algn="l" indent="0" marL="0">
-              <a:lnSpc>
-                <a:spcPts val="1680"/>
-              </a:lnSpc>
-              <a:spcBef>
-                <a:spcPts val="300"/>
-              </a:spcBef>
-              <a:spcAft>
-                <a:spcPts val="300"/>
-              </a:spcAft>
-              <a:buNone/>
-            </a:pPr>
-            <a:r>
-              <a:rPr lang="en-US" sz="1200" b="1" dirty="0">
-                <a:solidFill>
-                  <a:srgbClr val="1C2833"/>
-                </a:solidFill>
-                <a:latin typeface="Arial" pitchFamily="34" charset="0"/>
-                <a:ea typeface="Arial" pitchFamily="34" charset="-122"/>
-                <a:cs typeface="Arial" pitchFamily="34" charset="-120"/>
-              </a:rPr>
-              <a:t>62 × 11</a:t>
-            </a:r>
-            <a:pPr algn="l" indent="0" marL="0">
-              <a:lnSpc>
-                <a:spcPts val="1680"/>
-              </a:lnSpc>
-              <a:spcBef>
-                <a:spcPts val="300"/>
-              </a:spcBef>
-              <a:spcAft>
-                <a:spcPts val="300"/>
-              </a:spcAft>
-              <a:buNone/>
-            </a:pPr>
-            <a:r>
-              <a:rPr lang="en-US" sz="1200" dirty="0">
-                <a:solidFill>
-                  <a:srgbClr val="1C2833"/>
-                </a:solidFill>
-                <a:latin typeface="Arial" pitchFamily="34" charset="0"/>
-                <a:ea typeface="Arial" pitchFamily="34" charset="-122"/>
-                <a:cs typeface="Arial" pitchFamily="34" charset="-120"/>
-              </a:rPr>
-              <a:t>:</a:t>
-            </a:r>
-            <a:endParaRPr lang="en-US" sz="1200" dirty="0"/>
-          </a:p>
-        </p:txBody>
-      </p:sp>
-      <p:sp>
-        <p:nvSpPr>
-          <p:cNvPr id="26" name="Text 24"/>
-          <p:cNvSpPr/>
-          <p:nvPr/>
-        </p:nvSpPr>
-        <p:spPr>
-          <a:xfrm>
-            <a:off x="406301" y="5626447"/>
-            <a:ext cx="8331398" cy="428476"/>
-          </a:xfrm>
-          <a:prstGeom prst="rect">
-            <a:avLst/>
-          </a:prstGeom>
-          <a:solidFill>
-            <a:srgbClr val="F4F8F9"/>
-          </a:solidFill>
-          <a:ln/>
-        </p:spPr>
-        <p:txBody>
-          <a:bodyPr wrap="square" rtlCol="0" anchor="ctr"/>
-          <a:lstStyle/>
-          <a:p>
-            <a:pPr indent="0" marL="0">
-              <a:buNone/>
-            </a:pPr>
-            <a:endParaRPr lang="en-US" dirty="0"/>
-          </a:p>
-        </p:txBody>
-      </p:sp>
-      <p:sp>
-        <p:nvSpPr>
-          <p:cNvPr id="27" name="Shape 25"/>
-          <p:cNvSpPr/>
-          <p:nvPr/>
-        </p:nvSpPr>
-        <p:spPr>
-          <a:xfrm>
-            <a:off x="430113" y="5626447"/>
-            <a:ext cx="0" cy="428476"/>
-          </a:xfrm>
-          <a:prstGeom prst="line">
-            <a:avLst/>
-          </a:prstGeom>
-          <a:noFill/>
-          <a:ln w="47625">
-            <a:solidFill>
-              <a:srgbClr val="277884"/>
-            </a:solidFill>
-            <a:prstDash val="solid"/>
-          </a:ln>
-        </p:spPr>
-      </p:sp>
-      <p:sp>
-        <p:nvSpPr>
-          <p:cNvPr id="28" name="Text 26"/>
-          <p:cNvSpPr/>
-          <p:nvPr/>
-        </p:nvSpPr>
-        <p:spPr>
-          <a:xfrm>
-            <a:off x="631627" y="5753398"/>
-            <a:ext cx="8086939" cy="174575"/>
-          </a:xfrm>
-          <a:prstGeom prst="rect">
-            <a:avLst/>
-          </a:prstGeom>
-          <a:noFill/>
-          <a:ln/>
-        </p:spPr>
-        <p:txBody>
-          <a:bodyPr wrap="square" lIns="0" tIns="0" rIns="0" bIns="0" rtlCol="0" anchor="t"/>
-          <a:lstStyle/>
-          <a:p>
-            <a:pPr algn="l" indent="0" marL="0">
-              <a:lnSpc>
-                <a:spcPts val="1375"/>
-              </a:lnSpc>
-              <a:buNone/>
-            </a:pPr>
-            <a:r>
-              <a:rPr lang="en-US" sz="1100" dirty="0">
-                <a:solidFill>
-                  <a:srgbClr val="1C2833"/>
-                </a:solidFill>
-                <a:latin typeface="Courier New" pitchFamily="34" charset="0"/>
-                <a:ea typeface="Courier New" pitchFamily="34" charset="-122"/>
-                <a:cs typeface="Courier New" pitchFamily="34" charset="-120"/>
-              </a:rPr>
-              <a:t>6 _ 2  →  6 + 2 = 8  →  6 8 2  →  682.</a:t>
-            </a:r>
-            <a:endParaRPr lang="en-US" sz="1100" dirty="0"/>
-          </a:p>
-        </p:txBody>
-      </p:sp>
-      <p:sp>
-        <p:nvSpPr>
-          <p:cNvPr id="29" name="Text 27"/>
-          <p:cNvSpPr/>
-          <p:nvPr/>
-        </p:nvSpPr>
-        <p:spPr>
-          <a:xfrm>
-            <a:off x="634901" y="6156424"/>
-            <a:ext cx="8102798" cy="281880"/>
-          </a:xfrm>
-          <a:prstGeom prst="rect">
-            <a:avLst/>
-          </a:prstGeom>
-          <a:noFill/>
-          <a:ln/>
-        </p:spPr>
-        <p:txBody>
-          <a:bodyPr wrap="square" lIns="0" tIns="0" rIns="0" bIns="0" rtlCol="0" anchor="t"/>
-          <a:lstStyle/>
-          <a:p>
-            <a:pPr algn="l" marL="342900" indent="-342900">
-              <a:lnSpc>
-                <a:spcPts val="1620"/>
-              </a:lnSpc>
-              <a:spcAft>
-                <a:spcPts val="300"/>
-              </a:spcAft>
-              <a:buSzPct val="100000"/>
-              <a:buChar char="•"/>
-            </a:pPr>
-            <a:r>
-              <a:rPr lang="en-US" sz="1200" i="1" dirty="0">
-                <a:solidFill>
-                  <a:srgbClr val="1C2833"/>
-                </a:solidFill>
-                <a:latin typeface="Arial" pitchFamily="34" charset="0"/>
-                <a:ea typeface="Arial" pitchFamily="34" charset="-122"/>
-                <a:cs typeface="Arial" pitchFamily="34" charset="-120"/>
-              </a:rPr>
-              <a:t>"Pattern: outer digits stay the same; middle digit = their sum."</a:t>
-            </a:r>
-            <a:endParaRPr lang="en-US" sz="1200" dirty="0"/>
-          </a:p>
-        </p:txBody>
-      </p:sp>
-      <p:sp>
-        <p:nvSpPr>
-          <p:cNvPr id="30" name="Text 28"/>
-          <p:cNvSpPr/>
-          <p:nvPr/>
-        </p:nvSpPr>
-        <p:spPr>
-          <a:xfrm>
-            <a:off x="406301" y="6527155"/>
-            <a:ext cx="8498026" cy="426541"/>
-          </a:xfrm>
-          <a:prstGeom prst="rect">
-            <a:avLst/>
-          </a:prstGeom>
-          <a:noFill/>
-          <a:ln/>
-        </p:spPr>
-        <p:txBody>
-          <a:bodyPr wrap="square" lIns="0" tIns="0" rIns="0" bIns="0" rtlCol="0" anchor="t"/>
-          <a:lstStyle/>
-          <a:p>
-            <a:pPr algn="l" indent="0" marL="0">
-              <a:lnSpc>
-                <a:spcPts val="1680"/>
-              </a:lnSpc>
-              <a:spcBef>
-                <a:spcPts val="300"/>
-              </a:spcBef>
-              <a:spcAft>
-                <a:spcPts val="300"/>
-              </a:spcAft>
-              <a:buNone/>
-            </a:pPr>
-            <a:r>
-              <a:rPr lang="en-US" sz="1200" dirty="0">
-                <a:solidFill>
-                  <a:srgbClr val="1C2833"/>
-                </a:solidFill>
-                <a:latin typeface="Arial" pitchFamily="34" charset="0"/>
-                <a:ea typeface="Arial" pitchFamily="34" charset="-122"/>
-                <a:cs typeface="Arial" pitchFamily="34" charset="-120"/>
-              </a:rPr>
-              <a:t>– Now name it. </a:t>
-            </a:r>
-            <a:pPr algn="l" indent="0" marL="0">
-              <a:lnSpc>
-                <a:spcPts val="1680"/>
-              </a:lnSpc>
-              <a:spcBef>
-                <a:spcPts val="300"/>
-              </a:spcBef>
-              <a:spcAft>
-                <a:spcPts val="300"/>
-              </a:spcAft>
-              <a:buNone/>
-            </a:pPr>
-            <a:r>
-              <a:rPr lang="en-US" sz="1200" i="1" dirty="0">
-                <a:solidFill>
-                  <a:srgbClr val="1C2833"/>
-                </a:solidFill>
-                <a:latin typeface="Arial" pitchFamily="34" charset="0"/>
-                <a:ea typeface="Arial" pitchFamily="34" charset="-122"/>
-                <a:cs typeface="Arial" pitchFamily="34" charset="-120"/>
-              </a:rPr>
-              <a:t>"Tirthaji (1965) calls this </a:t>
-            </a:r>
-            <a:pPr algn="l" indent="0" marL="0">
-              <a:lnSpc>
-                <a:spcPts val="1680"/>
-              </a:lnSpc>
-              <a:spcBef>
-                <a:spcPts val="300"/>
-              </a:spcBef>
-              <a:spcAft>
-                <a:spcPts val="300"/>
-              </a:spcAft>
-              <a:buNone/>
-            </a:pPr>
-            <a:r>
-              <a:rPr lang="en-US" sz="1200" b="1" i="1" dirty="0">
-                <a:solidFill>
-                  <a:srgbClr val="1C2833"/>
-                </a:solidFill>
-                <a:latin typeface="Arial" pitchFamily="34" charset="0"/>
-                <a:ea typeface="Arial" pitchFamily="34" charset="-122"/>
-                <a:cs typeface="Arial" pitchFamily="34" charset="-120"/>
-              </a:rPr>
-              <a:t>Ekādhikena Pūrveṇa</a:t>
-            </a:r>
-            <a:pPr algn="l" indent="0" marL="0">
-              <a:lnSpc>
-                <a:spcPts val="1680"/>
-              </a:lnSpc>
-              <a:spcBef>
-                <a:spcPts val="300"/>
-              </a:spcBef>
-              <a:spcAft>
-                <a:spcPts val="300"/>
-              </a:spcAft>
-              <a:buNone/>
-            </a:pPr>
-            <a:r>
-              <a:rPr lang="en-US" sz="1200" i="1" dirty="0">
-                <a:solidFill>
-                  <a:srgbClr val="1C2833"/>
-                </a:solidFill>
-                <a:latin typeface="Arial" pitchFamily="34" charset="0"/>
-                <a:ea typeface="Arial" pitchFamily="34" charset="-122"/>
-                <a:cs typeface="Arial" pitchFamily="34" charset="-120"/>
-              </a:rPr>
-              <a:t> — 'by one more than the previous.' That is the Sanskrit name of the sūtra. The trick itself is just (10a + b) × 11 = 100a + 10(a+b) + b, which we'll prove on Day 3."</a:t>
-            </a:r>
-            <a:endParaRPr lang="en-US" sz="1200" dirty="0"/>
-          </a:p>
-        </p:txBody>
-      </p:sp>
-      <p:sp>
-        <p:nvSpPr>
-          <p:cNvPr id="31" name="Text 29"/>
-          <p:cNvSpPr/>
-          <p:nvPr/>
-        </p:nvSpPr>
-        <p:spPr>
-          <a:xfrm>
-            <a:off x="406301" y="7106096"/>
+          <p:cNvPr id="5" name="Text 3"/>
+          <p:cNvSpPr/>
+          <p:nvPr/>
+        </p:nvSpPr>
+        <p:spPr>
+          <a:xfrm>
+            <a:off x="406301" y="4434929"/>
             <a:ext cx="8498026" cy="213271"/>
           </a:xfrm>
           <a:prstGeom prst="rect">
@@ -6707,7 +8501,7 @@
                 <a:ea typeface="Georgia" pitchFamily="34" charset="-122"/>
                 <a:cs typeface="Georgia" pitchFamily="34" charset="-120"/>
               </a:rPr>
-              <a:t>Activity (15 min) — Try it yourself</a:t>
+              <a:t>Teacher demonstration (12 min) — The trick</a:t>
             </a:r>
             <a:endParaRPr lang="en-US" sz="1800" dirty="0"/>
           </a:p>
@@ -6721,8 +8515,8 @@
         </p:nvSpPr>
         <p:spPr>
           <a:xfrm>
-            <a:off x="406301" y="870942"/>
-            <a:ext cx="8498026" cy="213271"/>
+            <a:off x="634901" y="883593"/>
+            <a:ext cx="8102798" cy="281880"/>
           </a:xfrm>
           <a:prstGeom prst="rect">
             <a:avLst/>
@@ -6734,17 +8528,15 @@
           <a:bodyPr wrap="square" lIns="0" tIns="0" rIns="0" bIns="0" rtlCol="0" anchor="t"/>
           <a:lstStyle/>
           <a:p>
-            <a:pPr algn="l" indent="0" marL="0">
-              <a:lnSpc>
-                <a:spcPts val="1680"/>
-              </a:lnSpc>
-              <a:spcBef>
-                <a:spcPts val="300"/>
-              </a:spcBef>
-              <a:spcAft>
-                <a:spcPts val="300"/>
-              </a:spcAft>
-              <a:buNone/>
+            <a:pPr algn="l" marL="342900" indent="-342900">
+              <a:lnSpc>
+                <a:spcPts val="1620"/>
+              </a:lnSpc>
+              <a:spcAft>
+                <a:spcPts val="300"/>
+              </a:spcAft>
+              <a:buSzPct val="100000"/>
+              <a:buChar char="•"/>
             </a:pPr>
             <a:r>
               <a:rPr lang="en-US" sz="1200" dirty="0">
@@ -6755,7 +8547,7 @@
                 <a:ea typeface="Arial" pitchFamily="34" charset="-122"/>
                 <a:cs typeface="Arial" pitchFamily="34" charset="-120"/>
               </a:rPr>
-              <a:t>– Worksheet (handed out): 10 two-digit × 11 problems, ALL with digit-sum &lt; 10.</a:t>
+              <a:t>Write on the board:</a:t>
             </a:r>
             <a:endParaRPr lang="en-US" sz="1200" dirty="0"/>
           </a:p>
@@ -6769,8 +8561,8 @@
         </p:nvSpPr>
         <p:spPr>
           <a:xfrm>
-            <a:off x="406301" y="1173063"/>
-            <a:ext cx="8331398" cy="603052"/>
+            <a:off x="406301" y="1266974"/>
+            <a:ext cx="8331398" cy="428476"/>
           </a:xfrm>
           <a:prstGeom prst="rect">
             <a:avLst/>
@@ -6799,8 +8591,8 @@
         </p:nvSpPr>
         <p:spPr>
           <a:xfrm>
-            <a:off x="430113" y="1173063"/>
-            <a:ext cx="0" cy="603052"/>
+            <a:off x="430113" y="1266974"/>
+            <a:ext cx="0" cy="428476"/>
           </a:xfrm>
           <a:prstGeom prst="line">
             <a:avLst/>
@@ -6822,7 +8614,7 @@
         </p:nvSpPr>
         <p:spPr>
           <a:xfrm>
-            <a:off x="631627" y="1300014"/>
+            <a:off x="631627" y="1393924"/>
             <a:ext cx="8086939" cy="174575"/>
           </a:xfrm>
           <a:prstGeom prst="rect">
@@ -6850,7 +8642,7 @@
                 <a:ea typeface="Courier New" pitchFamily="34" charset="-122"/>
                 <a:cs typeface="Courier New" pitchFamily="34" charset="-120"/>
               </a:rPr>
-              <a:t>12 × 11    23 × 11    34 × 11    45 × 11    52 × 11</a:t>
+              <a:t>73 × 11 = ?</a:t>
             </a:r>
             <a:endParaRPr lang="en-US" sz="1100" dirty="0"/>
           </a:p>
@@ -6864,8 +8656,8 @@
         </p:nvSpPr>
         <p:spPr>
           <a:xfrm>
-            <a:off x="631627" y="1474589"/>
-            <a:ext cx="8086939" cy="174575"/>
+            <a:off x="634901" y="1796951"/>
+            <a:ext cx="8102798" cy="281880"/>
           </a:xfrm>
           <a:prstGeom prst="rect">
             <a:avLst/>
@@ -6877,62 +8669,18 @@
           <a:bodyPr wrap="square" lIns="0" tIns="0" rIns="0" bIns="0" rtlCol="0" anchor="t"/>
           <a:lstStyle/>
           <a:p>
-            <a:pPr algn="l" indent="0" marL="0">
-              <a:lnSpc>
-                <a:spcPts val="1375"/>
-              </a:lnSpc>
-              <a:buNone/>
-            </a:pPr>
-            <a:r>
-              <a:rPr lang="en-US" sz="1100" dirty="0">
-                <a:solidFill>
-                  <a:srgbClr val="1C2833"/>
-                </a:solidFill>
-                <a:latin typeface="Courier New" pitchFamily="34" charset="0"/>
-                <a:ea typeface="Courier New" pitchFamily="34" charset="-122"/>
-                <a:cs typeface="Courier New" pitchFamily="34" charset="-120"/>
-              </a:rPr>
-              <a:t>61 × 11    16 × 11    27 × 11    35 × 11    44 × 11</a:t>
-            </a:r>
-            <a:endParaRPr lang="en-US" sz="1100" dirty="0"/>
-          </a:p>
-        </p:txBody>
-      </p:sp>
-      <p:sp>
-        <p:nvSpPr>
-          <p:cNvPr id="9" name="Text 7"/>
-          <p:cNvSpPr/>
-          <p:nvPr/>
-        </p:nvSpPr>
-        <p:spPr>
-          <a:xfrm>
-            <a:off x="406301" y="1864965"/>
-            <a:ext cx="8498026" cy="213271"/>
-          </a:xfrm>
-          <a:prstGeom prst="rect">
-            <a:avLst/>
-          </a:prstGeom>
-          <a:noFill/>
-          <a:ln/>
-        </p:spPr>
-        <p:txBody>
-          <a:bodyPr wrap="square" lIns="0" tIns="0" rIns="0" bIns="0" rtlCol="0" anchor="t"/>
-          <a:lstStyle/>
-          <a:p>
-            <a:pPr algn="l" indent="0" marL="0">
-              <a:lnSpc>
-                <a:spcPts val="1680"/>
-              </a:lnSpc>
-              <a:spcBef>
-                <a:spcPts val="300"/>
-              </a:spcBef>
-              <a:spcAft>
-                <a:spcPts val="300"/>
-              </a:spcAft>
-              <a:buNone/>
-            </a:pPr>
-            <a:r>
-              <a:rPr lang="en-US" sz="1200" dirty="0">
+            <a:pPr algn="l" marL="342900" indent="-342900">
+              <a:lnSpc>
+                <a:spcPts val="1620"/>
+              </a:lnSpc>
+              <a:spcAft>
+                <a:spcPts val="300"/>
+              </a:spcAft>
+              <a:buSzPct val="100000"/>
+              <a:buChar char="•"/>
+            </a:pPr>
+            <a:r>
+              <a:rPr lang="en-US" sz="1200" i="1" dirty="0">
                 <a:solidFill>
                   <a:srgbClr val="1C2833"/>
                 </a:solidFill>
@@ -6940,7 +8688,7 @@
                 <a:ea typeface="Arial" pitchFamily="34" charset="-122"/>
                 <a:cs typeface="Arial" pitchFamily="34" charset="-120"/>
               </a:rPr>
-              <a:t>– Pair work. Partner times each other. Goal: each problem under 3 seconds.</a:t>
+              <a:t>"I'm going to show you a method that takes about 2 seconds, then we'll figure out why it works."</a:t>
             </a:r>
             <a:endParaRPr lang="en-US" sz="1200" dirty="0"/>
           </a:p>
@@ -6948,124 +8696,7 @@
       </p:sp>
       <p:sp>
         <p:nvSpPr>
-          <p:cNvPr id="10" name="Text 8"/>
-          <p:cNvSpPr/>
-          <p:nvPr/>
-        </p:nvSpPr>
-        <p:spPr>
-          <a:xfrm>
-            <a:off x="406301" y="2154436"/>
-            <a:ext cx="8498026" cy="213271"/>
-          </a:xfrm>
-          <a:prstGeom prst="rect">
-            <a:avLst/>
-          </a:prstGeom>
-          <a:noFill/>
-          <a:ln/>
-        </p:spPr>
-        <p:txBody>
-          <a:bodyPr wrap="square" lIns="0" tIns="0" rIns="0" bIns="0" rtlCol="0" anchor="t"/>
-          <a:lstStyle/>
-          <a:p>
-            <a:pPr algn="l" indent="0" marL="0">
-              <a:lnSpc>
-                <a:spcPts val="1680"/>
-              </a:lnSpc>
-              <a:spcBef>
-                <a:spcPts val="300"/>
-              </a:spcBef>
-              <a:spcAft>
-                <a:spcPts val="300"/>
-              </a:spcAft>
-              <a:buNone/>
-            </a:pPr>
-            <a:r>
-              <a:rPr lang="en-US" sz="1200" dirty="0">
-                <a:solidFill>
-                  <a:srgbClr val="1C2833"/>
-                </a:solidFill>
-                <a:latin typeface="Arial" pitchFamily="34" charset="0"/>
-                <a:ea typeface="Arial" pitchFamily="34" charset="-122"/>
-                <a:cs typeface="Arial" pitchFamily="34" charset="-120"/>
-              </a:rPr>
-              <a:t>– After 10 min, students re-do </a:t>
-            </a:r>
-            <a:pPr algn="l" indent="0" marL="0">
-              <a:lnSpc>
-                <a:spcPts val="1680"/>
-              </a:lnSpc>
-              <a:spcBef>
-                <a:spcPts val="300"/>
-              </a:spcBef>
-              <a:spcAft>
-                <a:spcPts val="300"/>
-              </a:spcAft>
-              <a:buNone/>
-            </a:pPr>
-            <a:r>
-              <a:rPr lang="en-US" sz="1200" b="1" dirty="0">
-                <a:solidFill>
-                  <a:srgbClr val="1C2833"/>
-                </a:solidFill>
-                <a:latin typeface="Arial" pitchFamily="34" charset="0"/>
-                <a:ea typeface="Arial" pitchFamily="34" charset="-122"/>
-                <a:cs typeface="Arial" pitchFamily="34" charset="-120"/>
-              </a:rPr>
-              <a:t>73 × 11</a:t>
-            </a:r>
-            <a:pPr algn="l" indent="0" marL="0">
-              <a:lnSpc>
-                <a:spcPts val="1680"/>
-              </a:lnSpc>
-              <a:spcBef>
-                <a:spcPts val="300"/>
-              </a:spcBef>
-              <a:spcAft>
-                <a:spcPts val="300"/>
-              </a:spcAft>
-              <a:buNone/>
-            </a:pPr>
-            <a:r>
-              <a:rPr lang="en-US" sz="1200" dirty="0">
-                <a:solidFill>
-                  <a:srgbClr val="1C2833"/>
-                </a:solidFill>
-                <a:latin typeface="Arial" pitchFamily="34" charset="0"/>
-                <a:ea typeface="Arial" pitchFamily="34" charset="-122"/>
-                <a:cs typeface="Arial" pitchFamily="34" charset="-120"/>
-              </a:rPr>
-              <a:t> on the back of the baseline sheet. </a:t>
-            </a:r>
-            <a:pPr algn="l" indent="0" marL="0">
-              <a:lnSpc>
-                <a:spcPts val="1680"/>
-              </a:lnSpc>
-              <a:spcBef>
-                <a:spcPts val="300"/>
-              </a:spcBef>
-              <a:spcAft>
-                <a:spcPts val="300"/>
-              </a:spcAft>
-              <a:buNone/>
-            </a:pPr>
-            <a:r>
-              <a:rPr lang="en-US" sz="1200" i="1" dirty="0">
-                <a:solidFill>
-                  <a:srgbClr val="1C2833"/>
-                </a:solidFill>
-                <a:latin typeface="Arial" pitchFamily="34" charset="0"/>
-                <a:ea typeface="Arial" pitchFamily="34" charset="-122"/>
-                <a:cs typeface="Arial" pitchFamily="34" charset="-120"/>
-              </a:rPr>
-              <a:t>Hmm — 7 + 3 = 10. That's tomorrow's lesson.</a:t>
-            </a:r>
-            <a:endParaRPr lang="en-US" sz="1200" dirty="0"/>
-          </a:p>
-        </p:txBody>
-      </p:sp>
-      <p:sp>
-        <p:nvSpPr>
-          <p:cNvPr id="11" name="Text 9"/>
+          <p:cNvPr id="9" name="Text 7"/>
           <p:cNvSpPr/>
           <p:nvPr/>
         </p:nvSpPr>
@@ -7215,7 +8846,7 @@
                 <a:ea typeface="Georgia" pitchFamily="34" charset="-122"/>
                 <a:cs typeface="Georgia" pitchFamily="34" charset="-120"/>
               </a:rPr>
-              <a:t>Wrap-up (5 min)</a:t>
+              <a:t>Teacher demonstration (12 min) — The trick (cont.)</a:t>
             </a:r>
             <a:endParaRPr lang="en-US" sz="1800" dirty="0"/>
           </a:p>
@@ -7229,13 +8860,66 @@
         </p:nvSpPr>
         <p:spPr>
           <a:xfrm>
-            <a:off x="406301" y="870942"/>
-            <a:ext cx="8498026" cy="426541"/>
-          </a:xfrm>
-          <a:prstGeom prst="rect">
+            <a:off x="406301" y="883593"/>
+            <a:ext cx="8331398" cy="777627"/>
+          </a:xfrm>
+          <a:prstGeom prst="rect">
+            <a:avLst/>
+          </a:prstGeom>
+          <a:solidFill>
+            <a:srgbClr val="F4F8F9"/>
+          </a:solidFill>
+          <a:ln/>
+        </p:spPr>
+        <p:txBody>
+          <a:bodyPr wrap="square" rtlCol="0" anchor="ctr"/>
+          <a:lstStyle/>
+          <a:p>
+            <a:pPr indent="0" marL="0">
+              <a:buNone/>
+            </a:pPr>
+            <a:endParaRPr lang="en-US" dirty="0"/>
+          </a:p>
+        </p:txBody>
+      </p:sp>
+      <p:sp>
+        <p:nvSpPr>
+          <p:cNvPr id="5" name="Shape 3"/>
+          <p:cNvSpPr/>
+          <p:nvPr/>
+        </p:nvSpPr>
+        <p:spPr>
+          <a:xfrm>
+            <a:off x="430113" y="883593"/>
+            <a:ext cx="0" cy="777627"/>
+          </a:xfrm>
+          <a:prstGeom prst="line">
             <a:avLst/>
           </a:prstGeom>
           <a:noFill/>
+          <a:ln w="47625">
+            <a:solidFill>
+              <a:srgbClr val="277884"/>
+            </a:solidFill>
+            <a:prstDash val="solid"/>
+          </a:ln>
+        </p:spPr>
+      </p:sp>
+      <p:sp>
+        <p:nvSpPr>
+          <p:cNvPr id="6" name="Text 4"/>
+          <p:cNvSpPr/>
+          <p:nvPr/>
+        </p:nvSpPr>
+        <p:spPr>
+          <a:xfrm>
+            <a:off x="631627" y="1010543"/>
+            <a:ext cx="8086939" cy="174575"/>
+          </a:xfrm>
+          <a:prstGeom prst="rect">
+            <a:avLst/>
+          </a:prstGeom>
+          <a:noFill/>
           <a:ln/>
         </p:spPr>
         <p:txBody>
@@ -7244,18 +8928,142 @@
           <a:p>
             <a:pPr algn="l" indent="0" marL="0">
               <a:lnSpc>
-                <a:spcPts val="1680"/>
-              </a:lnSpc>
-              <a:spcBef>
-                <a:spcPts val="300"/>
-              </a:spcBef>
-              <a:spcAft>
-                <a:spcPts val="300"/>
-              </a:spcAft>
-              <a:buNone/>
-            </a:pPr>
-            <a:r>
-              <a:rPr lang="en-US" sz="1200" dirty="0">
+                <a:spcPts val="1375"/>
+              </a:lnSpc>
+              <a:buNone/>
+            </a:pPr>
+            <a:r>
+              <a:rPr lang="en-US" sz="1100" dirty="0">
+                <a:solidFill>
+                  <a:srgbClr val="1C2833"/>
+                </a:solidFill>
+                <a:latin typeface="Courier New" pitchFamily="34" charset="0"/>
+                <a:ea typeface="Courier New" pitchFamily="34" charset="-122"/>
+                <a:cs typeface="Courier New" pitchFamily="34" charset="-120"/>
+              </a:rPr>
+              <a:t>Step 1: Write the digits, with a gap:    7  _  3</a:t>
+            </a:r>
+            <a:endParaRPr lang="en-US" sz="1100" dirty="0"/>
+          </a:p>
+        </p:txBody>
+      </p:sp>
+      <p:sp>
+        <p:nvSpPr>
+          <p:cNvPr id="7" name="Text 5"/>
+          <p:cNvSpPr/>
+          <p:nvPr/>
+        </p:nvSpPr>
+        <p:spPr>
+          <a:xfrm>
+            <a:off x="631627" y="1185118"/>
+            <a:ext cx="8086939" cy="174575"/>
+          </a:xfrm>
+          <a:prstGeom prst="rect">
+            <a:avLst/>
+          </a:prstGeom>
+          <a:noFill/>
+          <a:ln/>
+        </p:spPr>
+        <p:txBody>
+          <a:bodyPr wrap="square" lIns="0" tIns="0" rIns="0" bIns="0" rtlCol="0" anchor="t"/>
+          <a:lstStyle/>
+          <a:p>
+            <a:pPr algn="l" indent="0" marL="0">
+              <a:lnSpc>
+                <a:spcPts val="1375"/>
+              </a:lnSpc>
+              <a:buNone/>
+            </a:pPr>
+            <a:r>
+              <a:rPr lang="en-US" sz="1100" dirty="0">
+                <a:solidFill>
+                  <a:srgbClr val="1C2833"/>
+                </a:solidFill>
+                <a:latin typeface="Courier New" pitchFamily="34" charset="0"/>
+                <a:ea typeface="Courier New" pitchFamily="34" charset="-122"/>
+                <a:cs typeface="Courier New" pitchFamily="34" charset="-120"/>
+              </a:rPr>
+              <a:t>Step 2: Add the two digits: 7 + 3 = 10.</a:t>
+            </a:r>
+            <a:endParaRPr lang="en-US" sz="1100" dirty="0"/>
+          </a:p>
+        </p:txBody>
+      </p:sp>
+      <p:sp>
+        <p:nvSpPr>
+          <p:cNvPr id="8" name="Text 6"/>
+          <p:cNvSpPr/>
+          <p:nvPr/>
+        </p:nvSpPr>
+        <p:spPr>
+          <a:xfrm>
+            <a:off x="631627" y="1359694"/>
+            <a:ext cx="8086939" cy="174575"/>
+          </a:xfrm>
+          <a:prstGeom prst="rect">
+            <a:avLst/>
+          </a:prstGeom>
+          <a:noFill/>
+          <a:ln/>
+        </p:spPr>
+        <p:txBody>
+          <a:bodyPr wrap="square" lIns="0" tIns="0" rIns="0" bIns="0" rtlCol="0" anchor="t"/>
+          <a:lstStyle/>
+          <a:p>
+            <a:pPr algn="l" indent="0" marL="0">
+              <a:lnSpc>
+                <a:spcPts val="1375"/>
+              </a:lnSpc>
+              <a:buNone/>
+            </a:pPr>
+            <a:r>
+              <a:rPr lang="en-US" sz="1100" dirty="0">
+                <a:solidFill>
+                  <a:srgbClr val="1C2833"/>
+                </a:solidFill>
+                <a:latin typeface="Courier New" pitchFamily="34" charset="0"/>
+                <a:ea typeface="Courier New" pitchFamily="34" charset="-122"/>
+                <a:cs typeface="Courier New" pitchFamily="34" charset="-120"/>
+              </a:rPr>
+              <a:t>Wait — that's the carry case. Park it.</a:t>
+            </a:r>
+            <a:endParaRPr lang="en-US" sz="1100" dirty="0"/>
+          </a:p>
+        </p:txBody>
+      </p:sp>
+      <p:sp>
+        <p:nvSpPr>
+          <p:cNvPr id="9" name="Text 7"/>
+          <p:cNvSpPr/>
+          <p:nvPr/>
+        </p:nvSpPr>
+        <p:spPr>
+          <a:xfrm>
+            <a:off x="634901" y="1762720"/>
+            <a:ext cx="8102798" cy="281880"/>
+          </a:xfrm>
+          <a:prstGeom prst="rect">
+            <a:avLst/>
+          </a:prstGeom>
+          <a:noFill/>
+          <a:ln/>
+        </p:spPr>
+        <p:txBody>
+          <a:bodyPr wrap="square" lIns="0" tIns="0" rIns="0" bIns="0" rtlCol="0" anchor="t"/>
+          <a:lstStyle/>
+          <a:p>
+            <a:pPr algn="l" marL="342900" indent="-342900">
+              <a:lnSpc>
+                <a:spcPts val="1620"/>
+              </a:lnSpc>
+              <a:spcAft>
+                <a:spcPts val="300"/>
+              </a:spcAft>
+              <a:buSzPct val="100000"/>
+              <a:buChar char="•"/>
+            </a:pPr>
+            <a:r>
+              <a:rPr lang="en-US" sz="1200" i="1" dirty="0">
                 <a:solidFill>
                   <a:srgbClr val="1C2833"/>
                 </a:solidFill>
@@ -7263,22 +9071,19 @@
                 <a:ea typeface="Arial" pitchFamily="34" charset="-122"/>
                 <a:cs typeface="Arial" pitchFamily="34" charset="-120"/>
               </a:rPr>
-              <a:t>– Show of hands: who finished all 10 in under 30 seconds? (Most will.) – Tease tomorrow: </a:t>
-            </a:r>
-            <a:pPr algn="l" indent="0" marL="0">
-              <a:lnSpc>
-                <a:spcPts val="1680"/>
-              </a:lnSpc>
-              <a:spcBef>
-                <a:spcPts val="300"/>
-              </a:spcBef>
-              <a:spcAft>
-                <a:spcPts val="300"/>
-              </a:spcAft>
-              <a:buNone/>
-            </a:pPr>
-            <a:r>
-              <a:rPr lang="en-US" sz="1200" i="1" dirty="0">
+              <a:t>Reset. Different number first.</a:t>
+            </a:r>
+            <a:pPr algn="l" indent="0" marL="0">
+              <a:lnSpc>
+                <a:spcPts val="1620"/>
+              </a:lnSpc>
+              <a:spcAft>
+                <a:spcPts val="300"/>
+              </a:spcAft>
+              <a:buNone/>
+            </a:pPr>
+            <a:r>
+              <a:rPr lang="en-US" sz="1200" dirty="0">
                 <a:solidFill>
                   <a:srgbClr val="1C2833"/>
                 </a:solidFill>
@@ -7286,7 +9091,47 @@
                 <a:ea typeface="Arial" pitchFamily="34" charset="-122"/>
                 <a:cs typeface="Arial" pitchFamily="34" charset="-120"/>
               </a:rPr>
-              <a:t>"73 × 11 broke the rule because 7 + 3 = 10 and you can't write 10 in the middle of a number. Tomorrow — the carry case."</a:t>
+              <a:t> Try </a:t>
+            </a:r>
+            <a:pPr algn="l" indent="0" marL="0">
+              <a:lnSpc>
+                <a:spcPts val="1620"/>
+              </a:lnSpc>
+              <a:spcAft>
+                <a:spcPts val="300"/>
+              </a:spcAft>
+              <a:buNone/>
+            </a:pPr>
+            <a:r>
+              <a:rPr lang="en-US" sz="1200" b="1" dirty="0">
+                <a:solidFill>
+                  <a:srgbClr val="1C2833"/>
+                </a:solidFill>
+                <a:latin typeface="Arial" pitchFamily="34" charset="0"/>
+                <a:ea typeface="Arial" pitchFamily="34" charset="-122"/>
+                <a:cs typeface="Arial" pitchFamily="34" charset="-120"/>
+              </a:rPr>
+              <a:t>23 × 11</a:t>
+            </a:r>
+            <a:pPr algn="l" indent="0" marL="0">
+              <a:lnSpc>
+                <a:spcPts val="1620"/>
+              </a:lnSpc>
+              <a:spcAft>
+                <a:spcPts val="300"/>
+              </a:spcAft>
+              <a:buNone/>
+            </a:pPr>
+            <a:r>
+              <a:rPr lang="en-US" sz="1200" dirty="0">
+                <a:solidFill>
+                  <a:srgbClr val="1C2833"/>
+                </a:solidFill>
+                <a:latin typeface="Arial" pitchFamily="34" charset="0"/>
+                <a:ea typeface="Arial" pitchFamily="34" charset="-122"/>
+                <a:cs typeface="Arial" pitchFamily="34" charset="-120"/>
+              </a:rPr>
+              <a:t>:</a:t>
             </a:r>
             <a:endParaRPr lang="en-US" sz="1200" dirty="0"/>
           </a:p>
@@ -7294,7 +9139,7 @@
       </p:sp>
       <p:sp>
         <p:nvSpPr>
-          <p:cNvPr id="5" name="Text 3"/>
+          <p:cNvPr id="10" name="Text 8"/>
           <p:cNvSpPr/>
           <p:nvPr/>
         </p:nvSpPr>
